--- a/docs/SpeciesViewer architecture pictures.pptx
+++ b/docs/SpeciesViewer architecture pictures.pptx
@@ -5,7 +5,7 @@
     <p:sldMasterId id="2147483648" r:id="rId1"/>
   </p:sldMasterIdLst>
   <p:notesMasterIdLst>
-    <p:notesMasterId r:id="rId9"/>
+    <p:notesMasterId r:id="rId11"/>
   </p:notesMasterIdLst>
   <p:sldIdLst>
     <p:sldId id="256" r:id="rId2"/>
@@ -15,6 +15,8 @@
     <p:sldId id="260" r:id="rId6"/>
     <p:sldId id="261" r:id="rId7"/>
     <p:sldId id="262" r:id="rId8"/>
+    <p:sldId id="263" r:id="rId9"/>
+    <p:sldId id="264" r:id="rId10"/>
   </p:sldIdLst>
   <p:sldSz cx="12192000" cy="6858000"/>
   <p:notesSz cx="6858000" cy="9144000"/>
@@ -113,6 +115,11 @@
       </a:defRPr>
     </a:lvl9pPr>
   </p:defaultTextStyle>
+  <p:extLst>
+    <p:ext uri="{EFAFB233-063F-42B5-8137-9DF3F51BA10A}">
+      <p15:sldGuideLst xmlns:p15="http://schemas.microsoft.com/office/powerpoint/2012/main"/>
+    </p:ext>
+  </p:extLst>
 </p:presentation>
 </file>
 
@@ -3755,7 +3762,7 @@
           <a:p>
             <a:fld id="{76D4F64B-0D6B-41C4-960F-8BF36568A172}" type="datetimeFigureOut">
               <a:rPr lang="nl-NL" smtClean="0"/>
-              <a:t>24-9-2024</a:t>
+              <a:t>4-10-2024</a:t>
             </a:fld>
             <a:endParaRPr lang="nl-NL"/>
           </a:p>
@@ -4567,6 +4574,90 @@
 </p:notes>
 </file>
 
+<file path=ppt/notesSlides/notesSlide3.xml><?xml version="1.0" encoding="utf-8"?>
+<p:notes xmlns:a="http://schemas.openxmlformats.org/drawingml/2006/main" xmlns:r="http://schemas.openxmlformats.org/officeDocument/2006/relationships" xmlns:p="http://schemas.openxmlformats.org/presentationml/2006/main">
+  <p:cSld>
+    <p:spTree>
+      <p:nvGrpSpPr>
+        <p:cNvPr id="1" name=""/>
+        <p:cNvGrpSpPr/>
+        <p:nvPr/>
+      </p:nvGrpSpPr>
+      <p:grpSpPr>
+        <a:xfrm>
+          <a:off x="0" y="0"/>
+          <a:ext cx="0" cy="0"/>
+          <a:chOff x="0" y="0"/>
+          <a:chExt cx="0" cy="0"/>
+        </a:xfrm>
+      </p:grpSpPr>
+      <p:sp>
+        <p:nvSpPr>
+          <p:cNvPr id="2" name="Slide Image Placeholder 1"/>
+          <p:cNvSpPr>
+            <a:spLocks noGrp="1" noRot="1" noChangeAspect="1"/>
+          </p:cNvSpPr>
+          <p:nvPr>
+            <p:ph type="sldImg"/>
+          </p:nvPr>
+        </p:nvSpPr>
+        <p:spPr/>
+      </p:sp>
+      <p:sp>
+        <p:nvSpPr>
+          <p:cNvPr id="3" name="Notes Placeholder 2"/>
+          <p:cNvSpPr>
+            <a:spLocks noGrp="1"/>
+          </p:cNvSpPr>
+          <p:nvPr>
+            <p:ph type="body" idx="1"/>
+          </p:nvPr>
+        </p:nvSpPr>
+        <p:spPr/>
+        <p:txBody>
+          <a:bodyPr/>
+          <a:lstStyle/>
+          <a:p>
+            <a:endParaRPr lang="nl-NL" dirty="0"/>
+          </a:p>
+        </p:txBody>
+      </p:sp>
+      <p:sp>
+        <p:nvSpPr>
+          <p:cNvPr id="4" name="Slide Number Placeholder 3"/>
+          <p:cNvSpPr>
+            <a:spLocks noGrp="1"/>
+          </p:cNvSpPr>
+          <p:nvPr>
+            <p:ph type="sldNum" sz="quarter" idx="5"/>
+          </p:nvPr>
+        </p:nvSpPr>
+        <p:spPr/>
+        <p:txBody>
+          <a:bodyPr/>
+          <a:lstStyle/>
+          <a:p>
+            <a:fld id="{5F1F0CA7-94A2-42DA-B20C-BBBE621325FF}" type="slidenum">
+              <a:rPr lang="nl-NL" smtClean="0"/>
+              <a:t>9</a:t>
+            </a:fld>
+            <a:endParaRPr lang="nl-NL"/>
+          </a:p>
+        </p:txBody>
+      </p:sp>
+    </p:spTree>
+    <p:extLst>
+      <p:ext uri="{BB962C8B-B14F-4D97-AF65-F5344CB8AC3E}">
+        <p14:creationId xmlns:p14="http://schemas.microsoft.com/office/powerpoint/2010/main" val="1584562310"/>
+      </p:ext>
+    </p:extLst>
+  </p:cSld>
+  <p:clrMapOvr>
+    <a:masterClrMapping/>
+  </p:clrMapOvr>
+</p:notes>
+</file>
+
 <file path=ppt/slideLayouts/slideLayout1.xml><?xml version="1.0" encoding="utf-8"?>
 <p:sldLayout xmlns:a="http://schemas.openxmlformats.org/drawingml/2006/main" xmlns:r="http://schemas.openxmlformats.org/officeDocument/2006/relationships" xmlns:p="http://schemas.openxmlformats.org/presentationml/2006/main" type="title" preserve="1">
   <p:cSld name="Title Slide">
@@ -4716,7 +4807,7 @@
           <a:p>
             <a:fld id="{A7A69C3B-192C-4ABE-8AD2-9BDA44DCF295}" type="datetimeFigureOut">
               <a:rPr lang="nl-NL" smtClean="0"/>
-              <a:t>24-9-2024</a:t>
+              <a:t>4-10-2024</a:t>
             </a:fld>
             <a:endParaRPr lang="nl-NL"/>
           </a:p>
@@ -4916,7 +5007,7 @@
           <a:p>
             <a:fld id="{A7A69C3B-192C-4ABE-8AD2-9BDA44DCF295}" type="datetimeFigureOut">
               <a:rPr lang="nl-NL" smtClean="0"/>
-              <a:t>24-9-2024</a:t>
+              <a:t>4-10-2024</a:t>
             </a:fld>
             <a:endParaRPr lang="nl-NL"/>
           </a:p>
@@ -5126,7 +5217,7 @@
           <a:p>
             <a:fld id="{A7A69C3B-192C-4ABE-8AD2-9BDA44DCF295}" type="datetimeFigureOut">
               <a:rPr lang="nl-NL" smtClean="0"/>
-              <a:t>24-9-2024</a:t>
+              <a:t>4-10-2024</a:t>
             </a:fld>
             <a:endParaRPr lang="nl-NL"/>
           </a:p>
@@ -5326,7 +5417,7 @@
           <a:p>
             <a:fld id="{A7A69C3B-192C-4ABE-8AD2-9BDA44DCF295}" type="datetimeFigureOut">
               <a:rPr lang="nl-NL" smtClean="0"/>
-              <a:t>24-9-2024</a:t>
+              <a:t>4-10-2024</a:t>
             </a:fld>
             <a:endParaRPr lang="nl-NL"/>
           </a:p>
@@ -5602,7 +5693,7 @@
           <a:p>
             <a:fld id="{A7A69C3B-192C-4ABE-8AD2-9BDA44DCF295}" type="datetimeFigureOut">
               <a:rPr lang="nl-NL" smtClean="0"/>
-              <a:t>24-9-2024</a:t>
+              <a:t>4-10-2024</a:t>
             </a:fld>
             <a:endParaRPr lang="nl-NL"/>
           </a:p>
@@ -5870,7 +5961,7 @@
           <a:p>
             <a:fld id="{A7A69C3B-192C-4ABE-8AD2-9BDA44DCF295}" type="datetimeFigureOut">
               <a:rPr lang="nl-NL" smtClean="0"/>
-              <a:t>24-9-2024</a:t>
+              <a:t>4-10-2024</a:t>
             </a:fld>
             <a:endParaRPr lang="nl-NL"/>
           </a:p>
@@ -6285,7 +6376,7 @@
           <a:p>
             <a:fld id="{A7A69C3B-192C-4ABE-8AD2-9BDA44DCF295}" type="datetimeFigureOut">
               <a:rPr lang="nl-NL" smtClean="0"/>
-              <a:t>24-9-2024</a:t>
+              <a:t>4-10-2024</a:t>
             </a:fld>
             <a:endParaRPr lang="nl-NL"/>
           </a:p>
@@ -6427,7 +6518,7 @@
           <a:p>
             <a:fld id="{A7A69C3B-192C-4ABE-8AD2-9BDA44DCF295}" type="datetimeFigureOut">
               <a:rPr lang="nl-NL" smtClean="0"/>
-              <a:t>24-9-2024</a:t>
+              <a:t>4-10-2024</a:t>
             </a:fld>
             <a:endParaRPr lang="nl-NL"/>
           </a:p>
@@ -6540,7 +6631,7 @@
           <a:p>
             <a:fld id="{A7A69C3B-192C-4ABE-8AD2-9BDA44DCF295}" type="datetimeFigureOut">
               <a:rPr lang="nl-NL" smtClean="0"/>
-              <a:t>24-9-2024</a:t>
+              <a:t>4-10-2024</a:t>
             </a:fld>
             <a:endParaRPr lang="nl-NL"/>
           </a:p>
@@ -6853,7 +6944,7 @@
           <a:p>
             <a:fld id="{A7A69C3B-192C-4ABE-8AD2-9BDA44DCF295}" type="datetimeFigureOut">
               <a:rPr lang="nl-NL" smtClean="0"/>
-              <a:t>24-9-2024</a:t>
+              <a:t>4-10-2024</a:t>
             </a:fld>
             <a:endParaRPr lang="nl-NL"/>
           </a:p>
@@ -7142,7 +7233,7 @@
           <a:p>
             <a:fld id="{A7A69C3B-192C-4ABE-8AD2-9BDA44DCF295}" type="datetimeFigureOut">
               <a:rPr lang="nl-NL" smtClean="0"/>
-              <a:t>24-9-2024</a:t>
+              <a:t>4-10-2024</a:t>
             </a:fld>
             <a:endParaRPr lang="nl-NL"/>
           </a:p>
@@ -7385,7 +7476,7 @@
           <a:p>
             <a:fld id="{A7A69C3B-192C-4ABE-8AD2-9BDA44DCF295}" type="datetimeFigureOut">
               <a:rPr lang="nl-NL" smtClean="0"/>
-              <a:t>24-9-2024</a:t>
+              <a:t>4-10-2024</a:t>
             </a:fld>
             <a:endParaRPr lang="nl-NL"/>
           </a:p>
@@ -10857,7 +10948,9 @@
         </p:nvSpPr>
         <p:spPr/>
         <p:txBody>
-          <a:bodyPr/>
+          <a:bodyPr>
+            <a:normAutofit fontScale="92500"/>
+          </a:bodyPr>
           <a:lstStyle/>
           <a:p>
             <a:pPr marL="0" indent="0">
@@ -10971,14 +11064,6 @@
             </a:r>
             <a:r>
               <a:rPr lang="nl-NL" dirty="0"/>
-              <a:t> </a:t>
-            </a:r>
-            <a:r>
-              <a:rPr lang="nl-NL" dirty="0" err="1"/>
-              <a:t>there</a:t>
-            </a:r>
-            <a:r>
-              <a:rPr lang="nl-NL" dirty="0"/>
               <a:t> a </a:t>
             </a:r>
             <a:r>
@@ -10998,6 +11083,10 @@
                 <a:latin typeface="Consolas" panose="020B0609020204030204" pitchFamily="49" charset="0"/>
               </a:rPr>
               <a:t> </a:t>
+            </a:r>
+            <a:r>
+              <a:rPr lang="nl-NL" dirty="0"/>
+              <a:t>is </a:t>
             </a:r>
             <a:r>
               <a:rPr lang="nl-NL" dirty="0" err="1"/>
@@ -11158,6 +11247,20 @@
               <a:buNone/>
             </a:pPr>
             <a:r>
+              <a:rPr lang="pt-BR" sz="2400" dirty="0">
+                <a:solidFill>
+                  <a:srgbClr val="CCCCCC"/>
+                </a:solidFill>
+                <a:latin typeface="Consolas" panose="020B0609020204030204" pitchFamily="49" charset="0"/>
+              </a:rPr>
+              <a:t>     .. Or explicit in svconfig.ini</a:t>
+            </a:r>
+          </a:p>
+          <a:p>
+            <a:pPr marL="0" indent="0">
+              <a:buNone/>
+            </a:pPr>
+            <a:r>
               <a:rPr lang="nl-NL" sz="2400" dirty="0" err="1">
                 <a:solidFill>
                   <a:srgbClr val="569CD6"/>
@@ -11182,7 +11285,7 @@
                 </a:solidFill>
                 <a:latin typeface="Consolas" panose="020B0609020204030204" pitchFamily="49" charset="0"/>
               </a:rPr>
-              <a:t>trip.ini:repositorybanner</a:t>
+              <a:t>trip.ini:trip_banner</a:t>
             </a:r>
             <a:endParaRPr lang="nl-NL" sz="2400" dirty="0">
               <a:solidFill>
@@ -11190,6 +11293,132 @@
               </a:solidFill>
               <a:latin typeface="Consolas" panose="020B0609020204030204" pitchFamily="49" charset="0"/>
             </a:endParaRPr>
+          </a:p>
+          <a:p>
+            <a:pPr marL="0" indent="0">
+              <a:buNone/>
+            </a:pPr>
+            <a:r>
+              <a:rPr lang="pt-BR" sz="2400" dirty="0">
+                <a:solidFill>
+                  <a:srgbClr val="CCCCCC"/>
+                </a:solidFill>
+                <a:latin typeface="Consolas" panose="020B0609020204030204" pitchFamily="49" charset="0"/>
+              </a:rPr>
+              <a:t>      .. Or “hardcoded” in installation section</a:t>
+            </a:r>
+          </a:p>
+          <a:p>
+            <a:pPr marL="0" indent="0">
+              <a:buNone/>
+            </a:pPr>
+            <a:r>
+              <a:rPr lang="nl-NL" sz="2400" dirty="0" err="1">
+                <a:solidFill>
+                  <a:srgbClr val="569CD6"/>
+                </a:solidFill>
+                <a:latin typeface="Consolas" panose="020B0609020204030204" pitchFamily="49" charset="0"/>
+              </a:rPr>
+              <a:t>RepositoryPicture</a:t>
+            </a:r>
+            <a:r>
+              <a:rPr lang="nl-NL" sz="2400" dirty="0">
+                <a:solidFill>
+                  <a:srgbClr val="569CD6"/>
+                </a:solidFill>
+                <a:latin typeface="Consolas" panose="020B0609020204030204" pitchFamily="49" charset="0"/>
+              </a:rPr>
+              <a:t> = </a:t>
+            </a:r>
+            <a:r>
+              <a:rPr lang="nl-NL" sz="2400" dirty="0" err="1">
+                <a:solidFill>
+                  <a:srgbClr val="569CD6"/>
+                </a:solidFill>
+                <a:latin typeface="Consolas" panose="020B0609020204030204" pitchFamily="49" charset="0"/>
+              </a:rPr>
+              <a:t>trip.ini:trip_picture</a:t>
+            </a:r>
+            <a:r>
+              <a:rPr lang="nl-NL" sz="2400" dirty="0">
+                <a:solidFill>
+                  <a:srgbClr val="569CD6"/>
+                </a:solidFill>
+                <a:latin typeface="Consolas" panose="020B0609020204030204" pitchFamily="49" charset="0"/>
+              </a:rPr>
+              <a:t> </a:t>
+            </a:r>
+            <a:br>
+              <a:rPr lang="nl-NL" sz="2400" dirty="0">
+                <a:solidFill>
+                  <a:srgbClr val="569CD6"/>
+                </a:solidFill>
+                <a:latin typeface="Consolas" panose="020B0609020204030204" pitchFamily="49" charset="0"/>
+              </a:rPr>
+            </a:br>
+            <a:r>
+              <a:rPr lang="nl-NL" sz="2400" dirty="0">
+                <a:solidFill>
+                  <a:srgbClr val="569CD6"/>
+                </a:solidFill>
+                <a:latin typeface="Consolas" panose="020B0609020204030204" pitchFamily="49" charset="0"/>
+              </a:rPr>
+              <a:t>                    (</a:t>
+            </a:r>
+            <a:r>
+              <a:rPr lang="nl-NL" sz="2400" dirty="0" err="1">
+                <a:solidFill>
+                  <a:srgbClr val="569CD6"/>
+                </a:solidFill>
+                <a:latin typeface="Consolas" panose="020B0609020204030204" pitchFamily="49" charset="0"/>
+              </a:rPr>
+              <a:t>path</a:t>
+            </a:r>
+            <a:r>
+              <a:rPr lang="nl-NL" sz="2400" dirty="0">
+                <a:solidFill>
+                  <a:srgbClr val="569CD6"/>
+                </a:solidFill>
+                <a:latin typeface="Consolas" panose="020B0609020204030204" pitchFamily="49" charset="0"/>
+              </a:rPr>
+              <a:t> </a:t>
+            </a:r>
+            <a:r>
+              <a:rPr lang="nl-NL" sz="2400" dirty="0" err="1">
+                <a:solidFill>
+                  <a:srgbClr val="569CD6"/>
+                </a:solidFill>
+                <a:latin typeface="Consolas" panose="020B0609020204030204" pitchFamily="49" charset="0"/>
+              </a:rPr>
+              <a:t>relative</a:t>
+            </a:r>
+            <a:r>
+              <a:rPr lang="nl-NL" sz="2400" dirty="0">
+                <a:solidFill>
+                  <a:srgbClr val="569CD6"/>
+                </a:solidFill>
+                <a:latin typeface="Consolas" panose="020B0609020204030204" pitchFamily="49" charset="0"/>
+              </a:rPr>
+              <a:t> </a:t>
+            </a:r>
+            <a:r>
+              <a:rPr lang="nl-NL" sz="2400" dirty="0" err="1">
+                <a:solidFill>
+                  <a:srgbClr val="569CD6"/>
+                </a:solidFill>
+                <a:latin typeface="Consolas" panose="020B0609020204030204" pitchFamily="49" charset="0"/>
+              </a:rPr>
+              <a:t>to</a:t>
+            </a:r>
+            <a:r>
+              <a:rPr lang="nl-NL" sz="2400" dirty="0">
+                <a:solidFill>
+                  <a:srgbClr val="569CD6"/>
+                </a:solidFill>
+                <a:latin typeface="Consolas" panose="020B0609020204030204" pitchFamily="49" charset="0"/>
+              </a:rPr>
+              <a:t> web/)</a:t>
+            </a:r>
           </a:p>
           <a:p>
             <a:pPr marL="0" indent="0">
@@ -11231,6 +11460,946 @@
     <p:extLst>
       <p:ext uri="{BB962C8B-B14F-4D97-AF65-F5344CB8AC3E}">
         <p14:creationId xmlns:p14="http://schemas.microsoft.com/office/powerpoint/2010/main" val="371199090"/>
+      </p:ext>
+    </p:extLst>
+  </p:cSld>
+  <p:clrMapOvr>
+    <a:masterClrMapping/>
+  </p:clrMapOvr>
+</p:sld>
+</file>
+
+<file path=ppt/slides/slide8.xml><?xml version="1.0" encoding="utf-8"?>
+<p:sld xmlns:a="http://schemas.openxmlformats.org/drawingml/2006/main" xmlns:r="http://schemas.openxmlformats.org/officeDocument/2006/relationships" xmlns:p="http://schemas.openxmlformats.org/presentationml/2006/main">
+  <p:cSld>
+    <p:spTree>
+      <p:nvGrpSpPr>
+        <p:cNvPr id="1" name=""/>
+        <p:cNvGrpSpPr/>
+        <p:nvPr/>
+      </p:nvGrpSpPr>
+      <p:grpSpPr>
+        <a:xfrm>
+          <a:off x="0" y="0"/>
+          <a:ext cx="0" cy="0"/>
+          <a:chOff x="0" y="0"/>
+          <a:chExt cx="0" cy="0"/>
+        </a:xfrm>
+      </p:grpSpPr>
+      <p:sp>
+        <p:nvSpPr>
+          <p:cNvPr id="2" name="Title 1">
+            <a:extLst>
+              <a:ext uri="{FF2B5EF4-FFF2-40B4-BE49-F238E27FC236}">
+                <a16:creationId xmlns:a16="http://schemas.microsoft.com/office/drawing/2014/main" id="{F9A6DE58-BFB7-6B9C-6640-8EF1CEC4419C}"/>
+              </a:ext>
+            </a:extLst>
+          </p:cNvPr>
+          <p:cNvSpPr>
+            <a:spLocks noGrp="1"/>
+          </p:cNvSpPr>
+          <p:nvPr>
+            <p:ph type="title"/>
+          </p:nvPr>
+        </p:nvSpPr>
+        <p:spPr/>
+        <p:txBody>
+          <a:bodyPr/>
+          <a:lstStyle/>
+          <a:p>
+            <a:r>
+              <a:rPr lang="en-GB" dirty="0"/>
+              <a:t>sv1MakeRepository</a:t>
+            </a:r>
+            <a:endParaRPr lang="nl-NL" dirty="0"/>
+          </a:p>
+        </p:txBody>
+      </p:sp>
+      <p:sp>
+        <p:nvSpPr>
+          <p:cNvPr id="3" name="Content Placeholder 2">
+            <a:extLst>
+              <a:ext uri="{FF2B5EF4-FFF2-40B4-BE49-F238E27FC236}">
+                <a16:creationId xmlns:a16="http://schemas.microsoft.com/office/drawing/2014/main" id="{B0567915-AB88-259F-6AB9-32F3C3DAD948}"/>
+              </a:ext>
+            </a:extLst>
+          </p:cNvPr>
+          <p:cNvSpPr>
+            <a:spLocks noGrp="1"/>
+          </p:cNvSpPr>
+          <p:nvPr>
+            <p:ph idx="1"/>
+          </p:nvPr>
+        </p:nvSpPr>
+        <p:spPr/>
+        <p:txBody>
+          <a:bodyPr>
+            <a:normAutofit/>
+          </a:bodyPr>
+          <a:lstStyle/>
+          <a:p>
+            <a:pPr marL="0" indent="0">
+              <a:buNone/>
+            </a:pPr>
+            <a:r>
+              <a:rPr lang="en-GB" dirty="0"/>
+              <a:t>Create a new repository with standard directory and FTP structures</a:t>
+            </a:r>
+          </a:p>
+          <a:p>
+            <a:pPr marL="0" indent="0">
+              <a:buNone/>
+            </a:pPr>
+            <a:r>
+              <a:rPr lang="en-GB" dirty="0"/>
+              <a:t>Pre-</a:t>
+            </a:r>
+            <a:r>
+              <a:rPr lang="en-GB" dirty="0" err="1"/>
+              <a:t>reqs</a:t>
+            </a:r>
+            <a:r>
+              <a:rPr lang="en-GB" dirty="0"/>
+              <a:t>:</a:t>
+            </a:r>
+          </a:p>
+          <a:p>
+            <a:r>
+              <a:rPr lang="en-GB" dirty="0"/>
+              <a:t>svconfig.ini required</a:t>
+            </a:r>
+          </a:p>
+          <a:p>
+            <a:r>
+              <a:rPr lang="en-GB" dirty="0"/>
+              <a:t>Directory best made with trip.ini file in the root</a:t>
+            </a:r>
+          </a:p>
+          <a:p>
+            <a:endParaRPr lang="en-GB" dirty="0"/>
+          </a:p>
+          <a:p>
+            <a:pPr marL="0" indent="0">
+              <a:buNone/>
+            </a:pPr>
+            <a:endParaRPr lang="en-GB" dirty="0"/>
+          </a:p>
+          <a:p>
+            <a:endParaRPr lang="en-GB" dirty="0"/>
+          </a:p>
+          <a:p>
+            <a:endParaRPr lang="nl-NL" dirty="0"/>
+          </a:p>
+        </p:txBody>
+      </p:sp>
+    </p:spTree>
+    <p:extLst>
+      <p:ext uri="{BB962C8B-B14F-4D97-AF65-F5344CB8AC3E}">
+        <p14:creationId xmlns:p14="http://schemas.microsoft.com/office/powerpoint/2010/main" val="1443893975"/>
+      </p:ext>
+    </p:extLst>
+  </p:cSld>
+  <p:clrMapOvr>
+    <a:masterClrMapping/>
+  </p:clrMapOvr>
+</p:sld>
+</file>
+
+<file path=ppt/slides/slide9.xml><?xml version="1.0" encoding="utf-8"?>
+<p:sld xmlns:a="http://schemas.openxmlformats.org/drawingml/2006/main" xmlns:r="http://schemas.openxmlformats.org/officeDocument/2006/relationships" xmlns:p="http://schemas.openxmlformats.org/presentationml/2006/main">
+  <p:cSld>
+    <p:spTree>
+      <p:nvGrpSpPr>
+        <p:cNvPr id="1" name=""/>
+        <p:cNvGrpSpPr/>
+        <p:nvPr/>
+      </p:nvGrpSpPr>
+      <p:grpSpPr>
+        <a:xfrm>
+          <a:off x="0" y="0"/>
+          <a:ext cx="0" cy="0"/>
+          <a:chOff x="0" y="0"/>
+          <a:chExt cx="0" cy="0"/>
+        </a:xfrm>
+      </p:grpSpPr>
+      <p:graphicFrame>
+        <p:nvGraphicFramePr>
+          <p:cNvPr id="4" name="Content Placeholder 3">
+            <a:extLst>
+              <a:ext uri="{FF2B5EF4-FFF2-40B4-BE49-F238E27FC236}">
+                <a16:creationId xmlns:a16="http://schemas.microsoft.com/office/drawing/2014/main" id="{C0E71C7F-F767-0336-6436-4FECD5351309}"/>
+              </a:ext>
+            </a:extLst>
+          </p:cNvPr>
+          <p:cNvGraphicFramePr>
+            <a:graphicFrameLocks noGrp="1"/>
+          </p:cNvGraphicFramePr>
+          <p:nvPr>
+            <p:ph idx="1"/>
+            <p:extLst>
+              <p:ext uri="{D42A27DB-BD31-4B8C-83A1-F6EECF244321}">
+                <p14:modId xmlns:p14="http://schemas.microsoft.com/office/powerpoint/2010/main" val="2296702942"/>
+              </p:ext>
+            </p:extLst>
+          </p:nvPr>
+        </p:nvGraphicFramePr>
+        <p:xfrm>
+          <a:off x="617220" y="992108"/>
+          <a:ext cx="11064240" cy="5496560"/>
+        </p:xfrm>
+        <a:graphic>
+          <a:graphicData uri="http://schemas.openxmlformats.org/drawingml/2006/table">
+            <a:tbl>
+              <a:tblPr firstRow="1" bandRow="1">
+                <a:tableStyleId>{5C22544A-7EE6-4342-B048-85BDC9FD1C3A}</a:tableStyleId>
+              </a:tblPr>
+              <a:tblGrid>
+                <a:gridCol w="3139440">
+                  <a:extLst>
+                    <a:ext uri="{9D8B030D-6E8A-4147-A177-3AD203B41FA5}">
+                      <a16:colId xmlns:a16="http://schemas.microsoft.com/office/drawing/2014/main" val="2840247616"/>
+                    </a:ext>
+                  </a:extLst>
+                </a:gridCol>
+                <a:gridCol w="1036320">
+                  <a:extLst>
+                    <a:ext uri="{9D8B030D-6E8A-4147-A177-3AD203B41FA5}">
+                      <a16:colId xmlns:a16="http://schemas.microsoft.com/office/drawing/2014/main" val="3158828686"/>
+                    </a:ext>
+                  </a:extLst>
+                </a:gridCol>
+                <a:gridCol w="1036320">
+                  <a:extLst>
+                    <a:ext uri="{9D8B030D-6E8A-4147-A177-3AD203B41FA5}">
+                      <a16:colId xmlns:a16="http://schemas.microsoft.com/office/drawing/2014/main" val="3723561695"/>
+                    </a:ext>
+                  </a:extLst>
+                </a:gridCol>
+                <a:gridCol w="5852160">
+                  <a:extLst>
+                    <a:ext uri="{9D8B030D-6E8A-4147-A177-3AD203B41FA5}">
+                      <a16:colId xmlns:a16="http://schemas.microsoft.com/office/drawing/2014/main" val="3936547858"/>
+                    </a:ext>
+                  </a:extLst>
+                </a:gridCol>
+              </a:tblGrid>
+              <a:tr h="370840">
+                <a:tc>
+                  <a:txBody>
+                    <a:bodyPr/>
+                    <a:lstStyle/>
+                    <a:p>
+                      <a:r>
+                        <a:rPr lang="en-GB" dirty="0"/>
+                        <a:t>Utility</a:t>
+                      </a:r>
+                      <a:endParaRPr lang="nl-NL" dirty="0"/>
+                    </a:p>
+                  </a:txBody>
+                  <a:tcPr/>
+                </a:tc>
+                <a:tc>
+                  <a:txBody>
+                    <a:bodyPr/>
+                    <a:lstStyle/>
+                    <a:p>
+                      <a:r>
+                        <a:rPr lang="en-GB" dirty="0"/>
+                        <a:t>Works on </a:t>
+                      </a:r>
+                      <a:r>
+                        <a:rPr lang="en-GB" dirty="0" err="1"/>
+                        <a:t>ini</a:t>
+                      </a:r>
+                      <a:endParaRPr lang="nl-NL" dirty="0"/>
+                    </a:p>
+                  </a:txBody>
+                  <a:tcPr/>
+                </a:tc>
+                <a:tc>
+                  <a:txBody>
+                    <a:bodyPr/>
+                    <a:lstStyle/>
+                    <a:p>
+                      <a:r>
+                        <a:rPr lang="en-GB" dirty="0"/>
+                        <a:t>Needs edits?*</a:t>
+                      </a:r>
+                      <a:endParaRPr lang="nl-NL" dirty="0"/>
+                    </a:p>
+                  </a:txBody>
+                  <a:tcPr/>
+                </a:tc>
+                <a:tc>
+                  <a:txBody>
+                    <a:bodyPr/>
+                    <a:lstStyle/>
+                    <a:p>
+                      <a:r>
+                        <a:rPr lang="en-GB" dirty="0"/>
+                        <a:t>Purpose</a:t>
+                      </a:r>
+                      <a:endParaRPr lang="nl-NL" dirty="0"/>
+                    </a:p>
+                  </a:txBody>
+                  <a:tcPr/>
+                </a:tc>
+                <a:extLst>
+                  <a:ext uri="{0D108BD9-81ED-4DB2-BD59-A6C34878D82A}">
+                    <a16:rowId xmlns:a16="http://schemas.microsoft.com/office/drawing/2014/main" val="2249949909"/>
+                  </a:ext>
+                </a:extLst>
+              </a:tr>
+              <a:tr h="370840">
+                <a:tc>
+                  <a:txBody>
+                    <a:bodyPr/>
+                    <a:lstStyle/>
+                    <a:p>
+                      <a:r>
+                        <a:rPr lang="en-GB" dirty="0"/>
+                        <a:t>svr1AddSpecies</a:t>
+                      </a:r>
+                      <a:endParaRPr lang="nl-NL" dirty="0"/>
+                    </a:p>
+                  </a:txBody>
+                  <a:tcPr/>
+                </a:tc>
+                <a:tc>
+                  <a:txBody>
+                    <a:bodyPr/>
+                    <a:lstStyle/>
+                    <a:p>
+                      <a:r>
+                        <a:rPr lang="en-GB" dirty="0"/>
+                        <a:t>Both</a:t>
+                      </a:r>
+                      <a:endParaRPr lang="nl-NL" dirty="0"/>
+                    </a:p>
+                  </a:txBody>
+                  <a:tcPr/>
+                </a:tc>
+                <a:tc>
+                  <a:txBody>
+                    <a:bodyPr/>
+                    <a:lstStyle/>
+                    <a:p>
+                      <a:r>
+                        <a:rPr lang="en-GB" dirty="0"/>
+                        <a:t>No</a:t>
+                      </a:r>
+                      <a:endParaRPr lang="nl-NL" dirty="0"/>
+                    </a:p>
+                  </a:txBody>
+                  <a:tcPr/>
+                </a:tc>
+                <a:tc>
+                  <a:txBody>
+                    <a:bodyPr/>
+                    <a:lstStyle/>
+                    <a:p>
+                      <a:pPr marL="0" marR="0" lvl="0" indent="0" algn="l" defTabSz="914400" rtl="0" eaLnBrk="1" fontAlgn="auto" latinLnBrk="0" hangingPunct="1">
+                        <a:lnSpc>
+                          <a:spcPct val="100000"/>
+                        </a:lnSpc>
+                        <a:spcBef>
+                          <a:spcPts val="0"/>
+                        </a:spcBef>
+                        <a:spcAft>
+                          <a:spcPts val="0"/>
+                        </a:spcAft>
+                        <a:buClrTx/>
+                        <a:buSzTx/>
+                        <a:buFontTx/>
+                        <a:buNone/>
+                        <a:tabLst/>
+                        <a:defRPr/>
+                      </a:pPr>
+                      <a:r>
+                        <a:rPr lang="en-GB" dirty="0"/>
+                        <a:t>Helper.  Add species to </a:t>
+                      </a:r>
+                      <a:r>
+                        <a:rPr lang="nl-NL" sz="1800" b="0" kern="1200" dirty="0">
+                          <a:solidFill>
+                            <a:schemeClr val="dk1"/>
+                          </a:solidFill>
+                          <a:effectLst/>
+                          <a:latin typeface="+mn-lt"/>
+                          <a:ea typeface="+mn-ea"/>
+                          <a:cs typeface="+mn-cs"/>
+                        </a:rPr>
+                        <a:t>speciescollection.csv </a:t>
+                      </a:r>
+                      <a:r>
+                        <a:rPr lang="nl-NL" sz="1800" b="0" kern="1200" dirty="0" err="1">
+                          <a:solidFill>
+                            <a:schemeClr val="dk1"/>
+                          </a:solidFill>
+                          <a:effectLst/>
+                          <a:latin typeface="+mn-lt"/>
+                          <a:ea typeface="+mn-ea"/>
+                          <a:cs typeface="+mn-cs"/>
+                        </a:rPr>
+                        <a:t>based</a:t>
+                      </a:r>
+                      <a:r>
+                        <a:rPr lang="nl-NL" sz="1800" b="0" kern="1200" dirty="0">
+                          <a:solidFill>
+                            <a:schemeClr val="dk1"/>
+                          </a:solidFill>
+                          <a:effectLst/>
+                          <a:latin typeface="+mn-lt"/>
+                          <a:ea typeface="+mn-ea"/>
+                          <a:cs typeface="+mn-cs"/>
+                        </a:rPr>
+                        <a:t> on list in </a:t>
+                      </a:r>
+                      <a:r>
+                        <a:rPr lang="nl-NL" sz="1800" b="0" kern="1200" dirty="0" err="1">
+                          <a:solidFill>
+                            <a:schemeClr val="dk1"/>
+                          </a:solidFill>
+                          <a:effectLst/>
+                          <a:latin typeface="+mn-lt"/>
+                          <a:ea typeface="+mn-ea"/>
+                          <a:cs typeface="+mn-cs"/>
+                        </a:rPr>
+                        <a:t>admin</a:t>
+                      </a:r>
+                      <a:r>
+                        <a:rPr lang="nl-NL" sz="1800" b="0" kern="1200" dirty="0">
+                          <a:solidFill>
+                            <a:schemeClr val="dk1"/>
+                          </a:solidFill>
+                          <a:effectLst/>
+                          <a:latin typeface="+mn-lt"/>
+                          <a:ea typeface="+mn-ea"/>
+                          <a:cs typeface="+mn-cs"/>
+                        </a:rPr>
+                        <a:t>/speclist.csv</a:t>
+                      </a:r>
+                    </a:p>
+                  </a:txBody>
+                  <a:tcPr/>
+                </a:tc>
+                <a:extLst>
+                  <a:ext uri="{0D108BD9-81ED-4DB2-BD59-A6C34878D82A}">
+                    <a16:rowId xmlns:a16="http://schemas.microsoft.com/office/drawing/2014/main" val="1354462080"/>
+                  </a:ext>
+                </a:extLst>
+              </a:tr>
+              <a:tr h="370840">
+                <a:tc>
+                  <a:txBody>
+                    <a:bodyPr/>
+                    <a:lstStyle/>
+                    <a:p>
+                      <a:r>
+                        <a:rPr lang="en-GB" dirty="0"/>
+                        <a:t>svr2CountSpecies</a:t>
+                      </a:r>
+                      <a:endParaRPr lang="nl-NL" dirty="0"/>
+                    </a:p>
+                  </a:txBody>
+                  <a:tcPr/>
+                </a:tc>
+                <a:tc>
+                  <a:txBody>
+                    <a:bodyPr/>
+                    <a:lstStyle/>
+                    <a:p>
+                      <a:r>
+                        <a:rPr lang="en-GB" dirty="0"/>
+                        <a:t>Trip</a:t>
+                      </a:r>
+                      <a:endParaRPr lang="nl-NL" dirty="0"/>
+                    </a:p>
+                  </a:txBody>
+                  <a:tcPr/>
+                </a:tc>
+                <a:tc>
+                  <a:txBody>
+                    <a:bodyPr/>
+                    <a:lstStyle/>
+                    <a:p>
+                      <a:r>
+                        <a:rPr lang="en-GB" dirty="0"/>
+                        <a:t>No</a:t>
+                      </a:r>
+                      <a:endParaRPr lang="nl-NL" dirty="0"/>
+                    </a:p>
+                  </a:txBody>
+                  <a:tcPr/>
+                </a:tc>
+                <a:tc>
+                  <a:txBody>
+                    <a:bodyPr/>
+                    <a:lstStyle/>
+                    <a:p>
+                      <a:r>
+                        <a:rPr lang="en-GB" dirty="0"/>
+                        <a:t>Stats. Count the number of species that are not yet in master</a:t>
+                      </a:r>
+                      <a:endParaRPr lang="nl-NL" dirty="0"/>
+                    </a:p>
+                  </a:txBody>
+                  <a:tcPr/>
+                </a:tc>
+                <a:extLst>
+                  <a:ext uri="{0D108BD9-81ED-4DB2-BD59-A6C34878D82A}">
+                    <a16:rowId xmlns:a16="http://schemas.microsoft.com/office/drawing/2014/main" val="2019498000"/>
+                  </a:ext>
+                </a:extLst>
+              </a:tr>
+              <a:tr h="370840">
+                <a:tc>
+                  <a:txBody>
+                    <a:bodyPr/>
+                    <a:lstStyle/>
+                    <a:p>
+                      <a:r>
+                        <a:rPr lang="en-GB" dirty="0"/>
+                        <a:t>svr3StatusProjects</a:t>
+                      </a:r>
+                      <a:endParaRPr lang="nl-NL" dirty="0"/>
+                    </a:p>
+                  </a:txBody>
+                  <a:tcPr/>
+                </a:tc>
+                <a:tc>
+                  <a:txBody>
+                    <a:bodyPr/>
+                    <a:lstStyle/>
+                    <a:p>
+                      <a:r>
+                        <a:rPr lang="en-GB" dirty="0"/>
+                        <a:t>Trip</a:t>
+                      </a:r>
+                      <a:endParaRPr lang="nl-NL" dirty="0"/>
+                    </a:p>
+                  </a:txBody>
+                  <a:tcPr/>
+                </a:tc>
+                <a:tc>
+                  <a:txBody>
+                    <a:bodyPr/>
+                    <a:lstStyle/>
+                    <a:p>
+                      <a:r>
+                        <a:rPr lang="en-GB" dirty="0"/>
+                        <a:t>No</a:t>
+                      </a:r>
+                      <a:endParaRPr lang="nl-NL" dirty="0"/>
+                    </a:p>
+                  </a:txBody>
+                  <a:tcPr/>
+                </a:tc>
+                <a:tc>
+                  <a:txBody>
+                    <a:bodyPr/>
+                    <a:lstStyle/>
+                    <a:p>
+                      <a:r>
+                        <a:rPr lang="en-GB" dirty="0"/>
+                        <a:t>Stats. Report project steps that are run for trip</a:t>
+                      </a:r>
+                      <a:endParaRPr lang="nl-NL" dirty="0"/>
+                    </a:p>
+                  </a:txBody>
+                  <a:tcPr/>
+                </a:tc>
+                <a:extLst>
+                  <a:ext uri="{0D108BD9-81ED-4DB2-BD59-A6C34878D82A}">
+                    <a16:rowId xmlns:a16="http://schemas.microsoft.com/office/drawing/2014/main" val="253633987"/>
+                  </a:ext>
+                </a:extLst>
+              </a:tr>
+              <a:tr h="370840">
+                <a:tc>
+                  <a:txBody>
+                    <a:bodyPr/>
+                    <a:lstStyle/>
+                    <a:p>
+                      <a:r>
+                        <a:rPr lang="en-GB" dirty="0"/>
+                        <a:t>svr4UpdateTrips</a:t>
+                      </a:r>
+                      <a:endParaRPr lang="nl-NL" dirty="0"/>
+                    </a:p>
+                  </a:txBody>
+                  <a:tcPr/>
+                </a:tc>
+                <a:tc>
+                  <a:txBody>
+                    <a:bodyPr/>
+                    <a:lstStyle/>
+                    <a:p>
+                      <a:r>
+                        <a:rPr lang="en-GB" dirty="0"/>
+                        <a:t>Trip</a:t>
+                      </a:r>
+                      <a:endParaRPr lang="nl-NL" dirty="0"/>
+                    </a:p>
+                  </a:txBody>
+                  <a:tcPr/>
+                </a:tc>
+                <a:tc>
+                  <a:txBody>
+                    <a:bodyPr/>
+                    <a:lstStyle/>
+                    <a:p>
+                      <a:r>
+                        <a:rPr lang="en-GB" dirty="0"/>
+                        <a:t>trip.ini</a:t>
+                      </a:r>
+                      <a:endParaRPr lang="nl-NL" dirty="0"/>
+                    </a:p>
+                  </a:txBody>
+                  <a:tcPr/>
+                </a:tc>
+                <a:tc>
+                  <a:txBody>
+                    <a:bodyPr/>
+                    <a:lstStyle/>
+                    <a:p>
+                      <a:r>
+                        <a:rPr lang="en-GB" dirty="0"/>
+                        <a:t>Needed for each trip. Update the metadata for trip and update website.  </a:t>
+                      </a:r>
+                      <a:endParaRPr lang="nl-NL" dirty="0"/>
+                    </a:p>
+                  </a:txBody>
+                  <a:tcPr/>
+                </a:tc>
+                <a:extLst>
+                  <a:ext uri="{0D108BD9-81ED-4DB2-BD59-A6C34878D82A}">
+                    <a16:rowId xmlns:a16="http://schemas.microsoft.com/office/drawing/2014/main" val="775449291"/>
+                  </a:ext>
+                </a:extLst>
+              </a:tr>
+              <a:tr h="370840">
+                <a:tc>
+                  <a:txBody>
+                    <a:bodyPr/>
+                    <a:lstStyle/>
+                    <a:p>
+                      <a:r>
+                        <a:rPr lang="nl-NL" dirty="0"/>
+                        <a:t>svr5MergeSpeciesCollections</a:t>
+                      </a:r>
+                    </a:p>
+                  </a:txBody>
+                  <a:tcPr/>
+                </a:tc>
+                <a:tc>
+                  <a:txBody>
+                    <a:bodyPr/>
+                    <a:lstStyle/>
+                    <a:p>
+                      <a:endParaRPr lang="nl-NL"/>
+                    </a:p>
+                  </a:txBody>
+                  <a:tcPr/>
+                </a:tc>
+                <a:tc>
+                  <a:txBody>
+                    <a:bodyPr/>
+                    <a:lstStyle/>
+                    <a:p>
+                      <a:r>
+                        <a:rPr lang="en-GB" dirty="0"/>
+                        <a:t>Yes</a:t>
+                      </a:r>
+                      <a:endParaRPr lang="nl-NL" dirty="0"/>
+                    </a:p>
+                  </a:txBody>
+                  <a:tcPr/>
+                </a:tc>
+                <a:tc>
+                  <a:txBody>
+                    <a:bodyPr/>
+                    <a:lstStyle/>
+                    <a:p>
+                      <a:r>
+                        <a:rPr lang="en-GB" dirty="0"/>
+                        <a:t>Needed for </a:t>
+                      </a:r>
+                      <a:r>
+                        <a:rPr lang="en-GB"/>
+                        <a:t>new English/</a:t>
+                      </a:r>
+                      <a:r>
+                        <a:rPr lang="en-GB" dirty="0"/>
+                        <a:t>Dutch names.  Merge the species from 2 lists, </a:t>
+                      </a:r>
+                      <a:r>
+                        <a:rPr lang="en-GB" dirty="0" err="1"/>
+                        <a:t>eg</a:t>
+                      </a:r>
+                      <a:r>
+                        <a:rPr lang="en-GB" dirty="0"/>
+                        <a:t> master and trip</a:t>
+                      </a:r>
+                      <a:endParaRPr lang="nl-NL" dirty="0"/>
+                    </a:p>
+                  </a:txBody>
+                  <a:tcPr/>
+                </a:tc>
+                <a:extLst>
+                  <a:ext uri="{0D108BD9-81ED-4DB2-BD59-A6C34878D82A}">
+                    <a16:rowId xmlns:a16="http://schemas.microsoft.com/office/drawing/2014/main" val="466339600"/>
+                  </a:ext>
+                </a:extLst>
+              </a:tr>
+              <a:tr h="370840">
+                <a:tc>
+                  <a:txBody>
+                    <a:bodyPr/>
+                    <a:lstStyle/>
+                    <a:p>
+                      <a:r>
+                        <a:rPr lang="nl-NL" dirty="0"/>
+                        <a:t>svr6MergeBlogsForMaster</a:t>
+                      </a:r>
+                    </a:p>
+                  </a:txBody>
+                  <a:tcPr/>
+                </a:tc>
+                <a:tc>
+                  <a:txBody>
+                    <a:bodyPr/>
+                    <a:lstStyle/>
+                    <a:p>
+                      <a:r>
+                        <a:rPr lang="en-GB" dirty="0"/>
+                        <a:t>Master</a:t>
+                      </a:r>
+                      <a:endParaRPr lang="nl-NL" dirty="0"/>
+                    </a:p>
+                  </a:txBody>
+                  <a:tcPr/>
+                </a:tc>
+                <a:tc>
+                  <a:txBody>
+                    <a:bodyPr/>
+                    <a:lstStyle/>
+                    <a:p>
+                      <a:r>
+                        <a:rPr lang="en-GB" dirty="0"/>
+                        <a:t>No</a:t>
+                      </a:r>
+                      <a:endParaRPr lang="nl-NL" dirty="0"/>
+                    </a:p>
+                  </a:txBody>
+                  <a:tcPr/>
+                </a:tc>
+                <a:tc>
+                  <a:txBody>
+                    <a:bodyPr/>
+                    <a:lstStyle/>
+                    <a:p>
+                      <a:r>
+                        <a:rPr lang="en-GB" dirty="0"/>
+                        <a:t>Needs at least once for each trip, blog count update not automatic.  Create a different blog report for master, blogs per trips rather than all blogs</a:t>
+                      </a:r>
+                      <a:endParaRPr lang="nl-NL" dirty="0"/>
+                    </a:p>
+                  </a:txBody>
+                  <a:tcPr/>
+                </a:tc>
+                <a:extLst>
+                  <a:ext uri="{0D108BD9-81ED-4DB2-BD59-A6C34878D82A}">
+                    <a16:rowId xmlns:a16="http://schemas.microsoft.com/office/drawing/2014/main" val="1830438468"/>
+                  </a:ext>
+                </a:extLst>
+              </a:tr>
+              <a:tr h="370840">
+                <a:tc>
+                  <a:txBody>
+                    <a:bodyPr/>
+                    <a:lstStyle/>
+                    <a:p>
+                      <a:r>
+                        <a:rPr lang="en-GB" dirty="0"/>
+                        <a:t>svr7DeleteFiles</a:t>
+                      </a:r>
+                      <a:endParaRPr lang="nl-NL" dirty="0"/>
+                    </a:p>
+                  </a:txBody>
+                  <a:tcPr/>
+                </a:tc>
+                <a:tc>
+                  <a:txBody>
+                    <a:bodyPr/>
+                    <a:lstStyle/>
+                    <a:p>
+                      <a:r>
+                        <a:rPr lang="en-GB" dirty="0"/>
+                        <a:t>Both</a:t>
+                      </a:r>
+                      <a:endParaRPr lang="nl-NL" dirty="0"/>
+                    </a:p>
+                  </a:txBody>
+                  <a:tcPr/>
+                </a:tc>
+                <a:tc>
+                  <a:txBody>
+                    <a:bodyPr/>
+                    <a:lstStyle/>
+                    <a:p>
+                      <a:endParaRPr lang="nl-NL"/>
+                    </a:p>
+                  </a:txBody>
+                  <a:tcPr/>
+                </a:tc>
+                <a:tc>
+                  <a:txBody>
+                    <a:bodyPr/>
+                    <a:lstStyle/>
+                    <a:p>
+                      <a:r>
+                        <a:rPr lang="en-GB" dirty="0"/>
+                        <a:t>Clean duplicate files. (does not yet exist) Delete files that have been copied to master</a:t>
+                      </a:r>
+                      <a:endParaRPr lang="nl-NL" dirty="0"/>
+                    </a:p>
+                  </a:txBody>
+                  <a:tcPr/>
+                </a:tc>
+                <a:extLst>
+                  <a:ext uri="{0D108BD9-81ED-4DB2-BD59-A6C34878D82A}">
+                    <a16:rowId xmlns:a16="http://schemas.microsoft.com/office/drawing/2014/main" val="1080765452"/>
+                  </a:ext>
+                </a:extLst>
+              </a:tr>
+              <a:tr h="370840">
+                <a:tc>
+                  <a:txBody>
+                    <a:bodyPr/>
+                    <a:lstStyle/>
+                    <a:p>
+                      <a:endParaRPr lang="nl-NL" dirty="0"/>
+                    </a:p>
+                  </a:txBody>
+                  <a:tcPr/>
+                </a:tc>
+                <a:tc>
+                  <a:txBody>
+                    <a:bodyPr/>
+                    <a:lstStyle/>
+                    <a:p>
+                      <a:endParaRPr lang="nl-NL" dirty="0"/>
+                    </a:p>
+                  </a:txBody>
+                  <a:tcPr/>
+                </a:tc>
+                <a:tc>
+                  <a:txBody>
+                    <a:bodyPr/>
+                    <a:lstStyle/>
+                    <a:p>
+                      <a:endParaRPr lang="nl-NL"/>
+                    </a:p>
+                  </a:txBody>
+                  <a:tcPr/>
+                </a:tc>
+                <a:tc>
+                  <a:txBody>
+                    <a:bodyPr/>
+                    <a:lstStyle/>
+                    <a:p>
+                      <a:endParaRPr lang="nl-NL" dirty="0"/>
+                    </a:p>
+                  </a:txBody>
+                  <a:tcPr/>
+                </a:tc>
+                <a:extLst>
+                  <a:ext uri="{0D108BD9-81ED-4DB2-BD59-A6C34878D82A}">
+                    <a16:rowId xmlns:a16="http://schemas.microsoft.com/office/drawing/2014/main" val="3096990806"/>
+                  </a:ext>
+                </a:extLst>
+              </a:tr>
+            </a:tbl>
+          </a:graphicData>
+        </a:graphic>
+      </p:graphicFrame>
+      <p:sp>
+        <p:nvSpPr>
+          <p:cNvPr id="5" name="TextBox 4">
+            <a:extLst>
+              <a:ext uri="{FF2B5EF4-FFF2-40B4-BE49-F238E27FC236}">
+                <a16:creationId xmlns:a16="http://schemas.microsoft.com/office/drawing/2014/main" id="{ABBCF386-00BA-C3FC-2471-8972B85A1A8E}"/>
+              </a:ext>
+            </a:extLst>
+          </p:cNvPr>
+          <p:cNvSpPr txBox="1"/>
+          <p:nvPr/>
+        </p:nvSpPr>
+        <p:spPr>
+          <a:xfrm>
+            <a:off x="510540" y="6488668"/>
+            <a:ext cx="11064240" cy="369332"/>
+          </a:xfrm>
+          <a:prstGeom prst="rect">
+            <a:avLst/>
+          </a:prstGeom>
+          <a:noFill/>
+        </p:spPr>
+        <p:txBody>
+          <a:bodyPr wrap="square" rtlCol="0">
+            <a:spAutoFit/>
+          </a:bodyPr>
+          <a:lstStyle/>
+          <a:p>
+            <a:r>
+              <a:rPr lang="en-GB" dirty="0"/>
+              <a:t>* /trips/ is fixed and assumed to the high level directory for trips, that are second level directories</a:t>
+            </a:r>
+            <a:endParaRPr lang="nl-NL" dirty="0"/>
+          </a:p>
+        </p:txBody>
+      </p:sp>
+      <p:sp>
+        <p:nvSpPr>
+          <p:cNvPr id="7" name="Title 6">
+            <a:extLst>
+              <a:ext uri="{FF2B5EF4-FFF2-40B4-BE49-F238E27FC236}">
+                <a16:creationId xmlns:a16="http://schemas.microsoft.com/office/drawing/2014/main" id="{5C2D0917-B20E-3BD3-E915-1DB1A543ECBD}"/>
+              </a:ext>
+            </a:extLst>
+          </p:cNvPr>
+          <p:cNvSpPr>
+            <a:spLocks noGrp="1"/>
+          </p:cNvSpPr>
+          <p:nvPr>
+            <p:ph type="title"/>
+          </p:nvPr>
+        </p:nvSpPr>
+        <p:spPr>
+          <a:xfrm>
+            <a:off x="617220" y="182245"/>
+            <a:ext cx="10515600" cy="686435"/>
+          </a:xfrm>
+        </p:spPr>
+        <p:txBody>
+          <a:bodyPr>
+            <a:normAutofit fontScale="90000"/>
+          </a:bodyPr>
+          <a:lstStyle/>
+          <a:p>
+            <a:r>
+              <a:rPr lang="en-GB" dirty="0"/>
+              <a:t>Utilities</a:t>
+            </a:r>
+            <a:endParaRPr lang="nl-NL" dirty="0"/>
+          </a:p>
+        </p:txBody>
+      </p:sp>
+    </p:spTree>
+    <p:extLst>
+      <p:ext uri="{BB962C8B-B14F-4D97-AF65-F5344CB8AC3E}">
+        <p14:creationId xmlns:p14="http://schemas.microsoft.com/office/powerpoint/2010/main" val="4112590493"/>
       </p:ext>
     </p:extLst>
   </p:cSld>

--- a/docs/SpeciesViewer architecture pictures.pptx
+++ b/docs/SpeciesViewer architecture pictures.pptx
@@ -5,7 +5,7 @@
     <p:sldMasterId id="2147483648" r:id="rId1"/>
   </p:sldMasterIdLst>
   <p:notesMasterIdLst>
-    <p:notesMasterId r:id="rId11"/>
+    <p:notesMasterId r:id="rId23"/>
   </p:notesMasterIdLst>
   <p:sldIdLst>
     <p:sldId id="256" r:id="rId2"/>
@@ -16,7 +16,19 @@
     <p:sldId id="261" r:id="rId7"/>
     <p:sldId id="262" r:id="rId8"/>
     <p:sldId id="263" r:id="rId9"/>
-    <p:sldId id="264" r:id="rId10"/>
+    <p:sldId id="265" r:id="rId10"/>
+    <p:sldId id="269" r:id="rId11"/>
+    <p:sldId id="266" r:id="rId12"/>
+    <p:sldId id="268" r:id="rId13"/>
+    <p:sldId id="267" r:id="rId14"/>
+    <p:sldId id="270" r:id="rId15"/>
+    <p:sldId id="271" r:id="rId16"/>
+    <p:sldId id="272" r:id="rId17"/>
+    <p:sldId id="264" r:id="rId18"/>
+    <p:sldId id="276" r:id="rId19"/>
+    <p:sldId id="275" r:id="rId20"/>
+    <p:sldId id="273" r:id="rId21"/>
+    <p:sldId id="274" r:id="rId22"/>
   </p:sldIdLst>
   <p:sldSz cx="12192000" cy="6858000"/>
   <p:notesSz cx="6858000" cy="9144000"/>
@@ -3762,7 +3774,7 @@
           <a:p>
             <a:fld id="{76D4F64B-0D6B-41C4-960F-8BF36568A172}" type="datetimeFigureOut">
               <a:rPr lang="nl-NL" smtClean="0"/>
-              <a:t>4-10-2024</a:t>
+              <a:t>14-7-2025</a:t>
             </a:fld>
             <a:endParaRPr lang="nl-NL"/>
           </a:p>
@@ -4639,7 +4651,7 @@
           <a:p>
             <a:fld id="{5F1F0CA7-94A2-42DA-B20C-BBBE621325FF}" type="slidenum">
               <a:rPr lang="nl-NL" smtClean="0"/>
-              <a:t>9</a:t>
+              <a:t>16</a:t>
             </a:fld>
             <a:endParaRPr lang="nl-NL"/>
           </a:p>
@@ -4648,7 +4660,199 @@
     </p:spTree>
     <p:extLst>
       <p:ext uri="{BB962C8B-B14F-4D97-AF65-F5344CB8AC3E}">
-        <p14:creationId xmlns:p14="http://schemas.microsoft.com/office/powerpoint/2010/main" val="1584562310"/>
+        <p14:creationId xmlns:p14="http://schemas.microsoft.com/office/powerpoint/2010/main" val="1144572665"/>
+      </p:ext>
+    </p:extLst>
+  </p:cSld>
+  <p:clrMapOvr>
+    <a:masterClrMapping/>
+  </p:clrMapOvr>
+</p:notes>
+</file>
+
+<file path=ppt/notesSlides/notesSlide4.xml><?xml version="1.0" encoding="utf-8"?>
+<p:notes xmlns:a="http://schemas.openxmlformats.org/drawingml/2006/main" xmlns:r="http://schemas.openxmlformats.org/officeDocument/2006/relationships" xmlns:p="http://schemas.openxmlformats.org/presentationml/2006/main">
+  <p:cSld>
+    <p:spTree>
+      <p:nvGrpSpPr>
+        <p:cNvPr id="1" name=""/>
+        <p:cNvGrpSpPr/>
+        <p:nvPr/>
+      </p:nvGrpSpPr>
+      <p:grpSpPr>
+        <a:xfrm>
+          <a:off x="0" y="0"/>
+          <a:ext cx="0" cy="0"/>
+          <a:chOff x="0" y="0"/>
+          <a:chExt cx="0" cy="0"/>
+        </a:xfrm>
+      </p:grpSpPr>
+      <p:sp>
+        <p:nvSpPr>
+          <p:cNvPr id="2" name="Slide Image Placeholder 1"/>
+          <p:cNvSpPr>
+            <a:spLocks noGrp="1" noRot="1" noChangeAspect="1"/>
+          </p:cNvSpPr>
+          <p:nvPr>
+            <p:ph type="sldImg"/>
+          </p:nvPr>
+        </p:nvSpPr>
+        <p:spPr/>
+      </p:sp>
+      <p:sp>
+        <p:nvSpPr>
+          <p:cNvPr id="3" name="Notes Placeholder 2"/>
+          <p:cNvSpPr>
+            <a:spLocks noGrp="1"/>
+          </p:cNvSpPr>
+          <p:nvPr>
+            <p:ph type="body" idx="1"/>
+          </p:nvPr>
+        </p:nvSpPr>
+        <p:spPr/>
+        <p:txBody>
+          <a:bodyPr/>
+          <a:lstStyle/>
+          <a:p>
+            <a:endParaRPr lang="nl-NL" dirty="0"/>
+          </a:p>
+        </p:txBody>
+      </p:sp>
+      <p:sp>
+        <p:nvSpPr>
+          <p:cNvPr id="4" name="Slide Number Placeholder 3"/>
+          <p:cNvSpPr>
+            <a:spLocks noGrp="1"/>
+          </p:cNvSpPr>
+          <p:nvPr>
+            <p:ph type="sldNum" sz="quarter" idx="5"/>
+          </p:nvPr>
+        </p:nvSpPr>
+        <p:spPr/>
+        <p:txBody>
+          <a:bodyPr/>
+          <a:lstStyle/>
+          <a:p>
+            <a:fld id="{5F1F0CA7-94A2-42DA-B20C-BBBE621325FF}" type="slidenum">
+              <a:rPr lang="nl-NL" smtClean="0"/>
+              <a:t>17</a:t>
+            </a:fld>
+            <a:endParaRPr lang="nl-NL"/>
+          </a:p>
+        </p:txBody>
+      </p:sp>
+    </p:spTree>
+    <p:extLst>
+      <p:ext uri="{BB962C8B-B14F-4D97-AF65-F5344CB8AC3E}">
+        <p14:creationId xmlns:p14="http://schemas.microsoft.com/office/powerpoint/2010/main" val="2763883931"/>
+      </p:ext>
+    </p:extLst>
+  </p:cSld>
+  <p:clrMapOvr>
+    <a:masterClrMapping/>
+  </p:clrMapOvr>
+</p:notes>
+</file>
+
+<file path=ppt/notesSlides/notesSlide5.xml><?xml version="1.0" encoding="utf-8"?>
+<p:notes xmlns:a="http://schemas.openxmlformats.org/drawingml/2006/main" xmlns:r="http://schemas.openxmlformats.org/officeDocument/2006/relationships" xmlns:p="http://schemas.openxmlformats.org/presentationml/2006/main">
+  <p:cSld>
+    <p:spTree>
+      <p:nvGrpSpPr>
+        <p:cNvPr id="1" name="">
+          <a:extLst>
+            <a:ext uri="{FF2B5EF4-FFF2-40B4-BE49-F238E27FC236}">
+              <a16:creationId xmlns:a16="http://schemas.microsoft.com/office/drawing/2014/main" id="{EB1E60B0-AF60-C401-7BAD-E6A277753A67}"/>
+            </a:ext>
+          </a:extLst>
+        </p:cNvPr>
+        <p:cNvGrpSpPr/>
+        <p:nvPr/>
+      </p:nvGrpSpPr>
+      <p:grpSpPr>
+        <a:xfrm>
+          <a:off x="0" y="0"/>
+          <a:ext cx="0" cy="0"/>
+          <a:chOff x="0" y="0"/>
+          <a:chExt cx="0" cy="0"/>
+        </a:xfrm>
+      </p:grpSpPr>
+      <p:sp>
+        <p:nvSpPr>
+          <p:cNvPr id="2" name="Slide Image Placeholder 1">
+            <a:extLst>
+              <a:ext uri="{FF2B5EF4-FFF2-40B4-BE49-F238E27FC236}">
+                <a16:creationId xmlns:a16="http://schemas.microsoft.com/office/drawing/2014/main" id="{72CAE2DE-FD4F-6FC2-B8E0-F7A992357266}"/>
+              </a:ext>
+            </a:extLst>
+          </p:cNvPr>
+          <p:cNvSpPr>
+            <a:spLocks noGrp="1" noRot="1" noChangeAspect="1"/>
+          </p:cNvSpPr>
+          <p:nvPr>
+            <p:ph type="sldImg"/>
+          </p:nvPr>
+        </p:nvSpPr>
+        <p:spPr/>
+      </p:sp>
+      <p:sp>
+        <p:nvSpPr>
+          <p:cNvPr id="3" name="Notes Placeholder 2">
+            <a:extLst>
+              <a:ext uri="{FF2B5EF4-FFF2-40B4-BE49-F238E27FC236}">
+                <a16:creationId xmlns:a16="http://schemas.microsoft.com/office/drawing/2014/main" id="{0EE20DF5-A4C9-2CE8-3D57-3C34E4BDD11B}"/>
+              </a:ext>
+            </a:extLst>
+          </p:cNvPr>
+          <p:cNvSpPr>
+            <a:spLocks noGrp="1"/>
+          </p:cNvSpPr>
+          <p:nvPr>
+            <p:ph type="body" idx="1"/>
+          </p:nvPr>
+        </p:nvSpPr>
+        <p:spPr/>
+        <p:txBody>
+          <a:bodyPr/>
+          <a:lstStyle/>
+          <a:p>
+            <a:endParaRPr lang="nl-NL" dirty="0"/>
+          </a:p>
+        </p:txBody>
+      </p:sp>
+      <p:sp>
+        <p:nvSpPr>
+          <p:cNvPr id="4" name="Slide Number Placeholder 3">
+            <a:extLst>
+              <a:ext uri="{FF2B5EF4-FFF2-40B4-BE49-F238E27FC236}">
+                <a16:creationId xmlns:a16="http://schemas.microsoft.com/office/drawing/2014/main" id="{AF32D367-22F0-7777-BE25-7DEB35428511}"/>
+              </a:ext>
+            </a:extLst>
+          </p:cNvPr>
+          <p:cNvSpPr>
+            <a:spLocks noGrp="1"/>
+          </p:cNvSpPr>
+          <p:nvPr>
+            <p:ph type="sldNum" sz="quarter" idx="5"/>
+          </p:nvPr>
+        </p:nvSpPr>
+        <p:spPr/>
+        <p:txBody>
+          <a:bodyPr/>
+          <a:lstStyle/>
+          <a:p>
+            <a:fld id="{5F1F0CA7-94A2-42DA-B20C-BBBE621325FF}" type="slidenum">
+              <a:rPr lang="nl-NL" smtClean="0"/>
+              <a:t>18</a:t>
+            </a:fld>
+            <a:endParaRPr lang="nl-NL"/>
+          </a:p>
+        </p:txBody>
+      </p:sp>
+    </p:spTree>
+    <p:extLst>
+      <p:ext uri="{BB962C8B-B14F-4D97-AF65-F5344CB8AC3E}">
+        <p14:creationId xmlns:p14="http://schemas.microsoft.com/office/powerpoint/2010/main" val="791952661"/>
       </p:ext>
     </p:extLst>
   </p:cSld>
@@ -4807,7 +5011,7 @@
           <a:p>
             <a:fld id="{A7A69C3B-192C-4ABE-8AD2-9BDA44DCF295}" type="datetimeFigureOut">
               <a:rPr lang="nl-NL" smtClean="0"/>
-              <a:t>4-10-2024</a:t>
+              <a:t>14-7-2025</a:t>
             </a:fld>
             <a:endParaRPr lang="nl-NL"/>
           </a:p>
@@ -5007,7 +5211,7 @@
           <a:p>
             <a:fld id="{A7A69C3B-192C-4ABE-8AD2-9BDA44DCF295}" type="datetimeFigureOut">
               <a:rPr lang="nl-NL" smtClean="0"/>
-              <a:t>4-10-2024</a:t>
+              <a:t>14-7-2025</a:t>
             </a:fld>
             <a:endParaRPr lang="nl-NL"/>
           </a:p>
@@ -5217,7 +5421,7 @@
           <a:p>
             <a:fld id="{A7A69C3B-192C-4ABE-8AD2-9BDA44DCF295}" type="datetimeFigureOut">
               <a:rPr lang="nl-NL" smtClean="0"/>
-              <a:t>4-10-2024</a:t>
+              <a:t>14-7-2025</a:t>
             </a:fld>
             <a:endParaRPr lang="nl-NL"/>
           </a:p>
@@ -5417,7 +5621,7 @@
           <a:p>
             <a:fld id="{A7A69C3B-192C-4ABE-8AD2-9BDA44DCF295}" type="datetimeFigureOut">
               <a:rPr lang="nl-NL" smtClean="0"/>
-              <a:t>4-10-2024</a:t>
+              <a:t>14-7-2025</a:t>
             </a:fld>
             <a:endParaRPr lang="nl-NL"/>
           </a:p>
@@ -5693,7 +5897,7 @@
           <a:p>
             <a:fld id="{A7A69C3B-192C-4ABE-8AD2-9BDA44DCF295}" type="datetimeFigureOut">
               <a:rPr lang="nl-NL" smtClean="0"/>
-              <a:t>4-10-2024</a:t>
+              <a:t>14-7-2025</a:t>
             </a:fld>
             <a:endParaRPr lang="nl-NL"/>
           </a:p>
@@ -5961,7 +6165,7 @@
           <a:p>
             <a:fld id="{A7A69C3B-192C-4ABE-8AD2-9BDA44DCF295}" type="datetimeFigureOut">
               <a:rPr lang="nl-NL" smtClean="0"/>
-              <a:t>4-10-2024</a:t>
+              <a:t>14-7-2025</a:t>
             </a:fld>
             <a:endParaRPr lang="nl-NL"/>
           </a:p>
@@ -6376,7 +6580,7 @@
           <a:p>
             <a:fld id="{A7A69C3B-192C-4ABE-8AD2-9BDA44DCF295}" type="datetimeFigureOut">
               <a:rPr lang="nl-NL" smtClean="0"/>
-              <a:t>4-10-2024</a:t>
+              <a:t>14-7-2025</a:t>
             </a:fld>
             <a:endParaRPr lang="nl-NL"/>
           </a:p>
@@ -6518,7 +6722,7 @@
           <a:p>
             <a:fld id="{A7A69C3B-192C-4ABE-8AD2-9BDA44DCF295}" type="datetimeFigureOut">
               <a:rPr lang="nl-NL" smtClean="0"/>
-              <a:t>4-10-2024</a:t>
+              <a:t>14-7-2025</a:t>
             </a:fld>
             <a:endParaRPr lang="nl-NL"/>
           </a:p>
@@ -6631,7 +6835,7 @@
           <a:p>
             <a:fld id="{A7A69C3B-192C-4ABE-8AD2-9BDA44DCF295}" type="datetimeFigureOut">
               <a:rPr lang="nl-NL" smtClean="0"/>
-              <a:t>4-10-2024</a:t>
+              <a:t>14-7-2025</a:t>
             </a:fld>
             <a:endParaRPr lang="nl-NL"/>
           </a:p>
@@ -6944,7 +7148,7 @@
           <a:p>
             <a:fld id="{A7A69C3B-192C-4ABE-8AD2-9BDA44DCF295}" type="datetimeFigureOut">
               <a:rPr lang="nl-NL" smtClean="0"/>
-              <a:t>4-10-2024</a:t>
+              <a:t>14-7-2025</a:t>
             </a:fld>
             <a:endParaRPr lang="nl-NL"/>
           </a:p>
@@ -7233,7 +7437,7 @@
           <a:p>
             <a:fld id="{A7A69C3B-192C-4ABE-8AD2-9BDA44DCF295}" type="datetimeFigureOut">
               <a:rPr lang="nl-NL" smtClean="0"/>
-              <a:t>4-10-2024</a:t>
+              <a:t>14-7-2025</a:t>
             </a:fld>
             <a:endParaRPr lang="nl-NL"/>
           </a:p>
@@ -7476,7 +7680,7 @@
           <a:p>
             <a:fld id="{A7A69C3B-192C-4ABE-8AD2-9BDA44DCF295}" type="datetimeFigureOut">
               <a:rPr lang="nl-NL" smtClean="0"/>
-              <a:t>4-10-2024</a:t>
+              <a:t>14-7-2025</a:t>
             </a:fld>
             <a:endParaRPr lang="nl-NL"/>
           </a:p>
@@ -7955,6 +8159,3719 @@
     <p:extLst>
       <p:ext uri="{BB962C8B-B14F-4D97-AF65-F5344CB8AC3E}">
         <p14:creationId xmlns:p14="http://schemas.microsoft.com/office/powerpoint/2010/main" val="950332944"/>
+      </p:ext>
+    </p:extLst>
+  </p:cSld>
+  <p:clrMapOvr>
+    <a:masterClrMapping/>
+  </p:clrMapOvr>
+</p:sld>
+</file>
+
+<file path=ppt/slides/slide10.xml><?xml version="1.0" encoding="utf-8"?>
+<p:sld xmlns:a="http://schemas.openxmlformats.org/drawingml/2006/main" xmlns:r="http://schemas.openxmlformats.org/officeDocument/2006/relationships" xmlns:p="http://schemas.openxmlformats.org/presentationml/2006/main">
+  <p:cSld>
+    <p:spTree>
+      <p:nvGrpSpPr>
+        <p:cNvPr id="1" name="">
+          <a:extLst>
+            <a:ext uri="{FF2B5EF4-FFF2-40B4-BE49-F238E27FC236}">
+              <a16:creationId xmlns:a16="http://schemas.microsoft.com/office/drawing/2014/main" id="{FFBD88A5-DE2C-E250-54CD-29B5ECEA0FAF}"/>
+            </a:ext>
+          </a:extLst>
+        </p:cNvPr>
+        <p:cNvGrpSpPr/>
+        <p:nvPr/>
+      </p:nvGrpSpPr>
+      <p:grpSpPr>
+        <a:xfrm>
+          <a:off x="0" y="0"/>
+          <a:ext cx="0" cy="0"/>
+          <a:chOff x="0" y="0"/>
+          <a:chExt cx="0" cy="0"/>
+        </a:xfrm>
+      </p:grpSpPr>
+      <p:sp>
+        <p:nvSpPr>
+          <p:cNvPr id="2" name="Title 1">
+            <a:extLst>
+              <a:ext uri="{FF2B5EF4-FFF2-40B4-BE49-F238E27FC236}">
+                <a16:creationId xmlns:a16="http://schemas.microsoft.com/office/drawing/2014/main" id="{CE1BCFD7-E296-B23D-B42E-19665E3C8ED8}"/>
+              </a:ext>
+            </a:extLst>
+          </p:cNvPr>
+          <p:cNvSpPr>
+            <a:spLocks noGrp="1"/>
+          </p:cNvSpPr>
+          <p:nvPr>
+            <p:ph type="title"/>
+          </p:nvPr>
+        </p:nvSpPr>
+        <p:spPr/>
+        <p:txBody>
+          <a:bodyPr/>
+          <a:lstStyle/>
+          <a:p>
+            <a:r>
+              <a:rPr lang="en-GB" dirty="0"/>
+              <a:t>Process steps: </a:t>
+            </a:r>
+            <a:r>
+              <a:rPr lang="en-GB" dirty="0" err="1"/>
+              <a:t>PhotoMechanic</a:t>
+            </a:r>
+            <a:endParaRPr lang="nl-NL" dirty="0"/>
+          </a:p>
+        </p:txBody>
+      </p:sp>
+      <p:sp>
+        <p:nvSpPr>
+          <p:cNvPr id="3" name="Content Placeholder 2">
+            <a:extLst>
+              <a:ext uri="{FF2B5EF4-FFF2-40B4-BE49-F238E27FC236}">
+                <a16:creationId xmlns:a16="http://schemas.microsoft.com/office/drawing/2014/main" id="{6342C96C-CF3C-7FB5-BC9E-141E0AE3C94B}"/>
+              </a:ext>
+            </a:extLst>
+          </p:cNvPr>
+          <p:cNvSpPr>
+            <a:spLocks noGrp="1"/>
+          </p:cNvSpPr>
+          <p:nvPr>
+            <p:ph idx="1"/>
+          </p:nvPr>
+        </p:nvSpPr>
+        <p:spPr/>
+        <p:txBody>
+          <a:bodyPr>
+            <a:normAutofit lnSpcReduction="10000"/>
+          </a:bodyPr>
+          <a:lstStyle/>
+          <a:p>
+            <a:pPr marL="0" indent="0">
+              <a:buNone/>
+            </a:pPr>
+            <a:r>
+              <a:rPr lang="en-GB" sz="2400" dirty="0"/>
+              <a:t>The </a:t>
+            </a:r>
+            <a:r>
+              <a:rPr lang="en-GB" sz="2400" dirty="0" err="1"/>
+              <a:t>PhotoMechanic</a:t>
+            </a:r>
+            <a:r>
+              <a:rPr lang="en-GB" sz="2400" dirty="0"/>
+              <a:t> steps are much faster than Lightroom on my Very Fast Windows computer, justifying a preprocessing step.  On the road, this may all I do.</a:t>
+            </a:r>
+          </a:p>
+          <a:p>
+            <a:pPr marL="514350" indent="-514350">
+              <a:buFont typeface="+mj-lt"/>
+              <a:buAutoNum type="arabicPeriod"/>
+            </a:pPr>
+            <a:r>
+              <a:rPr lang="en-GB" sz="2400" dirty="0"/>
+              <a:t>Get the files from the memory card with </a:t>
+            </a:r>
+            <a:r>
+              <a:rPr lang="en-GB" sz="2400" b="1" dirty="0"/>
+              <a:t>Photo Mechanic</a:t>
+            </a:r>
+            <a:r>
+              <a:rPr lang="en-GB" sz="2400" dirty="0"/>
+              <a:t> using </a:t>
+            </a:r>
+            <a:r>
+              <a:rPr lang="en-GB" sz="2400" b="1" dirty="0"/>
+              <a:t>Ingest</a:t>
+            </a:r>
+          </a:p>
+          <a:p>
+            <a:pPr marL="457200" lvl="1" indent="0">
+              <a:buNone/>
+            </a:pPr>
+            <a:r>
+              <a:rPr lang="en-GB" sz="1600" dirty="0"/>
+              <a:t>This will copy all new files from an SD card. A directory is automatically created based on the data you run </a:t>
+            </a:r>
+            <a:r>
+              <a:rPr lang="en-GB" sz="1600" dirty="0" err="1"/>
+              <a:t>PhotoMechanic</a:t>
+            </a:r>
+            <a:r>
+              <a:rPr lang="en-GB" sz="1600" dirty="0"/>
+              <a:t>, not the date the file is created.</a:t>
+            </a:r>
+          </a:p>
+          <a:p>
+            <a:pPr marL="457200" indent="-457200">
+              <a:buFont typeface="+mj-lt"/>
+              <a:buAutoNum type="arabicPeriod"/>
+            </a:pPr>
+            <a:r>
+              <a:rPr lang="en-GB" sz="2000" dirty="0" err="1"/>
+              <a:t>Color</a:t>
+            </a:r>
+            <a:r>
+              <a:rPr lang="en-GB" sz="2000" dirty="0"/>
+              <a:t> code all pictures</a:t>
+            </a:r>
+          </a:p>
+          <a:p>
+            <a:pPr marL="457200" lvl="1" indent="0">
+              <a:buNone/>
+            </a:pPr>
+            <a:r>
+              <a:rPr lang="en-GB" sz="1600" dirty="0"/>
+              <a:t>red=exceptional, yellow=very good, green=ok, blue=not good/too many, purple=bad</a:t>
+            </a:r>
+            <a:endParaRPr lang="nl-NL" sz="2000" dirty="0"/>
+          </a:p>
+          <a:p>
+            <a:pPr marL="457200" indent="-457200">
+              <a:buFont typeface="+mj-lt"/>
+              <a:buAutoNum type="arabicPeriod"/>
+            </a:pPr>
+            <a:r>
+              <a:rPr lang="nl-NL" sz="2000" dirty="0"/>
+              <a:t>Put </a:t>
+            </a:r>
+            <a:r>
+              <a:rPr lang="nl-NL" sz="2000" dirty="0" err="1"/>
+              <a:t>the</a:t>
+            </a:r>
+            <a:r>
+              <a:rPr lang="nl-NL" sz="2000" dirty="0"/>
+              <a:t> species name </a:t>
+            </a:r>
+            <a:r>
+              <a:rPr lang="nl-NL" sz="2000" dirty="0" err="1"/>
+              <a:t>whenever</a:t>
+            </a:r>
+            <a:r>
+              <a:rPr lang="nl-NL" sz="2000" dirty="0"/>
+              <a:t> </a:t>
+            </a:r>
+            <a:r>
+              <a:rPr lang="nl-NL" sz="2000" dirty="0" err="1"/>
+              <a:t>possible</a:t>
+            </a:r>
+            <a:r>
+              <a:rPr lang="nl-NL" sz="2000" dirty="0"/>
+              <a:t>.  The </a:t>
+            </a:r>
+            <a:r>
+              <a:rPr lang="nl-NL" sz="2000" dirty="0" err="1"/>
+              <a:t>sooner</a:t>
+            </a:r>
+            <a:r>
+              <a:rPr lang="nl-NL" sz="2000" dirty="0"/>
+              <a:t> in </a:t>
+            </a:r>
+            <a:r>
+              <a:rPr lang="nl-NL" sz="2000" dirty="0" err="1"/>
+              <a:t>the</a:t>
+            </a:r>
+            <a:r>
+              <a:rPr lang="nl-NL" sz="2000" dirty="0"/>
+              <a:t> </a:t>
+            </a:r>
+            <a:r>
+              <a:rPr lang="nl-NL" sz="2000" dirty="0" err="1"/>
+              <a:t>process</a:t>
+            </a:r>
+            <a:r>
+              <a:rPr lang="nl-NL" sz="2000" dirty="0"/>
+              <a:t>, </a:t>
+            </a:r>
+            <a:r>
+              <a:rPr lang="nl-NL" sz="2000" dirty="0" err="1"/>
+              <a:t>the</a:t>
+            </a:r>
+            <a:r>
+              <a:rPr lang="nl-NL" sz="2000" dirty="0"/>
+              <a:t> more </a:t>
+            </a:r>
+            <a:r>
+              <a:rPr lang="nl-NL" sz="2000" dirty="0" err="1"/>
+              <a:t>efficient</a:t>
+            </a:r>
+            <a:r>
+              <a:rPr lang="nl-NL" sz="2000" dirty="0"/>
+              <a:t>.</a:t>
+            </a:r>
+          </a:p>
+          <a:p>
+            <a:pPr marL="457200" indent="-457200">
+              <a:buFont typeface="+mj-lt"/>
+              <a:buAutoNum type="arabicPeriod"/>
+            </a:pPr>
+            <a:r>
+              <a:rPr lang="nl-NL" sz="2000" dirty="0"/>
+              <a:t>Start </a:t>
+            </a:r>
+            <a:r>
+              <a:rPr lang="nl-NL" sz="2000" dirty="0" err="1"/>
+              <a:t>Lightroom</a:t>
+            </a:r>
+            <a:r>
+              <a:rPr lang="nl-NL" sz="2000" dirty="0"/>
+              <a:t>, </a:t>
+            </a:r>
+            <a:r>
+              <a:rPr lang="nl-NL" sz="2000" dirty="0" err="1"/>
+              <a:t>not</a:t>
+            </a:r>
+            <a:r>
+              <a:rPr lang="nl-NL" sz="2000" dirty="0"/>
+              <a:t> full-screen</a:t>
+            </a:r>
+          </a:p>
+          <a:p>
+            <a:pPr marL="457200" indent="-457200">
+              <a:buFont typeface="+mj-lt"/>
+              <a:buAutoNum type="arabicPeriod"/>
+            </a:pPr>
+            <a:r>
+              <a:rPr lang="nl-NL" sz="2000" dirty="0"/>
+              <a:t>Select </a:t>
+            </a:r>
+            <a:r>
+              <a:rPr lang="nl-NL" sz="2000" dirty="0" err="1"/>
+              <a:t>all</a:t>
+            </a:r>
+            <a:r>
+              <a:rPr lang="nl-NL" sz="2000" dirty="0"/>
+              <a:t> (red, </a:t>
+            </a:r>
+            <a:r>
+              <a:rPr lang="nl-NL" sz="2000" dirty="0" err="1"/>
+              <a:t>yellow</a:t>
+            </a:r>
+            <a:r>
+              <a:rPr lang="nl-NL" sz="2000" dirty="0"/>
+              <a:t> </a:t>
+            </a:r>
+            <a:r>
+              <a:rPr lang="nl-NL" sz="2000" dirty="0" err="1"/>
+              <a:t>and</a:t>
+            </a:r>
+            <a:r>
+              <a:rPr lang="nl-NL" sz="2000" dirty="0"/>
+              <a:t> green) pictures in </a:t>
+            </a:r>
+            <a:r>
+              <a:rPr lang="nl-NL" sz="2000" dirty="0" err="1"/>
+              <a:t>PhotoMechanic</a:t>
+            </a:r>
+            <a:r>
+              <a:rPr lang="nl-NL" sz="2000" dirty="0"/>
+              <a:t>, </a:t>
+            </a:r>
+            <a:r>
+              <a:rPr lang="nl-NL" sz="2000" dirty="0" err="1"/>
+              <a:t>and</a:t>
+            </a:r>
+            <a:r>
+              <a:rPr lang="nl-NL" sz="2000" dirty="0"/>
+              <a:t> drag </a:t>
+            </a:r>
+            <a:r>
+              <a:rPr lang="nl-NL" sz="2000" dirty="0" err="1"/>
+              <a:t>it</a:t>
+            </a:r>
+            <a:r>
+              <a:rPr lang="nl-NL" sz="2000" dirty="0"/>
+              <a:t> on </a:t>
+            </a:r>
+            <a:r>
+              <a:rPr lang="nl-NL" sz="2000" dirty="0" err="1"/>
+              <a:t>the</a:t>
+            </a:r>
+            <a:r>
+              <a:rPr lang="nl-NL" sz="2000" dirty="0"/>
+              <a:t> </a:t>
+            </a:r>
+            <a:r>
+              <a:rPr lang="nl-NL" sz="2000" dirty="0" err="1"/>
+              <a:t>main</a:t>
+            </a:r>
+            <a:r>
+              <a:rPr lang="nl-NL" sz="2000" dirty="0"/>
+              <a:t> </a:t>
+            </a:r>
+            <a:r>
+              <a:rPr lang="nl-NL" sz="2000" dirty="0" err="1"/>
+              <a:t>Lightroom</a:t>
+            </a:r>
+            <a:r>
+              <a:rPr lang="nl-NL" sz="2000" dirty="0"/>
+              <a:t> </a:t>
+            </a:r>
+            <a:r>
+              <a:rPr lang="nl-NL" sz="2000" dirty="0" err="1"/>
+              <a:t>window</a:t>
+            </a:r>
+            <a:r>
+              <a:rPr lang="nl-NL" sz="2000" dirty="0"/>
+              <a:t>.  Import </a:t>
+            </a:r>
+            <a:r>
+              <a:rPr lang="nl-NL" sz="2000" dirty="0" err="1"/>
+              <a:t>all</a:t>
+            </a:r>
+            <a:r>
+              <a:rPr lang="nl-NL" sz="2000" dirty="0"/>
+              <a:t> </a:t>
+            </a:r>
+            <a:r>
+              <a:rPr lang="nl-NL" sz="2000" dirty="0" err="1"/>
+              <a:t>good</a:t>
+            </a:r>
+            <a:r>
+              <a:rPr lang="nl-NL" sz="2000" dirty="0"/>
+              <a:t> pictures in </a:t>
+            </a:r>
+            <a:r>
+              <a:rPr lang="nl-NL" sz="2000" dirty="0" err="1"/>
+              <a:t>Lightroom</a:t>
+            </a:r>
+            <a:r>
+              <a:rPr lang="nl-NL" sz="2000" dirty="0"/>
+              <a:t>, delete blue &amp; </a:t>
+            </a:r>
+            <a:r>
+              <a:rPr lang="nl-NL" sz="2000" dirty="0" err="1"/>
+              <a:t>purple</a:t>
+            </a:r>
+            <a:endParaRPr lang="nl-NL" sz="2000" dirty="0"/>
+          </a:p>
+          <a:p>
+            <a:pPr marL="457200" indent="-457200">
+              <a:buFont typeface="+mj-lt"/>
+              <a:buAutoNum type="arabicPeriod"/>
+            </a:pPr>
+            <a:r>
+              <a:rPr lang="nl-NL" sz="2000" dirty="0"/>
+              <a:t>Make a </a:t>
+            </a:r>
+            <a:r>
+              <a:rPr lang="nl-NL" sz="2000" dirty="0" err="1"/>
+              <a:t>backup</a:t>
+            </a:r>
+            <a:r>
+              <a:rPr lang="nl-NL" sz="2000" dirty="0"/>
+              <a:t> of </a:t>
+            </a:r>
+            <a:r>
+              <a:rPr lang="nl-NL" sz="2000" dirty="0" err="1"/>
+              <a:t>the</a:t>
+            </a:r>
+            <a:r>
+              <a:rPr lang="nl-NL" sz="2000" dirty="0"/>
+              <a:t> </a:t>
+            </a:r>
+            <a:r>
+              <a:rPr lang="nl-NL" sz="2000" dirty="0" err="1"/>
+              <a:t>PhotoMechanic</a:t>
+            </a:r>
+            <a:r>
+              <a:rPr lang="nl-NL" sz="2000" dirty="0"/>
+              <a:t> on a </a:t>
+            </a:r>
+            <a:r>
+              <a:rPr lang="nl-NL" sz="2000" dirty="0" err="1"/>
+              <a:t>seperate</a:t>
+            </a:r>
+            <a:r>
+              <a:rPr lang="nl-NL" sz="2000" dirty="0"/>
+              <a:t> drive or computer </a:t>
+            </a:r>
+            <a:r>
+              <a:rPr lang="nl-NL" sz="2000" dirty="0" err="1"/>
+              <a:t>just</a:t>
+            </a:r>
+            <a:r>
+              <a:rPr lang="nl-NL" sz="2000" dirty="0"/>
+              <a:t> case.</a:t>
+            </a:r>
+          </a:p>
+        </p:txBody>
+      </p:sp>
+    </p:spTree>
+    <p:extLst>
+      <p:ext uri="{BB962C8B-B14F-4D97-AF65-F5344CB8AC3E}">
+        <p14:creationId xmlns:p14="http://schemas.microsoft.com/office/powerpoint/2010/main" val="1214695976"/>
+      </p:ext>
+    </p:extLst>
+  </p:cSld>
+  <p:clrMapOvr>
+    <a:masterClrMapping/>
+  </p:clrMapOvr>
+</p:sld>
+</file>
+
+<file path=ppt/slides/slide11.xml><?xml version="1.0" encoding="utf-8"?>
+<p:sld xmlns:a="http://schemas.openxmlformats.org/drawingml/2006/main" xmlns:r="http://schemas.openxmlformats.org/officeDocument/2006/relationships" xmlns:p="http://schemas.openxmlformats.org/presentationml/2006/main">
+  <p:cSld>
+    <p:spTree>
+      <p:nvGrpSpPr>
+        <p:cNvPr id="1" name="">
+          <a:extLst>
+            <a:ext uri="{FF2B5EF4-FFF2-40B4-BE49-F238E27FC236}">
+              <a16:creationId xmlns:a16="http://schemas.microsoft.com/office/drawing/2014/main" id="{3B2DECAD-2006-5D29-D447-5431E316CB91}"/>
+            </a:ext>
+          </a:extLst>
+        </p:cNvPr>
+        <p:cNvGrpSpPr/>
+        <p:nvPr/>
+      </p:nvGrpSpPr>
+      <p:grpSpPr>
+        <a:xfrm>
+          <a:off x="0" y="0"/>
+          <a:ext cx="0" cy="0"/>
+          <a:chOff x="0" y="0"/>
+          <a:chExt cx="0" cy="0"/>
+        </a:xfrm>
+      </p:grpSpPr>
+      <p:sp>
+        <p:nvSpPr>
+          <p:cNvPr id="2" name="Title 1">
+            <a:extLst>
+              <a:ext uri="{FF2B5EF4-FFF2-40B4-BE49-F238E27FC236}">
+                <a16:creationId xmlns:a16="http://schemas.microsoft.com/office/drawing/2014/main" id="{92141592-EFB4-4F5E-16A8-46209E9C8E76}"/>
+              </a:ext>
+            </a:extLst>
+          </p:cNvPr>
+          <p:cNvSpPr>
+            <a:spLocks noGrp="1"/>
+          </p:cNvSpPr>
+          <p:nvPr>
+            <p:ph type="title"/>
+          </p:nvPr>
+        </p:nvSpPr>
+        <p:spPr>
+          <a:xfrm>
+            <a:off x="526211" y="365125"/>
+            <a:ext cx="11205714" cy="1325563"/>
+          </a:xfrm>
+        </p:spPr>
+        <p:txBody>
+          <a:bodyPr/>
+          <a:lstStyle/>
+          <a:p>
+            <a:r>
+              <a:rPr lang="en-GB" dirty="0"/>
+              <a:t>Process steps: Lightroom (1)</a:t>
+            </a:r>
+            <a:endParaRPr lang="nl-NL" dirty="0"/>
+          </a:p>
+        </p:txBody>
+      </p:sp>
+      <p:sp>
+        <p:nvSpPr>
+          <p:cNvPr id="3" name="Content Placeholder 2">
+            <a:extLst>
+              <a:ext uri="{FF2B5EF4-FFF2-40B4-BE49-F238E27FC236}">
+                <a16:creationId xmlns:a16="http://schemas.microsoft.com/office/drawing/2014/main" id="{9AD8FE44-DC25-3E4E-635F-7F993EE08E4A}"/>
+              </a:ext>
+            </a:extLst>
+          </p:cNvPr>
+          <p:cNvSpPr>
+            <a:spLocks noGrp="1"/>
+          </p:cNvSpPr>
+          <p:nvPr>
+            <p:ph idx="1"/>
+          </p:nvPr>
+        </p:nvSpPr>
+        <p:spPr/>
+        <p:txBody>
+          <a:bodyPr>
+            <a:normAutofit/>
+          </a:bodyPr>
+          <a:lstStyle/>
+          <a:p>
+            <a:pPr marL="0" indent="0">
+              <a:buNone/>
+            </a:pPr>
+            <a:r>
+              <a:rPr lang="en-GB" sz="2400" dirty="0"/>
+              <a:t>Lightroom steps:</a:t>
+            </a:r>
+          </a:p>
+          <a:p>
+            <a:pPr marL="457200" indent="-457200">
+              <a:buFont typeface="+mj-lt"/>
+              <a:buAutoNum type="arabicPeriod"/>
+            </a:pPr>
+            <a:r>
+              <a:rPr lang="nl-NL" sz="2000" dirty="0" err="1"/>
+              <a:t>Create</a:t>
+            </a:r>
+            <a:r>
+              <a:rPr lang="nl-NL" sz="2000" dirty="0"/>
+              <a:t> a directory </a:t>
+            </a:r>
+            <a:r>
+              <a:rPr lang="nl-NL" sz="2000" dirty="0" err="1"/>
+              <a:t>for</a:t>
+            </a:r>
+            <a:r>
+              <a:rPr lang="nl-NL" sz="2000" dirty="0"/>
+              <a:t> </a:t>
+            </a:r>
+            <a:r>
+              <a:rPr lang="nl-NL" sz="2000" dirty="0" err="1"/>
+              <a:t>every</a:t>
+            </a:r>
+            <a:r>
+              <a:rPr lang="nl-NL" sz="2000" dirty="0"/>
+              <a:t> </a:t>
+            </a:r>
+            <a:br>
+              <a:rPr lang="nl-NL" sz="2000" dirty="0"/>
+            </a:br>
+            <a:r>
+              <a:rPr lang="nl-NL" sz="2000" dirty="0" err="1"/>
+              <a:t>day</a:t>
+            </a:r>
+            <a:r>
+              <a:rPr lang="nl-NL" sz="2000" dirty="0"/>
+              <a:t> </a:t>
+            </a:r>
+            <a:r>
+              <a:rPr lang="nl-NL" sz="2000" dirty="0" err="1"/>
+              <a:t>while</a:t>
+            </a:r>
+            <a:r>
+              <a:rPr lang="nl-NL" sz="2000" dirty="0"/>
+              <a:t> running input </a:t>
+            </a:r>
+          </a:p>
+          <a:p>
+            <a:pPr marL="457200" indent="-457200">
+              <a:buFont typeface="+mj-lt"/>
+              <a:buAutoNum type="arabicPeriod"/>
+            </a:pPr>
+            <a:r>
+              <a:rPr lang="nl-NL" sz="2000" dirty="0"/>
+              <a:t>Make </a:t>
+            </a:r>
+            <a:r>
+              <a:rPr lang="nl-NL" sz="2000" dirty="0" err="1"/>
+              <a:t>unique</a:t>
+            </a:r>
+            <a:r>
+              <a:rPr lang="nl-NL" sz="2000" dirty="0"/>
+              <a:t> </a:t>
+            </a:r>
+            <a:r>
+              <a:rPr lang="nl-NL" sz="2000" dirty="0" err="1"/>
+              <a:t>names</a:t>
+            </a:r>
+            <a:r>
+              <a:rPr lang="nl-NL" sz="2000" dirty="0"/>
+              <a:t> </a:t>
+            </a:r>
+            <a:r>
+              <a:rPr lang="nl-NL" sz="2000" dirty="0" err="1"/>
+              <a:t>with</a:t>
+            </a:r>
+            <a:r>
+              <a:rPr lang="nl-NL" sz="2000" dirty="0"/>
+              <a:t> </a:t>
+            </a:r>
+            <a:br>
+              <a:rPr lang="nl-NL" sz="2000" dirty="0"/>
+            </a:br>
+            <a:r>
+              <a:rPr lang="nl-NL" sz="2000" dirty="0" err="1"/>
+              <a:t>year</a:t>
+            </a:r>
+            <a:r>
+              <a:rPr lang="nl-NL" sz="2000" dirty="0"/>
+              <a:t> </a:t>
+            </a:r>
+            <a:r>
+              <a:rPr lang="nl-NL" sz="2000" dirty="0" err="1"/>
+              <a:t>and</a:t>
+            </a:r>
+            <a:r>
+              <a:rPr lang="nl-NL" sz="2000" dirty="0"/>
+              <a:t> </a:t>
+            </a:r>
+            <a:r>
+              <a:rPr lang="nl-NL" sz="2000" dirty="0" err="1"/>
+              <a:t>month</a:t>
+            </a:r>
+            <a:r>
+              <a:rPr lang="nl-NL" sz="2000" dirty="0"/>
+              <a:t> or topic</a:t>
+            </a:r>
+          </a:p>
+          <a:p>
+            <a:pPr marL="457200" indent="-457200">
+              <a:buFont typeface="+mj-lt"/>
+              <a:buAutoNum type="arabicPeriod"/>
+            </a:pPr>
+            <a:r>
+              <a:rPr lang="nl-NL" sz="2000" dirty="0"/>
+              <a:t>We </a:t>
+            </a:r>
+            <a:r>
+              <a:rPr lang="nl-NL" sz="2000" dirty="0" err="1"/>
+              <a:t>already</a:t>
+            </a:r>
+            <a:r>
+              <a:rPr lang="nl-NL" sz="2000" dirty="0"/>
+              <a:t> have a </a:t>
+            </a:r>
+            <a:br>
+              <a:rPr lang="nl-NL" sz="2000" dirty="0"/>
+            </a:br>
+            <a:r>
+              <a:rPr lang="nl-NL" sz="2000" dirty="0" err="1"/>
+              <a:t>PhotoMechanic</a:t>
+            </a:r>
+            <a:r>
+              <a:rPr lang="nl-NL" sz="2000" dirty="0"/>
+              <a:t> copy (3).</a:t>
+            </a:r>
+          </a:p>
+          <a:p>
+            <a:pPr marL="0" indent="0">
+              <a:buNone/>
+            </a:pPr>
+            <a:endParaRPr lang="en-GB" sz="2000" dirty="0"/>
+          </a:p>
+        </p:txBody>
+      </p:sp>
+      <p:pic>
+        <p:nvPicPr>
+          <p:cNvPr id="11" name="Picture 10">
+            <a:extLst>
+              <a:ext uri="{FF2B5EF4-FFF2-40B4-BE49-F238E27FC236}">
+                <a16:creationId xmlns:a16="http://schemas.microsoft.com/office/drawing/2014/main" id="{9F246CBC-DAAF-3110-80C4-8476EBD2C0E2}"/>
+              </a:ext>
+            </a:extLst>
+          </p:cNvPr>
+          <p:cNvPicPr>
+            <a:picLocks noChangeAspect="1"/>
+          </p:cNvPicPr>
+          <p:nvPr/>
+        </p:nvPicPr>
+        <p:blipFill>
+          <a:blip r:embed="rId2"/>
+          <a:stretch>
+            <a:fillRect/>
+          </a:stretch>
+        </p:blipFill>
+        <p:spPr>
+          <a:xfrm>
+            <a:off x="4660738" y="1825625"/>
+            <a:ext cx="7426044" cy="4264624"/>
+          </a:xfrm>
+          <a:prstGeom prst="rect">
+            <a:avLst/>
+          </a:prstGeom>
+        </p:spPr>
+      </p:pic>
+    </p:spTree>
+    <p:extLst>
+      <p:ext uri="{BB962C8B-B14F-4D97-AF65-F5344CB8AC3E}">
+        <p14:creationId xmlns:p14="http://schemas.microsoft.com/office/powerpoint/2010/main" val="781237699"/>
+      </p:ext>
+    </p:extLst>
+  </p:cSld>
+  <p:clrMapOvr>
+    <a:masterClrMapping/>
+  </p:clrMapOvr>
+</p:sld>
+</file>
+
+<file path=ppt/slides/slide12.xml><?xml version="1.0" encoding="utf-8"?>
+<p:sld xmlns:a="http://schemas.openxmlformats.org/drawingml/2006/main" xmlns:r="http://schemas.openxmlformats.org/officeDocument/2006/relationships" xmlns:p="http://schemas.openxmlformats.org/presentationml/2006/main">
+  <p:cSld>
+    <p:spTree>
+      <p:nvGrpSpPr>
+        <p:cNvPr id="1" name="">
+          <a:extLst>
+            <a:ext uri="{FF2B5EF4-FFF2-40B4-BE49-F238E27FC236}">
+              <a16:creationId xmlns:a16="http://schemas.microsoft.com/office/drawing/2014/main" id="{4B7EAB89-D02E-2E47-5685-33BAF3A20791}"/>
+            </a:ext>
+          </a:extLst>
+        </p:cNvPr>
+        <p:cNvGrpSpPr/>
+        <p:nvPr/>
+      </p:nvGrpSpPr>
+      <p:grpSpPr>
+        <a:xfrm>
+          <a:off x="0" y="0"/>
+          <a:ext cx="0" cy="0"/>
+          <a:chOff x="0" y="0"/>
+          <a:chExt cx="0" cy="0"/>
+        </a:xfrm>
+      </p:grpSpPr>
+      <p:sp>
+        <p:nvSpPr>
+          <p:cNvPr id="2" name="Title 1">
+            <a:extLst>
+              <a:ext uri="{FF2B5EF4-FFF2-40B4-BE49-F238E27FC236}">
+                <a16:creationId xmlns:a16="http://schemas.microsoft.com/office/drawing/2014/main" id="{87A29824-89AC-2184-83AA-77162AE6576D}"/>
+              </a:ext>
+            </a:extLst>
+          </p:cNvPr>
+          <p:cNvSpPr>
+            <a:spLocks noGrp="1"/>
+          </p:cNvSpPr>
+          <p:nvPr>
+            <p:ph type="title"/>
+          </p:nvPr>
+        </p:nvSpPr>
+        <p:spPr>
+          <a:xfrm>
+            <a:off x="526211" y="365125"/>
+            <a:ext cx="11205714" cy="1325563"/>
+          </a:xfrm>
+        </p:spPr>
+        <p:txBody>
+          <a:bodyPr/>
+          <a:lstStyle/>
+          <a:p>
+            <a:r>
+              <a:rPr lang="en-GB" dirty="0"/>
+              <a:t>Process steps: Lightroom (2)</a:t>
+            </a:r>
+            <a:endParaRPr lang="nl-NL" dirty="0"/>
+          </a:p>
+        </p:txBody>
+      </p:sp>
+      <p:sp>
+        <p:nvSpPr>
+          <p:cNvPr id="3" name="Content Placeholder 2">
+            <a:extLst>
+              <a:ext uri="{FF2B5EF4-FFF2-40B4-BE49-F238E27FC236}">
+                <a16:creationId xmlns:a16="http://schemas.microsoft.com/office/drawing/2014/main" id="{209C6F0B-B850-9F4A-D2C1-C4A808E724D9}"/>
+              </a:ext>
+            </a:extLst>
+          </p:cNvPr>
+          <p:cNvSpPr>
+            <a:spLocks noGrp="1"/>
+          </p:cNvSpPr>
+          <p:nvPr>
+            <p:ph idx="1"/>
+          </p:nvPr>
+        </p:nvSpPr>
+        <p:spPr/>
+        <p:txBody>
+          <a:bodyPr>
+            <a:normAutofit/>
+          </a:bodyPr>
+          <a:lstStyle/>
+          <a:p>
+            <a:pPr marL="0" indent="0">
+              <a:buNone/>
+            </a:pPr>
+            <a:r>
+              <a:rPr lang="en-GB" sz="2400" dirty="0"/>
+              <a:t>Lightroom steps</a:t>
+            </a:r>
+          </a:p>
+          <a:p>
+            <a:pPr marL="457200" indent="-457200">
+              <a:buFont typeface="+mj-lt"/>
+              <a:buAutoNum type="arabicPeriod"/>
+            </a:pPr>
+            <a:r>
+              <a:rPr lang="nl-NL" sz="2000" dirty="0"/>
+              <a:t>Make </a:t>
+            </a:r>
+            <a:r>
+              <a:rPr lang="nl-NL" sz="2000" dirty="0" err="1"/>
+              <a:t>sure</a:t>
+            </a:r>
+            <a:r>
+              <a:rPr lang="nl-NL" sz="2000" dirty="0"/>
+              <a:t> </a:t>
+            </a:r>
+            <a:r>
+              <a:rPr lang="nl-NL" sz="2000" dirty="0" err="1"/>
+              <a:t>all</a:t>
+            </a:r>
+            <a:r>
+              <a:rPr lang="nl-NL" sz="2000" dirty="0"/>
+              <a:t> time-zone </a:t>
+            </a:r>
+            <a:r>
+              <a:rPr lang="nl-NL" sz="2000" dirty="0" err="1"/>
+              <a:t>settings</a:t>
+            </a:r>
+            <a:r>
+              <a:rPr lang="nl-NL" sz="2000" dirty="0"/>
+              <a:t> are </a:t>
+            </a:r>
+            <a:br>
+              <a:rPr lang="nl-NL" sz="2000" dirty="0"/>
+            </a:br>
+            <a:r>
+              <a:rPr lang="nl-NL" sz="2000" dirty="0" err="1"/>
+              <a:t>good</a:t>
+            </a:r>
+            <a:r>
+              <a:rPr lang="nl-NL" sz="2000" dirty="0"/>
+              <a:t>, </a:t>
+            </a:r>
+            <a:r>
+              <a:rPr lang="nl-NL" sz="2000" dirty="0" err="1"/>
+              <a:t>if</a:t>
+            </a:r>
+            <a:r>
+              <a:rPr lang="nl-NL" sz="2000" dirty="0"/>
+              <a:t> </a:t>
+            </a:r>
+            <a:r>
+              <a:rPr lang="nl-NL" sz="2000" dirty="0" err="1"/>
+              <a:t>not</a:t>
+            </a:r>
+            <a:r>
+              <a:rPr lang="nl-NL" sz="2000" dirty="0"/>
+              <a:t> </a:t>
+            </a:r>
+            <a:r>
+              <a:rPr lang="nl-NL" sz="2000" dirty="0" err="1"/>
+              <a:t>adjust</a:t>
+            </a:r>
+            <a:r>
+              <a:rPr lang="nl-NL" sz="2000" dirty="0"/>
+              <a:t> </a:t>
+            </a:r>
+            <a:r>
+              <a:rPr lang="nl-NL" sz="2000" dirty="0" err="1"/>
+              <a:t>them</a:t>
+            </a:r>
+            <a:r>
+              <a:rPr lang="nl-NL" sz="2000" dirty="0"/>
+              <a:t> (top right).</a:t>
+            </a:r>
+          </a:p>
+          <a:p>
+            <a:pPr marL="457200" indent="-457200">
+              <a:buFont typeface="+mj-lt"/>
+              <a:buAutoNum type="arabicPeriod"/>
+            </a:pPr>
+            <a:r>
+              <a:rPr lang="nl-NL" sz="2000" dirty="0"/>
+              <a:t>Make </a:t>
+            </a:r>
+            <a:r>
+              <a:rPr lang="nl-NL" sz="2000" dirty="0" err="1"/>
+              <a:t>sure</a:t>
+            </a:r>
+            <a:r>
+              <a:rPr lang="nl-NL" sz="2000" dirty="0"/>
+              <a:t> </a:t>
+            </a:r>
+            <a:r>
+              <a:rPr lang="nl-NL" sz="2000" dirty="0" err="1"/>
+              <a:t>the</a:t>
+            </a:r>
+            <a:r>
+              <a:rPr lang="nl-NL" sz="2000" dirty="0"/>
+              <a:t> appropriatie pictures </a:t>
+            </a:r>
+            <a:br>
+              <a:rPr lang="nl-NL" sz="2000" dirty="0"/>
+            </a:br>
+            <a:r>
+              <a:rPr lang="nl-NL" sz="2000" dirty="0"/>
+              <a:t>get a species name (</a:t>
+            </a:r>
+            <a:r>
+              <a:rPr lang="nl-NL" sz="2000" dirty="0" err="1"/>
+              <a:t>bottom</a:t>
+            </a:r>
+            <a:r>
+              <a:rPr lang="nl-NL" sz="2000" dirty="0"/>
+              <a:t> right)</a:t>
+            </a:r>
+          </a:p>
+          <a:p>
+            <a:pPr marL="457200" indent="-457200">
+              <a:buFont typeface="+mj-lt"/>
+              <a:buAutoNum type="arabicPeriod"/>
+            </a:pPr>
+            <a:r>
+              <a:rPr lang="nl-NL" sz="2000" dirty="0" err="1"/>
+              <a:t>Use</a:t>
+            </a:r>
+            <a:r>
+              <a:rPr lang="nl-NL" sz="2000" dirty="0"/>
+              <a:t> stars </a:t>
+            </a:r>
+            <a:r>
+              <a:rPr lang="nl-NL" sz="2000" dirty="0" err="1"/>
+              <a:t>to</a:t>
+            </a:r>
+            <a:r>
+              <a:rPr lang="nl-NL" sz="2000" dirty="0"/>
+              <a:t> mark </a:t>
+            </a:r>
+            <a:r>
+              <a:rPr lang="nl-NL" sz="2000" dirty="0" err="1"/>
+              <a:t>the</a:t>
+            </a:r>
+            <a:r>
+              <a:rPr lang="nl-NL" sz="2000" dirty="0"/>
+              <a:t> best pictures, </a:t>
+            </a:r>
+            <a:br>
+              <a:rPr lang="nl-NL" sz="2000" dirty="0"/>
+            </a:br>
+            <a:r>
+              <a:rPr lang="nl-NL" sz="2000" dirty="0"/>
+              <a:t>eg show </a:t>
+            </a:r>
+            <a:r>
+              <a:rPr lang="nl-NL" sz="2000" dirty="0" err="1"/>
+              <a:t>them</a:t>
+            </a:r>
+            <a:r>
+              <a:rPr lang="nl-NL" sz="2000" dirty="0"/>
+              <a:t> on </a:t>
+            </a:r>
+            <a:r>
+              <a:rPr lang="nl-NL" sz="2000" dirty="0" err="1"/>
+              <a:t>the</a:t>
+            </a:r>
+            <a:r>
+              <a:rPr lang="nl-NL" sz="2000" dirty="0"/>
+              <a:t> web site</a:t>
+            </a:r>
+          </a:p>
+          <a:p>
+            <a:pPr marL="457200" indent="-457200">
+              <a:buFont typeface="+mj-lt"/>
+              <a:buAutoNum type="arabicPeriod"/>
+            </a:pPr>
+            <a:r>
+              <a:rPr lang="nl-NL" sz="2000" dirty="0"/>
+              <a:t>Update </a:t>
+            </a:r>
+            <a:r>
+              <a:rPr lang="nl-NL" sz="2000" dirty="0" err="1"/>
+              <a:t>the</a:t>
+            </a:r>
+            <a:r>
+              <a:rPr lang="nl-NL" sz="2000" dirty="0"/>
+              <a:t> </a:t>
+            </a:r>
+            <a:r>
+              <a:rPr lang="nl-NL" sz="2000" dirty="0" err="1"/>
+              <a:t>color</a:t>
+            </a:r>
+            <a:r>
+              <a:rPr lang="nl-NL" sz="2000" dirty="0"/>
+              <a:t> as </a:t>
+            </a:r>
+            <a:r>
+              <a:rPr lang="nl-NL" sz="2000" dirty="0" err="1"/>
+              <a:t>needed</a:t>
+            </a:r>
+            <a:r>
+              <a:rPr lang="nl-NL" sz="2000" dirty="0"/>
+              <a:t>, eg </a:t>
+            </a:r>
+            <a:br>
+              <a:rPr lang="nl-NL" sz="2000" dirty="0"/>
+            </a:br>
+            <a:r>
+              <a:rPr lang="nl-NL" sz="2000" dirty="0" err="1"/>
+              <a:t>to</a:t>
+            </a:r>
+            <a:r>
+              <a:rPr lang="nl-NL" sz="2000" dirty="0"/>
+              <a:t> </a:t>
+            </a:r>
+            <a:r>
+              <a:rPr lang="nl-NL" sz="2000" dirty="0" err="1"/>
+              <a:t>find</a:t>
+            </a:r>
+            <a:r>
+              <a:rPr lang="nl-NL" sz="2000" dirty="0"/>
+              <a:t> </a:t>
+            </a:r>
+            <a:r>
+              <a:rPr lang="nl-NL" sz="2000" dirty="0" err="1"/>
+              <a:t>the</a:t>
+            </a:r>
+            <a:r>
+              <a:rPr lang="nl-NL" sz="2000" dirty="0"/>
+              <a:t> best pictures </a:t>
+            </a:r>
+            <a:r>
+              <a:rPr lang="nl-NL" sz="2000" dirty="0" err="1"/>
+              <a:t>for</a:t>
+            </a:r>
+            <a:r>
+              <a:rPr lang="nl-NL" sz="2000" dirty="0"/>
+              <a:t> a species</a:t>
+            </a:r>
+          </a:p>
+          <a:p>
+            <a:pPr marL="457200" indent="-457200">
+              <a:buFont typeface="+mj-lt"/>
+              <a:buAutoNum type="arabicPeriod"/>
+            </a:pPr>
+            <a:endParaRPr lang="nl-NL" sz="2000" dirty="0"/>
+          </a:p>
+          <a:p>
+            <a:pPr marL="0" indent="0">
+              <a:buNone/>
+            </a:pPr>
+            <a:endParaRPr lang="en-GB" sz="2000" dirty="0"/>
+          </a:p>
+        </p:txBody>
+      </p:sp>
+      <p:pic>
+        <p:nvPicPr>
+          <p:cNvPr id="7" name="Picture 6">
+            <a:extLst>
+              <a:ext uri="{FF2B5EF4-FFF2-40B4-BE49-F238E27FC236}">
+                <a16:creationId xmlns:a16="http://schemas.microsoft.com/office/drawing/2014/main" id="{AEEA3D84-D584-524E-DB68-49200F866463}"/>
+              </a:ext>
+            </a:extLst>
+          </p:cNvPr>
+          <p:cNvPicPr>
+            <a:picLocks noChangeAspect="1"/>
+          </p:cNvPicPr>
+          <p:nvPr/>
+        </p:nvPicPr>
+        <p:blipFill>
+          <a:blip r:embed="rId2"/>
+          <a:stretch>
+            <a:fillRect/>
+          </a:stretch>
+        </p:blipFill>
+        <p:spPr>
+          <a:xfrm>
+            <a:off x="5482147" y="1406015"/>
+            <a:ext cx="6431915" cy="2726037"/>
+          </a:xfrm>
+          <a:prstGeom prst="rect">
+            <a:avLst/>
+          </a:prstGeom>
+        </p:spPr>
+      </p:pic>
+      <p:pic>
+        <p:nvPicPr>
+          <p:cNvPr id="5" name="Picture 4">
+            <a:extLst>
+              <a:ext uri="{FF2B5EF4-FFF2-40B4-BE49-F238E27FC236}">
+                <a16:creationId xmlns:a16="http://schemas.microsoft.com/office/drawing/2014/main" id="{F94402EB-F819-0F6E-9C79-BCF7D170BA6B}"/>
+              </a:ext>
+            </a:extLst>
+          </p:cNvPr>
+          <p:cNvPicPr>
+            <a:picLocks noChangeAspect="1"/>
+          </p:cNvPicPr>
+          <p:nvPr/>
+        </p:nvPicPr>
+        <p:blipFill>
+          <a:blip r:embed="rId3"/>
+          <a:stretch>
+            <a:fillRect/>
+          </a:stretch>
+        </p:blipFill>
+        <p:spPr>
+          <a:xfrm>
+            <a:off x="5522203" y="4001294"/>
+            <a:ext cx="6195872" cy="6754483"/>
+          </a:xfrm>
+          <a:prstGeom prst="rect">
+            <a:avLst/>
+          </a:prstGeom>
+        </p:spPr>
+      </p:pic>
+    </p:spTree>
+    <p:extLst>
+      <p:ext uri="{BB962C8B-B14F-4D97-AF65-F5344CB8AC3E}">
+        <p14:creationId xmlns:p14="http://schemas.microsoft.com/office/powerpoint/2010/main" val="3412226774"/>
+      </p:ext>
+    </p:extLst>
+  </p:cSld>
+  <p:clrMapOvr>
+    <a:masterClrMapping/>
+  </p:clrMapOvr>
+</p:sld>
+</file>
+
+<file path=ppt/slides/slide13.xml><?xml version="1.0" encoding="utf-8"?>
+<p:sld xmlns:a="http://schemas.openxmlformats.org/drawingml/2006/main" xmlns:r="http://schemas.openxmlformats.org/officeDocument/2006/relationships" xmlns:p="http://schemas.openxmlformats.org/presentationml/2006/main">
+  <p:cSld>
+    <p:spTree>
+      <p:nvGrpSpPr>
+        <p:cNvPr id="1" name="">
+          <a:extLst>
+            <a:ext uri="{FF2B5EF4-FFF2-40B4-BE49-F238E27FC236}">
+              <a16:creationId xmlns:a16="http://schemas.microsoft.com/office/drawing/2014/main" id="{A1145E54-8F27-B4D4-5AFA-0F846DD51F2E}"/>
+            </a:ext>
+          </a:extLst>
+        </p:cNvPr>
+        <p:cNvGrpSpPr/>
+        <p:nvPr/>
+      </p:nvGrpSpPr>
+      <p:grpSpPr>
+        <a:xfrm>
+          <a:off x="0" y="0"/>
+          <a:ext cx="0" cy="0"/>
+          <a:chOff x="0" y="0"/>
+          <a:chExt cx="0" cy="0"/>
+        </a:xfrm>
+      </p:grpSpPr>
+      <p:sp>
+        <p:nvSpPr>
+          <p:cNvPr id="2" name="Title 1">
+            <a:extLst>
+              <a:ext uri="{FF2B5EF4-FFF2-40B4-BE49-F238E27FC236}">
+                <a16:creationId xmlns:a16="http://schemas.microsoft.com/office/drawing/2014/main" id="{36EC1A49-EF08-0B3F-846F-EF590D17F625}"/>
+              </a:ext>
+            </a:extLst>
+          </p:cNvPr>
+          <p:cNvSpPr>
+            <a:spLocks noGrp="1"/>
+          </p:cNvSpPr>
+          <p:nvPr>
+            <p:ph type="title"/>
+          </p:nvPr>
+        </p:nvSpPr>
+        <p:spPr>
+          <a:xfrm>
+            <a:off x="526211" y="365125"/>
+            <a:ext cx="11205714" cy="1325563"/>
+          </a:xfrm>
+        </p:spPr>
+        <p:txBody>
+          <a:bodyPr/>
+          <a:lstStyle/>
+          <a:p>
+            <a:r>
+              <a:rPr lang="en-GB" dirty="0"/>
+              <a:t>Process steps: DxO </a:t>
+            </a:r>
+            <a:r>
+              <a:rPr lang="en-GB" dirty="0" err="1"/>
+              <a:t>PhotoLab</a:t>
+            </a:r>
+            <a:endParaRPr lang="nl-NL" dirty="0"/>
+          </a:p>
+        </p:txBody>
+      </p:sp>
+      <p:sp>
+        <p:nvSpPr>
+          <p:cNvPr id="3" name="Content Placeholder 2">
+            <a:extLst>
+              <a:ext uri="{FF2B5EF4-FFF2-40B4-BE49-F238E27FC236}">
+                <a16:creationId xmlns:a16="http://schemas.microsoft.com/office/drawing/2014/main" id="{F996226A-2CD0-D5D3-F5CF-06BAC293379A}"/>
+              </a:ext>
+            </a:extLst>
+          </p:cNvPr>
+          <p:cNvSpPr>
+            <a:spLocks noGrp="1"/>
+          </p:cNvSpPr>
+          <p:nvPr>
+            <p:ph idx="1"/>
+          </p:nvPr>
+        </p:nvSpPr>
+        <p:spPr/>
+        <p:txBody>
+          <a:bodyPr>
+            <a:normAutofit/>
+          </a:bodyPr>
+          <a:lstStyle/>
+          <a:p>
+            <a:pPr marL="0" indent="0">
+              <a:buNone/>
+            </a:pPr>
+            <a:r>
+              <a:rPr lang="en-GB" sz="2400" dirty="0"/>
+              <a:t>DxO </a:t>
+            </a:r>
+            <a:r>
+              <a:rPr lang="en-GB" sz="2400" dirty="0" err="1"/>
+              <a:t>PhotoLab</a:t>
+            </a:r>
+            <a:r>
+              <a:rPr lang="en-GB" sz="2400" dirty="0"/>
+              <a:t> does do miracles to (high ISO) pictures, worth a separate step. </a:t>
+            </a:r>
+          </a:p>
+          <a:p>
+            <a:pPr marL="457200" indent="-457200">
+              <a:buFont typeface="+mj-lt"/>
+              <a:buAutoNum type="arabicPeriod"/>
+            </a:pPr>
+            <a:r>
+              <a:rPr lang="en-GB" sz="2400" dirty="0"/>
+              <a:t>C</a:t>
+            </a:r>
+            <a:r>
+              <a:rPr lang="nl-NL" sz="2000" dirty="0"/>
+              <a:t>rop </a:t>
+            </a:r>
+            <a:r>
+              <a:rPr lang="nl-NL" sz="2000" dirty="0" err="1"/>
+              <a:t>and</a:t>
+            </a:r>
+            <a:r>
+              <a:rPr lang="nl-NL" sz="2000" dirty="0"/>
+              <a:t> </a:t>
+            </a:r>
+            <a:r>
+              <a:rPr lang="nl-NL" sz="2000" dirty="0" err="1"/>
+              <a:t>sharpen</a:t>
+            </a:r>
+            <a:r>
+              <a:rPr lang="nl-NL" sz="2000" dirty="0"/>
+              <a:t> </a:t>
+            </a:r>
+            <a:r>
+              <a:rPr lang="nl-NL" sz="2000" dirty="0" err="1"/>
+              <a:t>the</a:t>
+            </a:r>
+            <a:r>
+              <a:rPr lang="nl-NL" sz="2000" dirty="0"/>
+              <a:t> best pictures </a:t>
+            </a:r>
+            <a:r>
+              <a:rPr lang="nl-NL" sz="2000" dirty="0" err="1"/>
+              <a:t>with</a:t>
+            </a:r>
+            <a:r>
+              <a:rPr lang="nl-NL" sz="2000" dirty="0"/>
+              <a:t> DxO </a:t>
+            </a:r>
+            <a:r>
+              <a:rPr lang="nl-NL" sz="2000" dirty="0" err="1"/>
+              <a:t>PhotoLab</a:t>
+            </a:r>
+            <a:endParaRPr lang="nl-NL" sz="2000" dirty="0"/>
+          </a:p>
+          <a:p>
+            <a:pPr lvl="1"/>
+            <a:r>
+              <a:rPr lang="nl-NL" sz="1600" dirty="0" err="1"/>
+              <a:t>PhotoLab</a:t>
+            </a:r>
+            <a:r>
+              <a:rPr lang="nl-NL" sz="1600" dirty="0"/>
+              <a:t> </a:t>
+            </a:r>
+            <a:r>
+              <a:rPr lang="nl-NL" sz="1600" dirty="0" err="1"/>
+              <a:t>advanced</a:t>
+            </a:r>
+            <a:r>
+              <a:rPr lang="nl-NL" sz="1600" dirty="0"/>
+              <a:t> </a:t>
+            </a:r>
+            <a:r>
+              <a:rPr lang="nl-NL" sz="1600" dirty="0" err="1"/>
+              <a:t>sharpening</a:t>
+            </a:r>
+            <a:r>
+              <a:rPr lang="nl-NL" sz="1600" dirty="0"/>
+              <a:t> </a:t>
+            </a:r>
+            <a:r>
+              <a:rPr lang="nl-NL" sz="1600" dirty="0" err="1"/>
+              <a:t>can</a:t>
+            </a:r>
+            <a:r>
+              <a:rPr lang="nl-NL" sz="1600" dirty="0"/>
+              <a:t> </a:t>
+            </a:r>
+            <a:r>
+              <a:rPr lang="nl-NL" sz="1600" dirty="0" err="1"/>
+              <a:t>be</a:t>
+            </a:r>
+            <a:r>
+              <a:rPr lang="nl-NL" sz="1600" dirty="0"/>
+              <a:t> </a:t>
+            </a:r>
+            <a:r>
+              <a:rPr lang="nl-NL" sz="1600" dirty="0" err="1"/>
+              <a:t>too</a:t>
+            </a:r>
+            <a:r>
+              <a:rPr lang="nl-NL" sz="1600" dirty="0"/>
+              <a:t> slow on a </a:t>
+            </a:r>
+            <a:r>
+              <a:rPr lang="nl-NL" sz="1600" dirty="0" err="1"/>
+              <a:t>travel</a:t>
+            </a:r>
+            <a:r>
+              <a:rPr lang="nl-NL" sz="1600" dirty="0"/>
+              <a:t> (Windows) laptop.</a:t>
+            </a:r>
+          </a:p>
+          <a:p>
+            <a:pPr marL="457200" indent="-457200">
+              <a:buFont typeface="+mj-lt"/>
+              <a:buAutoNum type="arabicPeriod"/>
+            </a:pPr>
+            <a:r>
+              <a:rPr lang="nl-NL" sz="2000" dirty="0" err="1"/>
+              <a:t>Many</a:t>
+            </a:r>
+            <a:r>
+              <a:rPr lang="nl-NL" sz="2000" dirty="0"/>
+              <a:t> options </a:t>
+            </a:r>
+            <a:r>
+              <a:rPr lang="nl-NL" sz="2000" dirty="0" err="1"/>
+              <a:t>similar</a:t>
+            </a:r>
+            <a:r>
+              <a:rPr lang="nl-NL" sz="2000" dirty="0"/>
+              <a:t> </a:t>
+            </a:r>
+            <a:r>
+              <a:rPr lang="nl-NL" sz="2000" dirty="0" err="1"/>
+              <a:t>to</a:t>
+            </a:r>
+            <a:r>
+              <a:rPr lang="nl-NL" sz="2000" dirty="0"/>
+              <a:t> </a:t>
+            </a:r>
+            <a:r>
+              <a:rPr lang="nl-NL" sz="2000" dirty="0" err="1"/>
+              <a:t>what</a:t>
+            </a:r>
+            <a:r>
+              <a:rPr lang="nl-NL" sz="2000" dirty="0"/>
+              <a:t> </a:t>
+            </a:r>
+            <a:r>
+              <a:rPr lang="nl-NL" sz="2000" dirty="0" err="1"/>
+              <a:t>Lightroom</a:t>
+            </a:r>
+            <a:r>
+              <a:rPr lang="nl-NL" sz="2000" dirty="0"/>
+              <a:t> has, but </a:t>
+            </a:r>
+            <a:r>
+              <a:rPr lang="nl-NL" sz="2000" dirty="0" err="1"/>
+              <a:t>the</a:t>
+            </a:r>
+            <a:r>
+              <a:rPr lang="nl-NL" sz="2000" dirty="0"/>
+              <a:t> </a:t>
+            </a:r>
+            <a:r>
+              <a:rPr lang="nl-NL" sz="2000" dirty="0" err="1"/>
+              <a:t>sharpening</a:t>
+            </a:r>
+            <a:r>
+              <a:rPr lang="nl-NL" sz="2000" dirty="0"/>
+              <a:t> is superior</a:t>
+            </a:r>
+          </a:p>
+          <a:p>
+            <a:pPr lvl="1"/>
+            <a:r>
+              <a:rPr lang="nl-NL" sz="1600" dirty="0"/>
+              <a:t>WARNING: </a:t>
+            </a:r>
+            <a:r>
+              <a:rPr lang="nl-NL" sz="1600" dirty="0" err="1"/>
+              <a:t>the</a:t>
+            </a:r>
+            <a:r>
+              <a:rPr lang="nl-NL" sz="1600" dirty="0"/>
+              <a:t> </a:t>
+            </a:r>
+            <a:r>
+              <a:rPr lang="nl-NL" sz="1600" dirty="0" err="1"/>
+              <a:t>cropping</a:t>
+            </a:r>
+            <a:r>
+              <a:rPr lang="nl-NL" sz="1600" dirty="0"/>
+              <a:t> in </a:t>
+            </a:r>
+            <a:r>
+              <a:rPr lang="nl-NL" sz="1600" dirty="0" err="1"/>
+              <a:t>Lightroom</a:t>
+            </a:r>
+            <a:r>
+              <a:rPr lang="nl-NL" sz="1600" dirty="0"/>
+              <a:t> is </a:t>
+            </a:r>
+            <a:r>
+              <a:rPr lang="nl-NL" sz="1600" dirty="0" err="1"/>
+              <a:t>not</a:t>
+            </a:r>
+            <a:r>
+              <a:rPr lang="nl-NL" sz="1600" dirty="0"/>
+              <a:t> </a:t>
+            </a:r>
+            <a:r>
+              <a:rPr lang="nl-NL" sz="1600" dirty="0" err="1"/>
+              <a:t>visible</a:t>
+            </a:r>
+            <a:r>
+              <a:rPr lang="nl-NL" sz="1600" dirty="0"/>
+              <a:t> in DxO </a:t>
+            </a:r>
+            <a:r>
+              <a:rPr lang="nl-NL" sz="1600" dirty="0" err="1"/>
+              <a:t>and</a:t>
+            </a:r>
+            <a:r>
+              <a:rPr lang="nl-NL" sz="1600" dirty="0"/>
+              <a:t> </a:t>
+            </a:r>
+            <a:r>
+              <a:rPr lang="nl-NL" sz="1600" dirty="0" err="1"/>
+              <a:t>vice</a:t>
+            </a:r>
+            <a:r>
+              <a:rPr lang="nl-NL" sz="1600" dirty="0"/>
+              <a:t> versa</a:t>
+            </a:r>
+          </a:p>
+          <a:p>
+            <a:pPr marL="457200" indent="-457200">
+              <a:buFont typeface="+mj-lt"/>
+              <a:buAutoNum type="arabicPeriod"/>
+            </a:pPr>
+            <a:r>
+              <a:rPr lang="nl-NL" sz="2000" dirty="0"/>
+              <a:t>Save a JPG</a:t>
+            </a:r>
+          </a:p>
+          <a:p>
+            <a:pPr lvl="1"/>
+            <a:r>
+              <a:rPr lang="nl-NL" sz="1600" dirty="0"/>
+              <a:t>I </a:t>
+            </a:r>
+            <a:r>
+              <a:rPr lang="nl-NL" sz="1600" dirty="0" err="1"/>
+              <a:t>recommend</a:t>
+            </a:r>
+            <a:r>
+              <a:rPr lang="nl-NL" sz="1600" dirty="0"/>
+              <a:t> 2000x1500 </a:t>
+            </a:r>
+            <a:r>
+              <a:rPr lang="nl-NL" sz="1600" dirty="0" err="1"/>
+              <a:t>for</a:t>
+            </a:r>
+            <a:r>
+              <a:rPr lang="nl-NL" sz="1600" dirty="0"/>
+              <a:t> 4:3 pictures on </a:t>
+            </a:r>
+            <a:r>
+              <a:rPr lang="nl-NL" sz="1600" dirty="0" err="1"/>
+              <a:t>the</a:t>
+            </a:r>
+            <a:r>
+              <a:rPr lang="nl-NL" sz="1600" dirty="0"/>
+              <a:t> Web (</a:t>
+            </a:r>
+            <a:r>
+              <a:rPr lang="nl-NL" sz="1600" dirty="0" err="1"/>
+              <a:t>and</a:t>
+            </a:r>
+            <a:r>
+              <a:rPr lang="nl-NL" sz="1600" dirty="0"/>
+              <a:t> 2000x1333 </a:t>
+            </a:r>
+            <a:r>
+              <a:rPr lang="nl-NL" sz="1600" dirty="0" err="1"/>
+              <a:t>for</a:t>
+            </a:r>
+            <a:r>
+              <a:rPr lang="nl-NL" sz="1600" dirty="0"/>
+              <a:t> DX </a:t>
+            </a:r>
+            <a:r>
+              <a:rPr lang="nl-NL" sz="1600" dirty="0" err="1"/>
+              <a:t>and</a:t>
+            </a:r>
+            <a:r>
+              <a:rPr lang="nl-NL" sz="1600" dirty="0"/>
+              <a:t> FF)</a:t>
+            </a:r>
+          </a:p>
+          <a:p>
+            <a:pPr marL="457200" indent="-457200">
+              <a:buFont typeface="+mj-lt"/>
+              <a:buAutoNum type="arabicPeriod"/>
+            </a:pPr>
+            <a:r>
+              <a:rPr lang="nl-NL" sz="2000" dirty="0" err="1"/>
+              <a:t>Publish</a:t>
+            </a:r>
+            <a:r>
+              <a:rPr lang="nl-NL" sz="2000" dirty="0"/>
+              <a:t> </a:t>
+            </a:r>
+            <a:r>
+              <a:rPr lang="nl-NL" sz="2000" dirty="0" err="1"/>
+              <a:t>them</a:t>
+            </a:r>
+            <a:r>
+              <a:rPr lang="nl-NL" sz="2000" dirty="0"/>
+              <a:t> or </a:t>
+            </a:r>
+            <a:r>
+              <a:rPr lang="nl-NL" sz="2000" dirty="0" err="1"/>
+              <a:t>use</a:t>
+            </a:r>
+            <a:r>
+              <a:rPr lang="nl-NL" sz="2000" dirty="0"/>
+              <a:t> SpeciesViewer </a:t>
+            </a:r>
+            <a:r>
+              <a:rPr lang="nl-NL" sz="2000" dirty="0" err="1"/>
+              <a:t>to</a:t>
+            </a:r>
+            <a:r>
+              <a:rPr lang="nl-NL" sz="2000" dirty="0"/>
+              <a:t> </a:t>
+            </a:r>
+            <a:r>
+              <a:rPr lang="nl-NL" sz="2000" dirty="0" err="1"/>
+              <a:t>build</a:t>
+            </a:r>
+            <a:r>
+              <a:rPr lang="nl-NL" sz="2000" dirty="0"/>
+              <a:t> a species website.</a:t>
+            </a:r>
+            <a:br>
+              <a:rPr lang="nl-NL" sz="2000" dirty="0"/>
+            </a:br>
+            <a:endParaRPr lang="nl-NL" sz="2000" dirty="0"/>
+          </a:p>
+          <a:p>
+            <a:pPr marL="0" indent="0">
+              <a:buNone/>
+            </a:pPr>
+            <a:r>
+              <a:rPr lang="en-GB" sz="2000" dirty="0"/>
+              <a:t>DXO </a:t>
+            </a:r>
+            <a:r>
+              <a:rPr lang="en-GB" sz="2000" dirty="0" err="1"/>
+              <a:t>PureRaw</a:t>
+            </a:r>
+            <a:r>
+              <a:rPr lang="en-GB" sz="2000" dirty="0"/>
+              <a:t> is marginally better to reduce noise, but I find </a:t>
+            </a:r>
+            <a:r>
+              <a:rPr lang="en-GB" sz="2000" dirty="0" err="1"/>
+              <a:t>PhotoLab</a:t>
+            </a:r>
+            <a:r>
+              <a:rPr lang="en-GB" sz="2000" dirty="0"/>
+              <a:t> a much more versatile product.</a:t>
+            </a:r>
+          </a:p>
+        </p:txBody>
+      </p:sp>
+    </p:spTree>
+    <p:extLst>
+      <p:ext uri="{BB962C8B-B14F-4D97-AF65-F5344CB8AC3E}">
+        <p14:creationId xmlns:p14="http://schemas.microsoft.com/office/powerpoint/2010/main" val="3377367586"/>
+      </p:ext>
+    </p:extLst>
+  </p:cSld>
+  <p:clrMapOvr>
+    <a:masterClrMapping/>
+  </p:clrMapOvr>
+</p:sld>
+</file>
+
+<file path=ppt/slides/slide14.xml><?xml version="1.0" encoding="utf-8"?>
+<p:sld xmlns:a="http://schemas.openxmlformats.org/drawingml/2006/main" xmlns:r="http://schemas.openxmlformats.org/officeDocument/2006/relationships" xmlns:p="http://schemas.openxmlformats.org/presentationml/2006/main">
+  <p:cSld>
+    <p:spTree>
+      <p:nvGrpSpPr>
+        <p:cNvPr id="1" name="">
+          <a:extLst>
+            <a:ext uri="{FF2B5EF4-FFF2-40B4-BE49-F238E27FC236}">
+              <a16:creationId xmlns:a16="http://schemas.microsoft.com/office/drawing/2014/main" id="{DBA1D579-B0F2-8D05-D218-582482FA4651}"/>
+            </a:ext>
+          </a:extLst>
+        </p:cNvPr>
+        <p:cNvGrpSpPr/>
+        <p:nvPr/>
+      </p:nvGrpSpPr>
+      <p:grpSpPr>
+        <a:xfrm>
+          <a:off x="0" y="0"/>
+          <a:ext cx="0" cy="0"/>
+          <a:chOff x="0" y="0"/>
+          <a:chExt cx="0" cy="0"/>
+        </a:xfrm>
+      </p:grpSpPr>
+      <p:sp>
+        <p:nvSpPr>
+          <p:cNvPr id="2" name="Title 1">
+            <a:extLst>
+              <a:ext uri="{FF2B5EF4-FFF2-40B4-BE49-F238E27FC236}">
+                <a16:creationId xmlns:a16="http://schemas.microsoft.com/office/drawing/2014/main" id="{286675BD-9F49-7EBE-B1F2-3B1163ECD83C}"/>
+              </a:ext>
+            </a:extLst>
+          </p:cNvPr>
+          <p:cNvSpPr>
+            <a:spLocks noGrp="1"/>
+          </p:cNvSpPr>
+          <p:nvPr>
+            <p:ph type="title"/>
+          </p:nvPr>
+        </p:nvSpPr>
+        <p:spPr>
+          <a:xfrm>
+            <a:off x="526211" y="365125"/>
+            <a:ext cx="11205714" cy="1325563"/>
+          </a:xfrm>
+        </p:spPr>
+        <p:txBody>
+          <a:bodyPr/>
+          <a:lstStyle/>
+          <a:p>
+            <a:r>
+              <a:rPr lang="en-GB" dirty="0"/>
+              <a:t>Process steps: SpeciesViewer</a:t>
+            </a:r>
+            <a:endParaRPr lang="nl-NL" dirty="0"/>
+          </a:p>
+        </p:txBody>
+      </p:sp>
+      <p:sp>
+        <p:nvSpPr>
+          <p:cNvPr id="3" name="Content Placeholder 2">
+            <a:extLst>
+              <a:ext uri="{FF2B5EF4-FFF2-40B4-BE49-F238E27FC236}">
+                <a16:creationId xmlns:a16="http://schemas.microsoft.com/office/drawing/2014/main" id="{1B8E735F-BA89-45D2-74E8-CD4853065393}"/>
+              </a:ext>
+            </a:extLst>
+          </p:cNvPr>
+          <p:cNvSpPr>
+            <a:spLocks noGrp="1"/>
+          </p:cNvSpPr>
+          <p:nvPr>
+            <p:ph idx="1"/>
+          </p:nvPr>
+        </p:nvSpPr>
+        <p:spPr/>
+        <p:txBody>
+          <a:bodyPr>
+            <a:normAutofit/>
+          </a:bodyPr>
+          <a:lstStyle/>
+          <a:p>
+            <a:pPr marL="0" indent="0">
+              <a:buNone/>
+            </a:pPr>
+            <a:r>
+              <a:rPr lang="en-GB" sz="2400" dirty="0"/>
+              <a:t>SpeciesViewer is a Python application that </a:t>
+            </a:r>
+          </a:p>
+          <a:p>
+            <a:pPr marL="457200" indent="-457200">
+              <a:buAutoNum type="arabicParenBoth"/>
+            </a:pPr>
+            <a:r>
+              <a:rPr lang="en-GB" sz="2400" dirty="0"/>
+              <a:t>That organizes pictures that show “life” by species, families etc</a:t>
+            </a:r>
+          </a:p>
+          <a:p>
+            <a:pPr marL="457200" lvl="1" indent="0">
+              <a:buNone/>
+            </a:pPr>
+            <a:r>
+              <a:rPr lang="en-GB" sz="2000" dirty="0"/>
+              <a:t>The user is expected to specify the </a:t>
+            </a:r>
+            <a:r>
+              <a:rPr lang="en-GB" sz="2000" b="1" dirty="0"/>
+              <a:t>species name </a:t>
+            </a:r>
+            <a:r>
+              <a:rPr lang="en-GB" sz="2000" dirty="0"/>
+              <a:t>in a keyword meta file to enables this.</a:t>
+            </a:r>
+            <a:endParaRPr lang="en-GB" sz="2400" dirty="0"/>
+          </a:p>
+          <a:p>
+            <a:pPr marL="457200" indent="-457200">
+              <a:buAutoNum type="arabicParenBoth"/>
+            </a:pPr>
+            <a:r>
+              <a:rPr lang="en-GB" sz="2400" dirty="0"/>
+              <a:t>That creates and maintains a website</a:t>
+            </a:r>
+          </a:p>
+          <a:p>
+            <a:pPr lvl="1"/>
+            <a:r>
+              <a:rPr lang="en-GB" sz="2000" dirty="0"/>
+              <a:t>The website is organized by </a:t>
+            </a:r>
+            <a:r>
+              <a:rPr lang="en-GB" sz="2000" b="1" dirty="0"/>
+              <a:t>species hierarchy.  </a:t>
+            </a:r>
+            <a:r>
+              <a:rPr lang="en-GB" sz="2000" dirty="0"/>
+              <a:t>That means similar species such as different gulls are grouped, birds are part of animals etc.</a:t>
+            </a:r>
+          </a:p>
+          <a:p>
+            <a:pPr lvl="1"/>
+            <a:r>
+              <a:rPr lang="en-GB" sz="2000" dirty="0"/>
+              <a:t>The website is designed to add species based on </a:t>
+            </a:r>
+            <a:r>
+              <a:rPr lang="en-GB" sz="2000" b="1" dirty="0"/>
+              <a:t>trips</a:t>
+            </a:r>
+            <a:r>
+              <a:rPr lang="en-GB" sz="2000" dirty="0"/>
+              <a:t>, and creates a daily picture-blog within a trip.</a:t>
+            </a:r>
+          </a:p>
+          <a:p>
+            <a:pPr marL="0" indent="0">
+              <a:buNone/>
+            </a:pPr>
+            <a:r>
+              <a:rPr lang="en-GB" sz="2400" dirty="0"/>
+              <a:t>The SpeciesViewer is actively being developed, to fix bugs and make the website easier to use.</a:t>
+            </a:r>
+            <a:endParaRPr lang="en-GB" sz="2400" b="1" dirty="0"/>
+          </a:p>
+          <a:p>
+            <a:pPr marL="0" indent="0">
+              <a:buNone/>
+            </a:pPr>
+            <a:r>
+              <a:rPr lang="en-GB" sz="2400" dirty="0"/>
+              <a:t>The remainder of this PPT describes how to use it.  It is not user friendly.</a:t>
+            </a:r>
+          </a:p>
+          <a:p>
+            <a:pPr marL="457200" indent="-457200">
+              <a:buAutoNum type="arabicParenBoth"/>
+            </a:pPr>
+            <a:endParaRPr lang="en-GB" sz="2400" dirty="0"/>
+          </a:p>
+          <a:p>
+            <a:pPr marL="0" indent="0">
+              <a:buNone/>
+            </a:pPr>
+            <a:endParaRPr lang="en-GB" sz="2400" dirty="0"/>
+          </a:p>
+        </p:txBody>
+      </p:sp>
+    </p:spTree>
+    <p:extLst>
+      <p:ext uri="{BB962C8B-B14F-4D97-AF65-F5344CB8AC3E}">
+        <p14:creationId xmlns:p14="http://schemas.microsoft.com/office/powerpoint/2010/main" val="2097216940"/>
+      </p:ext>
+    </p:extLst>
+  </p:cSld>
+  <p:clrMapOvr>
+    <a:masterClrMapping/>
+  </p:clrMapOvr>
+</p:sld>
+</file>
+
+<file path=ppt/slides/slide15.xml><?xml version="1.0" encoding="utf-8"?>
+<p:sld xmlns:a="http://schemas.openxmlformats.org/drawingml/2006/main" xmlns:r="http://schemas.openxmlformats.org/officeDocument/2006/relationships" xmlns:p="http://schemas.openxmlformats.org/presentationml/2006/main">
+  <p:cSld>
+    <p:spTree>
+      <p:nvGrpSpPr>
+        <p:cNvPr id="1" name="">
+          <a:extLst>
+            <a:ext uri="{FF2B5EF4-FFF2-40B4-BE49-F238E27FC236}">
+              <a16:creationId xmlns:a16="http://schemas.microsoft.com/office/drawing/2014/main" id="{58E626E0-8EFF-8B31-239B-34F76FE4A0AB}"/>
+            </a:ext>
+          </a:extLst>
+        </p:cNvPr>
+        <p:cNvGrpSpPr/>
+        <p:nvPr/>
+      </p:nvGrpSpPr>
+      <p:grpSpPr>
+        <a:xfrm>
+          <a:off x="0" y="0"/>
+          <a:ext cx="0" cy="0"/>
+          <a:chOff x="0" y="0"/>
+          <a:chExt cx="0" cy="0"/>
+        </a:xfrm>
+      </p:grpSpPr>
+      <p:sp>
+        <p:nvSpPr>
+          <p:cNvPr id="2" name="Title 1">
+            <a:extLst>
+              <a:ext uri="{FF2B5EF4-FFF2-40B4-BE49-F238E27FC236}">
+                <a16:creationId xmlns:a16="http://schemas.microsoft.com/office/drawing/2014/main" id="{5780F314-681B-6428-05B3-0BCBA4964A2F}"/>
+              </a:ext>
+            </a:extLst>
+          </p:cNvPr>
+          <p:cNvSpPr>
+            <a:spLocks noGrp="1"/>
+          </p:cNvSpPr>
+          <p:nvPr>
+            <p:ph type="title"/>
+          </p:nvPr>
+        </p:nvSpPr>
+        <p:spPr>
+          <a:xfrm>
+            <a:off x="526211" y="365125"/>
+            <a:ext cx="11205714" cy="1325563"/>
+          </a:xfrm>
+        </p:spPr>
+        <p:txBody>
+          <a:bodyPr/>
+          <a:lstStyle/>
+          <a:p>
+            <a:r>
+              <a:rPr lang="en-GB" dirty="0"/>
+              <a:t>SpeciesViewer terms and background</a:t>
+            </a:r>
+            <a:endParaRPr lang="nl-NL" dirty="0"/>
+          </a:p>
+        </p:txBody>
+      </p:sp>
+      <p:sp>
+        <p:nvSpPr>
+          <p:cNvPr id="3" name="Content Placeholder 2">
+            <a:extLst>
+              <a:ext uri="{FF2B5EF4-FFF2-40B4-BE49-F238E27FC236}">
+                <a16:creationId xmlns:a16="http://schemas.microsoft.com/office/drawing/2014/main" id="{5D8E2594-A8D4-CFBC-0FF3-8CADA9A011E9}"/>
+              </a:ext>
+            </a:extLst>
+          </p:cNvPr>
+          <p:cNvSpPr>
+            <a:spLocks noGrp="1"/>
+          </p:cNvSpPr>
+          <p:nvPr>
+            <p:ph idx="1"/>
+          </p:nvPr>
+        </p:nvSpPr>
+        <p:spPr/>
+        <p:txBody>
+          <a:bodyPr>
+            <a:normAutofit/>
+          </a:bodyPr>
+          <a:lstStyle/>
+          <a:p>
+            <a:pPr marL="0" indent="0">
+              <a:buNone/>
+            </a:pPr>
+            <a:r>
+              <a:rPr lang="en-GB" sz="2400" dirty="0"/>
+              <a:t>Life means any plant, animal, fungi or other life that is categorized </a:t>
+            </a:r>
+            <a:br>
+              <a:rPr lang="en-GB" sz="2400" dirty="0"/>
+            </a:br>
+            <a:r>
+              <a:rPr lang="en-GB" sz="2400" dirty="0"/>
+              <a:t>in the </a:t>
+            </a:r>
+            <a:r>
+              <a:rPr lang="en-GB" sz="2400" b="1" dirty="0"/>
+              <a:t>biota</a:t>
+            </a:r>
+            <a:r>
+              <a:rPr lang="en-GB" sz="2400" dirty="0"/>
+              <a:t> biological hierarchy.</a:t>
+            </a:r>
+          </a:p>
+          <a:p>
+            <a:pPr marL="0" indent="0">
+              <a:buNone/>
+            </a:pPr>
+            <a:r>
+              <a:rPr lang="en-GB" sz="2400" dirty="0"/>
+              <a:t>The software will use the public domain GBIF to find the species name, and from there the family, order, class, phylum and kingdom.  A Python library handles the GBIF interface that SpeciesViewer uses.</a:t>
+            </a:r>
+          </a:p>
+          <a:p>
+            <a:pPr marL="0" indent="0">
+              <a:buNone/>
+            </a:pPr>
+            <a:r>
+              <a:rPr lang="en-GB" sz="2400" dirty="0"/>
+              <a:t>GBIF—the Global Biodiversity Information Facility—is an international network and data infrastructure funded by the world's governments and aimed at providing anyone, anywhere, open access to data about all types of life on Earth.</a:t>
+            </a:r>
+          </a:p>
+          <a:p>
+            <a:pPr marL="0" indent="0">
+              <a:buNone/>
+            </a:pPr>
+            <a:r>
+              <a:rPr lang="en-GB" sz="2400" dirty="0"/>
+              <a:t>Typical scenarios</a:t>
+            </a:r>
+          </a:p>
+        </p:txBody>
+      </p:sp>
+    </p:spTree>
+    <p:extLst>
+      <p:ext uri="{BB962C8B-B14F-4D97-AF65-F5344CB8AC3E}">
+        <p14:creationId xmlns:p14="http://schemas.microsoft.com/office/powerpoint/2010/main" val="2247104074"/>
+      </p:ext>
+    </p:extLst>
+  </p:cSld>
+  <p:clrMapOvr>
+    <a:masterClrMapping/>
+  </p:clrMapOvr>
+</p:sld>
+</file>
+
+<file path=ppt/slides/slide16.xml><?xml version="1.0" encoding="utf-8"?>
+<p:sld xmlns:a="http://schemas.openxmlformats.org/drawingml/2006/main" xmlns:r="http://schemas.openxmlformats.org/officeDocument/2006/relationships" xmlns:p="http://schemas.openxmlformats.org/presentationml/2006/main">
+  <p:cSld>
+    <p:spTree>
+      <p:nvGrpSpPr>
+        <p:cNvPr id="1" name="">
+          <a:extLst>
+            <a:ext uri="{FF2B5EF4-FFF2-40B4-BE49-F238E27FC236}">
+              <a16:creationId xmlns:a16="http://schemas.microsoft.com/office/drawing/2014/main" id="{4478A65D-CB8C-21F9-1CA2-CC9594C9FC73}"/>
+            </a:ext>
+          </a:extLst>
+        </p:cNvPr>
+        <p:cNvGrpSpPr/>
+        <p:nvPr/>
+      </p:nvGrpSpPr>
+      <p:grpSpPr>
+        <a:xfrm>
+          <a:off x="0" y="0"/>
+          <a:ext cx="0" cy="0"/>
+          <a:chOff x="0" y="0"/>
+          <a:chExt cx="0" cy="0"/>
+        </a:xfrm>
+      </p:grpSpPr>
+      <p:sp>
+        <p:nvSpPr>
+          <p:cNvPr id="2" name="Title 1">
+            <a:extLst>
+              <a:ext uri="{FF2B5EF4-FFF2-40B4-BE49-F238E27FC236}">
+                <a16:creationId xmlns:a16="http://schemas.microsoft.com/office/drawing/2014/main" id="{EA107A9A-411E-BFD1-8B8D-63C11CFB3F02}"/>
+              </a:ext>
+            </a:extLst>
+          </p:cNvPr>
+          <p:cNvSpPr>
+            <a:spLocks noGrp="1"/>
+          </p:cNvSpPr>
+          <p:nvPr>
+            <p:ph type="title"/>
+          </p:nvPr>
+        </p:nvSpPr>
+        <p:spPr>
+          <a:xfrm>
+            <a:off x="526211" y="365125"/>
+            <a:ext cx="11205714" cy="1325563"/>
+          </a:xfrm>
+        </p:spPr>
+        <p:txBody>
+          <a:bodyPr/>
+          <a:lstStyle/>
+          <a:p>
+            <a:r>
+              <a:rPr lang="en-GB" dirty="0"/>
+              <a:t>Typical scenarios - </a:t>
+            </a:r>
+            <a:endParaRPr lang="nl-NL" dirty="0"/>
+          </a:p>
+        </p:txBody>
+      </p:sp>
+      <p:sp>
+        <p:nvSpPr>
+          <p:cNvPr id="3" name="Content Placeholder 2">
+            <a:extLst>
+              <a:ext uri="{FF2B5EF4-FFF2-40B4-BE49-F238E27FC236}">
+                <a16:creationId xmlns:a16="http://schemas.microsoft.com/office/drawing/2014/main" id="{F318CE16-B5CC-8D74-F0DD-8A3909FC56F8}"/>
+              </a:ext>
+            </a:extLst>
+          </p:cNvPr>
+          <p:cNvSpPr>
+            <a:spLocks noGrp="1"/>
+          </p:cNvSpPr>
+          <p:nvPr>
+            <p:ph idx="1"/>
+          </p:nvPr>
+        </p:nvSpPr>
+        <p:spPr/>
+        <p:txBody>
+          <a:bodyPr>
+            <a:normAutofit lnSpcReduction="10000"/>
+          </a:bodyPr>
+          <a:lstStyle/>
+          <a:p>
+            <a:pPr marL="0" indent="0">
+              <a:buNone/>
+            </a:pPr>
+            <a:r>
+              <a:rPr lang="en-GB" sz="2400" dirty="0"/>
+              <a:t>All work is done around </a:t>
+            </a:r>
+            <a:r>
+              <a:rPr lang="en-GB" sz="2400" b="1" dirty="0"/>
+              <a:t>trips</a:t>
+            </a:r>
+          </a:p>
+          <a:p>
+            <a:pPr marL="457200" indent="-457200">
+              <a:buFont typeface="+mj-lt"/>
+              <a:buAutoNum type="arabicPeriod"/>
+            </a:pPr>
+            <a:r>
+              <a:rPr lang="en-GB" sz="2400" dirty="0"/>
+              <a:t>First create a trip (sv1MakeReports)</a:t>
+            </a:r>
+          </a:p>
+          <a:p>
+            <a:pPr marL="457200" indent="-457200">
+              <a:buFont typeface="+mj-lt"/>
+              <a:buAutoNum type="arabicPeriod"/>
+            </a:pPr>
+            <a:r>
+              <a:rPr lang="en-GB" sz="2400" dirty="0"/>
+              <a:t>Read the files in a day directory (sv2ReadDirExif), and create a file </a:t>
+            </a:r>
+          </a:p>
+          <a:p>
+            <a:pPr marL="457200" indent="-457200">
+              <a:buFont typeface="+mj-lt"/>
+              <a:buAutoNum type="arabicPeriod"/>
+            </a:pPr>
+            <a:r>
+              <a:rPr lang="en-GB" sz="2400" dirty="0"/>
+              <a:t>Verify the species information (sv3WritePictures), and create picture metafiles</a:t>
+            </a:r>
+          </a:p>
+          <a:p>
+            <a:pPr marL="457200" indent="-457200">
+              <a:buFont typeface="+mj-lt"/>
+              <a:buAutoNum type="arabicPeriod"/>
+            </a:pPr>
+            <a:r>
+              <a:rPr lang="en-GB" sz="2400" dirty="0"/>
+              <a:t>Repeat steps and 3 until there are no errors left</a:t>
+            </a:r>
+          </a:p>
+          <a:p>
+            <a:pPr marL="457200" indent="-457200">
+              <a:buFont typeface="+mj-lt"/>
+              <a:buAutoNum type="arabicPeriod"/>
+            </a:pPr>
+            <a:r>
+              <a:rPr lang="en-GB" sz="2400" dirty="0"/>
+              <a:t>Create a blog (sv4WriteBlog), with the best pictures for each species</a:t>
+            </a:r>
+          </a:p>
+          <a:p>
+            <a:pPr marL="0" indent="0">
+              <a:buNone/>
+            </a:pPr>
+            <a:r>
+              <a:rPr lang="en-GB" sz="2400" dirty="0"/>
+              <a:t>Do steps 2-5 for each day in the trip.</a:t>
+            </a:r>
+          </a:p>
+          <a:p>
+            <a:pPr marL="457200" indent="-457200">
+              <a:buFont typeface="+mj-lt"/>
+              <a:buAutoNum type="arabicPeriod" startAt="6"/>
+            </a:pPr>
+            <a:r>
+              <a:rPr lang="en-GB" sz="2400" dirty="0"/>
+              <a:t>Add a pictures for each species in the trip (sv5, sv6 and sv7)</a:t>
+            </a:r>
+          </a:p>
+          <a:p>
+            <a:pPr marL="457200" indent="-457200">
+              <a:buFont typeface="+mj-lt"/>
+              <a:buAutoNum type="arabicPeriod" startAt="6"/>
+            </a:pPr>
+            <a:r>
+              <a:rPr lang="en-GB" sz="2400" dirty="0"/>
+              <a:t>Note once steps sv5-sv7 are done, no more changes are possible</a:t>
+            </a:r>
+          </a:p>
+          <a:p>
+            <a:pPr marL="457200" indent="-457200">
+              <a:buFont typeface="+mj-lt"/>
+              <a:buAutoNum type="arabicPeriod" startAt="6"/>
+            </a:pPr>
+            <a:endParaRPr lang="en-GB" sz="2000" dirty="0"/>
+          </a:p>
+        </p:txBody>
+      </p:sp>
+    </p:spTree>
+    <p:extLst>
+      <p:ext uri="{BB962C8B-B14F-4D97-AF65-F5344CB8AC3E}">
+        <p14:creationId xmlns:p14="http://schemas.microsoft.com/office/powerpoint/2010/main" val="822623866"/>
+      </p:ext>
+    </p:extLst>
+  </p:cSld>
+  <p:clrMapOvr>
+    <a:masterClrMapping/>
+  </p:clrMapOvr>
+</p:sld>
+</file>
+
+<file path=ppt/slides/slide17.xml><?xml version="1.0" encoding="utf-8"?>
+<p:sld xmlns:a="http://schemas.openxmlformats.org/drawingml/2006/main" xmlns:r="http://schemas.openxmlformats.org/officeDocument/2006/relationships" xmlns:p="http://schemas.openxmlformats.org/presentationml/2006/main">
+  <p:cSld>
+    <p:spTree>
+      <p:nvGrpSpPr>
+        <p:cNvPr id="1" name=""/>
+        <p:cNvGrpSpPr/>
+        <p:nvPr/>
+      </p:nvGrpSpPr>
+      <p:grpSpPr>
+        <a:xfrm>
+          <a:off x="0" y="0"/>
+          <a:ext cx="0" cy="0"/>
+          <a:chOff x="0" y="0"/>
+          <a:chExt cx="0" cy="0"/>
+        </a:xfrm>
+      </p:grpSpPr>
+      <p:graphicFrame>
+        <p:nvGraphicFramePr>
+          <p:cNvPr id="4" name="Content Placeholder 3">
+            <a:extLst>
+              <a:ext uri="{FF2B5EF4-FFF2-40B4-BE49-F238E27FC236}">
+                <a16:creationId xmlns:a16="http://schemas.microsoft.com/office/drawing/2014/main" id="{C0E71C7F-F767-0336-6436-4FECD5351309}"/>
+              </a:ext>
+            </a:extLst>
+          </p:cNvPr>
+          <p:cNvGraphicFramePr>
+            <a:graphicFrameLocks noGrp="1"/>
+          </p:cNvGraphicFramePr>
+          <p:nvPr>
+            <p:ph idx="1"/>
+            <p:extLst>
+              <p:ext uri="{D42A27DB-BD31-4B8C-83A1-F6EECF244321}">
+                <p14:modId xmlns:p14="http://schemas.microsoft.com/office/powerpoint/2010/main" val="849821777"/>
+              </p:ext>
+            </p:extLst>
+          </p:nvPr>
+        </p:nvGraphicFramePr>
+        <p:xfrm>
+          <a:off x="342900" y="868680"/>
+          <a:ext cx="11064240" cy="5227320"/>
+        </p:xfrm>
+        <a:graphic>
+          <a:graphicData uri="http://schemas.openxmlformats.org/drawingml/2006/table">
+            <a:tbl>
+              <a:tblPr firstRow="1" bandRow="1">
+                <a:tableStyleId>{5C22544A-7EE6-4342-B048-85BDC9FD1C3A}</a:tableStyleId>
+              </a:tblPr>
+              <a:tblGrid>
+                <a:gridCol w="2899131">
+                  <a:extLst>
+                    <a:ext uri="{9D8B030D-6E8A-4147-A177-3AD203B41FA5}">
+                      <a16:colId xmlns:a16="http://schemas.microsoft.com/office/drawing/2014/main" val="2840247616"/>
+                    </a:ext>
+                  </a:extLst>
+                </a:gridCol>
+                <a:gridCol w="1276629">
+                  <a:extLst>
+                    <a:ext uri="{9D8B030D-6E8A-4147-A177-3AD203B41FA5}">
+                      <a16:colId xmlns:a16="http://schemas.microsoft.com/office/drawing/2014/main" val="3158828686"/>
+                    </a:ext>
+                  </a:extLst>
+                </a:gridCol>
+                <a:gridCol w="1036320">
+                  <a:extLst>
+                    <a:ext uri="{9D8B030D-6E8A-4147-A177-3AD203B41FA5}">
+                      <a16:colId xmlns:a16="http://schemas.microsoft.com/office/drawing/2014/main" val="3723561695"/>
+                    </a:ext>
+                  </a:extLst>
+                </a:gridCol>
+                <a:gridCol w="5852160">
+                  <a:extLst>
+                    <a:ext uri="{9D8B030D-6E8A-4147-A177-3AD203B41FA5}">
+                      <a16:colId xmlns:a16="http://schemas.microsoft.com/office/drawing/2014/main" val="3936547858"/>
+                    </a:ext>
+                  </a:extLst>
+                </a:gridCol>
+              </a:tblGrid>
+              <a:tr h="370840">
+                <a:tc>
+                  <a:txBody>
+                    <a:bodyPr/>
+                    <a:lstStyle/>
+                    <a:p>
+                      <a:r>
+                        <a:rPr lang="en-GB" dirty="0"/>
+                        <a:t>Utility</a:t>
+                      </a:r>
+                      <a:endParaRPr lang="nl-NL" dirty="0"/>
+                    </a:p>
+                  </a:txBody>
+                  <a:tcPr/>
+                </a:tc>
+                <a:tc>
+                  <a:txBody>
+                    <a:bodyPr/>
+                    <a:lstStyle/>
+                    <a:p>
+                      <a:r>
+                        <a:rPr lang="en-GB" dirty="0"/>
+                        <a:t>Works on </a:t>
+                      </a:r>
+                      <a:r>
+                        <a:rPr lang="en-GB" dirty="0" err="1"/>
+                        <a:t>ini</a:t>
+                      </a:r>
+                      <a:endParaRPr lang="nl-NL" dirty="0"/>
+                    </a:p>
+                  </a:txBody>
+                  <a:tcPr/>
+                </a:tc>
+                <a:tc>
+                  <a:txBody>
+                    <a:bodyPr/>
+                    <a:lstStyle/>
+                    <a:p>
+                      <a:r>
+                        <a:rPr lang="en-GB" dirty="0"/>
+                        <a:t>Needs edits?*</a:t>
+                      </a:r>
+                      <a:endParaRPr lang="nl-NL" dirty="0"/>
+                    </a:p>
+                  </a:txBody>
+                  <a:tcPr/>
+                </a:tc>
+                <a:tc>
+                  <a:txBody>
+                    <a:bodyPr/>
+                    <a:lstStyle/>
+                    <a:p>
+                      <a:r>
+                        <a:rPr lang="en-GB" dirty="0"/>
+                        <a:t>Purpose</a:t>
+                      </a:r>
+                      <a:endParaRPr lang="nl-NL" dirty="0"/>
+                    </a:p>
+                  </a:txBody>
+                  <a:tcPr/>
+                </a:tc>
+                <a:extLst>
+                  <a:ext uri="{0D108BD9-81ED-4DB2-BD59-A6C34878D82A}">
+                    <a16:rowId xmlns:a16="http://schemas.microsoft.com/office/drawing/2014/main" val="2249949909"/>
+                  </a:ext>
+                </a:extLst>
+              </a:tr>
+              <a:tr h="370840">
+                <a:tc>
+                  <a:txBody>
+                    <a:bodyPr/>
+                    <a:lstStyle/>
+                    <a:p>
+                      <a:r>
+                        <a:rPr lang="en-GB" dirty="0"/>
+                        <a:t>svr1AddSpecies</a:t>
+                      </a:r>
+                      <a:endParaRPr lang="nl-NL" dirty="0"/>
+                    </a:p>
+                  </a:txBody>
+                  <a:tcPr/>
+                </a:tc>
+                <a:tc>
+                  <a:txBody>
+                    <a:bodyPr/>
+                    <a:lstStyle/>
+                    <a:p>
+                      <a:r>
+                        <a:rPr lang="en-GB" dirty="0"/>
+                        <a:t>Both</a:t>
+                      </a:r>
+                      <a:endParaRPr lang="nl-NL" dirty="0"/>
+                    </a:p>
+                  </a:txBody>
+                  <a:tcPr/>
+                </a:tc>
+                <a:tc>
+                  <a:txBody>
+                    <a:bodyPr/>
+                    <a:lstStyle/>
+                    <a:p>
+                      <a:r>
+                        <a:rPr lang="en-GB" dirty="0"/>
+                        <a:t>No</a:t>
+                      </a:r>
+                      <a:endParaRPr lang="nl-NL" dirty="0"/>
+                    </a:p>
+                  </a:txBody>
+                  <a:tcPr/>
+                </a:tc>
+                <a:tc>
+                  <a:txBody>
+                    <a:bodyPr/>
+                    <a:lstStyle/>
+                    <a:p>
+                      <a:pPr marL="0" marR="0" lvl="0" indent="0" algn="l" defTabSz="914400" rtl="0" eaLnBrk="1" fontAlgn="auto" latinLnBrk="0" hangingPunct="1">
+                        <a:lnSpc>
+                          <a:spcPct val="100000"/>
+                        </a:lnSpc>
+                        <a:spcBef>
+                          <a:spcPts val="0"/>
+                        </a:spcBef>
+                        <a:spcAft>
+                          <a:spcPts val="0"/>
+                        </a:spcAft>
+                        <a:buClrTx/>
+                        <a:buSzTx/>
+                        <a:buFontTx/>
+                        <a:buNone/>
+                        <a:tabLst/>
+                        <a:defRPr/>
+                      </a:pPr>
+                      <a:r>
+                        <a:rPr lang="en-GB" dirty="0"/>
+                        <a:t>Helper.  Add species to </a:t>
+                      </a:r>
+                      <a:r>
+                        <a:rPr lang="nl-NL" sz="1800" b="0" kern="1200" dirty="0">
+                          <a:solidFill>
+                            <a:schemeClr val="dk1"/>
+                          </a:solidFill>
+                          <a:effectLst/>
+                          <a:latin typeface="+mn-lt"/>
+                          <a:ea typeface="+mn-ea"/>
+                          <a:cs typeface="+mn-cs"/>
+                        </a:rPr>
+                        <a:t>speciescollection.csv </a:t>
+                      </a:r>
+                      <a:r>
+                        <a:rPr lang="nl-NL" sz="1800" b="0" kern="1200" dirty="0" err="1">
+                          <a:solidFill>
+                            <a:schemeClr val="dk1"/>
+                          </a:solidFill>
+                          <a:effectLst/>
+                          <a:latin typeface="+mn-lt"/>
+                          <a:ea typeface="+mn-ea"/>
+                          <a:cs typeface="+mn-cs"/>
+                        </a:rPr>
+                        <a:t>based</a:t>
+                      </a:r>
+                      <a:r>
+                        <a:rPr lang="nl-NL" sz="1800" b="0" kern="1200" dirty="0">
+                          <a:solidFill>
+                            <a:schemeClr val="dk1"/>
+                          </a:solidFill>
+                          <a:effectLst/>
+                          <a:latin typeface="+mn-lt"/>
+                          <a:ea typeface="+mn-ea"/>
+                          <a:cs typeface="+mn-cs"/>
+                        </a:rPr>
+                        <a:t> on list in </a:t>
+                      </a:r>
+                      <a:r>
+                        <a:rPr lang="nl-NL" sz="1800" b="0" kern="1200" dirty="0" err="1">
+                          <a:solidFill>
+                            <a:schemeClr val="dk1"/>
+                          </a:solidFill>
+                          <a:effectLst/>
+                          <a:latin typeface="+mn-lt"/>
+                          <a:ea typeface="+mn-ea"/>
+                          <a:cs typeface="+mn-cs"/>
+                        </a:rPr>
+                        <a:t>admin</a:t>
+                      </a:r>
+                      <a:r>
+                        <a:rPr lang="nl-NL" sz="1800" b="0" kern="1200" dirty="0">
+                          <a:solidFill>
+                            <a:schemeClr val="dk1"/>
+                          </a:solidFill>
+                          <a:effectLst/>
+                          <a:latin typeface="+mn-lt"/>
+                          <a:ea typeface="+mn-ea"/>
+                          <a:cs typeface="+mn-cs"/>
+                        </a:rPr>
+                        <a:t>/speclist.csv</a:t>
+                      </a:r>
+                    </a:p>
+                  </a:txBody>
+                  <a:tcPr/>
+                </a:tc>
+                <a:extLst>
+                  <a:ext uri="{0D108BD9-81ED-4DB2-BD59-A6C34878D82A}">
+                    <a16:rowId xmlns:a16="http://schemas.microsoft.com/office/drawing/2014/main" val="1354462080"/>
+                  </a:ext>
+                </a:extLst>
+              </a:tr>
+              <a:tr h="370840">
+                <a:tc>
+                  <a:txBody>
+                    <a:bodyPr/>
+                    <a:lstStyle/>
+                    <a:p>
+                      <a:r>
+                        <a:rPr lang="en-GB" dirty="0"/>
+                        <a:t>svr2CountSpecies</a:t>
+                      </a:r>
+                      <a:endParaRPr lang="nl-NL" dirty="0"/>
+                    </a:p>
+                  </a:txBody>
+                  <a:tcPr/>
+                </a:tc>
+                <a:tc>
+                  <a:txBody>
+                    <a:bodyPr/>
+                    <a:lstStyle/>
+                    <a:p>
+                      <a:r>
+                        <a:rPr lang="en-GB" dirty="0"/>
+                        <a:t>Trip</a:t>
+                      </a:r>
+                      <a:endParaRPr lang="nl-NL" dirty="0"/>
+                    </a:p>
+                  </a:txBody>
+                  <a:tcPr/>
+                </a:tc>
+                <a:tc>
+                  <a:txBody>
+                    <a:bodyPr/>
+                    <a:lstStyle/>
+                    <a:p>
+                      <a:r>
+                        <a:rPr lang="en-GB" dirty="0"/>
+                        <a:t>No</a:t>
+                      </a:r>
+                      <a:endParaRPr lang="nl-NL" dirty="0"/>
+                    </a:p>
+                  </a:txBody>
+                  <a:tcPr/>
+                </a:tc>
+                <a:tc>
+                  <a:txBody>
+                    <a:bodyPr/>
+                    <a:lstStyle/>
+                    <a:p>
+                      <a:r>
+                        <a:rPr lang="en-GB" dirty="0"/>
+                        <a:t>Stats. Count the number of new species</a:t>
+                      </a:r>
+                      <a:endParaRPr lang="nl-NL" dirty="0"/>
+                    </a:p>
+                  </a:txBody>
+                  <a:tcPr/>
+                </a:tc>
+                <a:extLst>
+                  <a:ext uri="{0D108BD9-81ED-4DB2-BD59-A6C34878D82A}">
+                    <a16:rowId xmlns:a16="http://schemas.microsoft.com/office/drawing/2014/main" val="2019498000"/>
+                  </a:ext>
+                </a:extLst>
+              </a:tr>
+              <a:tr h="370840">
+                <a:tc>
+                  <a:txBody>
+                    <a:bodyPr/>
+                    <a:lstStyle/>
+                    <a:p>
+                      <a:r>
+                        <a:rPr lang="en-GB" dirty="0"/>
+                        <a:t>svr3StatusProjects</a:t>
+                      </a:r>
+                      <a:endParaRPr lang="nl-NL" dirty="0"/>
+                    </a:p>
+                  </a:txBody>
+                  <a:tcPr/>
+                </a:tc>
+                <a:tc>
+                  <a:txBody>
+                    <a:bodyPr/>
+                    <a:lstStyle/>
+                    <a:p>
+                      <a:r>
+                        <a:rPr lang="en-GB" dirty="0"/>
+                        <a:t>Trip</a:t>
+                      </a:r>
+                      <a:endParaRPr lang="nl-NL" dirty="0"/>
+                    </a:p>
+                  </a:txBody>
+                  <a:tcPr/>
+                </a:tc>
+                <a:tc>
+                  <a:txBody>
+                    <a:bodyPr/>
+                    <a:lstStyle/>
+                    <a:p>
+                      <a:r>
+                        <a:rPr lang="en-GB" dirty="0"/>
+                        <a:t>No</a:t>
+                      </a:r>
+                      <a:endParaRPr lang="nl-NL" dirty="0"/>
+                    </a:p>
+                  </a:txBody>
+                  <a:tcPr/>
+                </a:tc>
+                <a:tc>
+                  <a:txBody>
+                    <a:bodyPr/>
+                    <a:lstStyle/>
+                    <a:p>
+                      <a:r>
+                        <a:rPr lang="en-GB" dirty="0"/>
+                        <a:t>Stats. Report project steps that are run for trip</a:t>
+                      </a:r>
+                      <a:endParaRPr lang="nl-NL" dirty="0"/>
+                    </a:p>
+                  </a:txBody>
+                  <a:tcPr/>
+                </a:tc>
+                <a:extLst>
+                  <a:ext uri="{0D108BD9-81ED-4DB2-BD59-A6C34878D82A}">
+                    <a16:rowId xmlns:a16="http://schemas.microsoft.com/office/drawing/2014/main" val="253633987"/>
+                  </a:ext>
+                </a:extLst>
+              </a:tr>
+              <a:tr h="370840">
+                <a:tc>
+                  <a:txBody>
+                    <a:bodyPr/>
+                    <a:lstStyle/>
+                    <a:p>
+                      <a:r>
+                        <a:rPr lang="en-GB" dirty="0"/>
+                        <a:t>svr4UpdateTrips</a:t>
+                      </a:r>
+                      <a:endParaRPr lang="nl-NL" dirty="0"/>
+                    </a:p>
+                  </a:txBody>
+                  <a:tcPr/>
+                </a:tc>
+                <a:tc>
+                  <a:txBody>
+                    <a:bodyPr/>
+                    <a:lstStyle/>
+                    <a:p>
+                      <a:r>
+                        <a:rPr lang="en-GB" dirty="0"/>
+                        <a:t>Trip</a:t>
+                      </a:r>
+                      <a:endParaRPr lang="nl-NL" dirty="0"/>
+                    </a:p>
+                  </a:txBody>
+                  <a:tcPr/>
+                </a:tc>
+                <a:tc>
+                  <a:txBody>
+                    <a:bodyPr/>
+                    <a:lstStyle/>
+                    <a:p>
+                      <a:r>
+                        <a:rPr lang="en-GB" dirty="0"/>
+                        <a:t>trip.ini</a:t>
+                      </a:r>
+                      <a:endParaRPr lang="nl-NL" dirty="0"/>
+                    </a:p>
+                  </a:txBody>
+                  <a:tcPr/>
+                </a:tc>
+                <a:tc>
+                  <a:txBody>
+                    <a:bodyPr/>
+                    <a:lstStyle/>
+                    <a:p>
+                      <a:r>
+                        <a:rPr lang="en-GB" dirty="0"/>
+                        <a:t>Needed for each trip. Update the metadata for trip and update website.  </a:t>
+                      </a:r>
+                      <a:endParaRPr lang="nl-NL" dirty="0"/>
+                    </a:p>
+                  </a:txBody>
+                  <a:tcPr/>
+                </a:tc>
+                <a:extLst>
+                  <a:ext uri="{0D108BD9-81ED-4DB2-BD59-A6C34878D82A}">
+                    <a16:rowId xmlns:a16="http://schemas.microsoft.com/office/drawing/2014/main" val="775449291"/>
+                  </a:ext>
+                </a:extLst>
+              </a:tr>
+              <a:tr h="370840">
+                <a:tc>
+                  <a:txBody>
+                    <a:bodyPr/>
+                    <a:lstStyle/>
+                    <a:p>
+                      <a:r>
+                        <a:rPr lang="en-GB" dirty="0"/>
+                        <a:t>svr41AddTrip</a:t>
+                      </a:r>
+                      <a:endParaRPr lang="nl-NL" dirty="0"/>
+                    </a:p>
+                  </a:txBody>
+                  <a:tcPr/>
+                </a:tc>
+                <a:tc>
+                  <a:txBody>
+                    <a:bodyPr/>
+                    <a:lstStyle/>
+                    <a:p>
+                      <a:r>
+                        <a:rPr lang="en-GB" dirty="0"/>
+                        <a:t>Trip</a:t>
+                      </a:r>
+                      <a:endParaRPr lang="nl-NL" dirty="0"/>
+                    </a:p>
+                  </a:txBody>
+                  <a:tcPr/>
+                </a:tc>
+                <a:tc>
+                  <a:txBody>
+                    <a:bodyPr/>
+                    <a:lstStyle/>
+                    <a:p>
+                      <a:endParaRPr lang="nl-NL" dirty="0"/>
+                    </a:p>
+                  </a:txBody>
+                  <a:tcPr/>
+                </a:tc>
+                <a:tc>
+                  <a:txBody>
+                    <a:bodyPr/>
+                    <a:lstStyle/>
+                    <a:p>
+                      <a:r>
+                        <a:rPr lang="en-GB" dirty="0"/>
+                        <a:t>Will add a trip to the master</a:t>
+                      </a:r>
+                      <a:endParaRPr lang="nl-NL" dirty="0"/>
+                    </a:p>
+                  </a:txBody>
+                  <a:tcPr/>
+                </a:tc>
+                <a:extLst>
+                  <a:ext uri="{0D108BD9-81ED-4DB2-BD59-A6C34878D82A}">
+                    <a16:rowId xmlns:a16="http://schemas.microsoft.com/office/drawing/2014/main" val="518195207"/>
+                  </a:ext>
+                </a:extLst>
+              </a:tr>
+              <a:tr h="370840">
+                <a:tc>
+                  <a:txBody>
+                    <a:bodyPr/>
+                    <a:lstStyle/>
+                    <a:p>
+                      <a:r>
+                        <a:rPr lang="nl-NL" dirty="0"/>
+                        <a:t>svr5MergeSpecies</a:t>
+                      </a:r>
+                      <a:br>
+                        <a:rPr lang="nl-NL" dirty="0"/>
+                      </a:br>
+                      <a:r>
+                        <a:rPr lang="nl-NL" dirty="0" err="1"/>
+                        <a:t>Collections</a:t>
+                      </a:r>
+                      <a:endParaRPr lang="nl-NL" dirty="0"/>
+                    </a:p>
+                  </a:txBody>
+                  <a:tcPr/>
+                </a:tc>
+                <a:tc>
+                  <a:txBody>
+                    <a:bodyPr/>
+                    <a:lstStyle/>
+                    <a:p>
+                      <a:r>
+                        <a:rPr lang="en-GB" dirty="0"/>
+                        <a:t>Trip</a:t>
+                      </a:r>
+                      <a:endParaRPr lang="nl-NL" dirty="0"/>
+                    </a:p>
+                  </a:txBody>
+                  <a:tcPr/>
+                </a:tc>
+                <a:tc>
+                  <a:txBody>
+                    <a:bodyPr/>
+                    <a:lstStyle/>
+                    <a:p>
+                      <a:r>
+                        <a:rPr lang="en-GB" dirty="0"/>
+                        <a:t>No</a:t>
+                      </a:r>
+                      <a:endParaRPr lang="nl-NL" dirty="0"/>
+                    </a:p>
+                  </a:txBody>
+                  <a:tcPr/>
+                </a:tc>
+                <a:tc>
+                  <a:txBody>
+                    <a:bodyPr/>
+                    <a:lstStyle/>
+                    <a:p>
+                      <a:r>
+                        <a:rPr lang="en-GB" dirty="0"/>
+                        <a:t>Needed for </a:t>
+                      </a:r>
+                      <a:r>
+                        <a:rPr lang="en-GB"/>
+                        <a:t>new English/</a:t>
+                      </a:r>
+                      <a:r>
+                        <a:rPr lang="en-GB" dirty="0"/>
+                        <a:t>Dutch names.  Merge the species from 2 lists, </a:t>
+                      </a:r>
+                      <a:r>
+                        <a:rPr lang="en-GB" dirty="0" err="1"/>
+                        <a:t>eg</a:t>
+                      </a:r>
+                      <a:r>
+                        <a:rPr lang="en-GB" dirty="0"/>
+                        <a:t> master and trip</a:t>
+                      </a:r>
+                      <a:endParaRPr lang="nl-NL" dirty="0"/>
+                    </a:p>
+                  </a:txBody>
+                  <a:tcPr/>
+                </a:tc>
+                <a:extLst>
+                  <a:ext uri="{0D108BD9-81ED-4DB2-BD59-A6C34878D82A}">
+                    <a16:rowId xmlns:a16="http://schemas.microsoft.com/office/drawing/2014/main" val="466339600"/>
+                  </a:ext>
+                </a:extLst>
+              </a:tr>
+              <a:tr h="370840">
+                <a:tc>
+                  <a:txBody>
+                    <a:bodyPr/>
+                    <a:lstStyle/>
+                    <a:p>
+                      <a:r>
+                        <a:rPr lang="nl-NL" dirty="0"/>
+                        <a:t>svr6MergeBlogsForMaster</a:t>
+                      </a:r>
+                    </a:p>
+                  </a:txBody>
+                  <a:tcPr/>
+                </a:tc>
+                <a:tc>
+                  <a:txBody>
+                    <a:bodyPr/>
+                    <a:lstStyle/>
+                    <a:p>
+                      <a:r>
+                        <a:rPr lang="en-GB" dirty="0"/>
+                        <a:t>Master</a:t>
+                      </a:r>
+                      <a:endParaRPr lang="nl-NL" dirty="0"/>
+                    </a:p>
+                  </a:txBody>
+                  <a:tcPr/>
+                </a:tc>
+                <a:tc>
+                  <a:txBody>
+                    <a:bodyPr/>
+                    <a:lstStyle/>
+                    <a:p>
+                      <a:r>
+                        <a:rPr lang="en-GB" dirty="0"/>
+                        <a:t>No</a:t>
+                      </a:r>
+                      <a:endParaRPr lang="nl-NL" dirty="0"/>
+                    </a:p>
+                  </a:txBody>
+                  <a:tcPr/>
+                </a:tc>
+                <a:tc>
+                  <a:txBody>
+                    <a:bodyPr/>
+                    <a:lstStyle/>
+                    <a:p>
+                      <a:r>
+                        <a:rPr lang="en-GB" dirty="0"/>
+                        <a:t>Needs at least once for each trip, blog count update not automatic.  Create a different blog report for master, blogs per trips rather than all blogs</a:t>
+                      </a:r>
+                      <a:endParaRPr lang="nl-NL" dirty="0"/>
+                    </a:p>
+                  </a:txBody>
+                  <a:tcPr/>
+                </a:tc>
+                <a:extLst>
+                  <a:ext uri="{0D108BD9-81ED-4DB2-BD59-A6C34878D82A}">
+                    <a16:rowId xmlns:a16="http://schemas.microsoft.com/office/drawing/2014/main" val="1830438468"/>
+                  </a:ext>
+                </a:extLst>
+              </a:tr>
+              <a:tr h="370840">
+                <a:tc>
+                  <a:txBody>
+                    <a:bodyPr/>
+                    <a:lstStyle/>
+                    <a:p>
+                      <a:r>
+                        <a:rPr lang="en-GB" dirty="0"/>
+                        <a:t>svr7DeleteFiles</a:t>
+                      </a:r>
+                      <a:endParaRPr lang="nl-NL" dirty="0"/>
+                    </a:p>
+                  </a:txBody>
+                  <a:tcPr/>
+                </a:tc>
+                <a:tc>
+                  <a:txBody>
+                    <a:bodyPr/>
+                    <a:lstStyle/>
+                    <a:p>
+                      <a:r>
+                        <a:rPr lang="en-GB" dirty="0"/>
+                        <a:t>Both</a:t>
+                      </a:r>
+                      <a:endParaRPr lang="nl-NL" dirty="0"/>
+                    </a:p>
+                  </a:txBody>
+                  <a:tcPr/>
+                </a:tc>
+                <a:tc>
+                  <a:txBody>
+                    <a:bodyPr/>
+                    <a:lstStyle/>
+                    <a:p>
+                      <a:endParaRPr lang="nl-NL"/>
+                    </a:p>
+                  </a:txBody>
+                  <a:tcPr/>
+                </a:tc>
+                <a:tc>
+                  <a:txBody>
+                    <a:bodyPr/>
+                    <a:lstStyle/>
+                    <a:p>
+                      <a:r>
+                        <a:rPr lang="en-GB" dirty="0"/>
+                        <a:t>Clean duplicate files. (does not yet exist) Delete files that have been copied to master</a:t>
+                      </a:r>
+                      <a:endParaRPr lang="nl-NL" dirty="0"/>
+                    </a:p>
+                  </a:txBody>
+                  <a:tcPr/>
+                </a:tc>
+                <a:extLst>
+                  <a:ext uri="{0D108BD9-81ED-4DB2-BD59-A6C34878D82A}">
+                    <a16:rowId xmlns:a16="http://schemas.microsoft.com/office/drawing/2014/main" val="1080765452"/>
+                  </a:ext>
+                </a:extLst>
+              </a:tr>
+            </a:tbl>
+          </a:graphicData>
+        </a:graphic>
+      </p:graphicFrame>
+      <p:sp>
+        <p:nvSpPr>
+          <p:cNvPr id="5" name="TextBox 4">
+            <a:extLst>
+              <a:ext uri="{FF2B5EF4-FFF2-40B4-BE49-F238E27FC236}">
+                <a16:creationId xmlns:a16="http://schemas.microsoft.com/office/drawing/2014/main" id="{ABBCF386-00BA-C3FC-2471-8972B85A1A8E}"/>
+              </a:ext>
+            </a:extLst>
+          </p:cNvPr>
+          <p:cNvSpPr txBox="1"/>
+          <p:nvPr/>
+        </p:nvSpPr>
+        <p:spPr>
+          <a:xfrm>
+            <a:off x="342900" y="6112718"/>
+            <a:ext cx="11064240" cy="369332"/>
+          </a:xfrm>
+          <a:prstGeom prst="rect">
+            <a:avLst/>
+          </a:prstGeom>
+          <a:noFill/>
+        </p:spPr>
+        <p:txBody>
+          <a:bodyPr wrap="square" rtlCol="0">
+            <a:spAutoFit/>
+          </a:bodyPr>
+          <a:lstStyle/>
+          <a:p>
+            <a:r>
+              <a:rPr lang="en-GB" dirty="0"/>
+              <a:t>* /trips/ is fixed and assumed to the high level directory for trips, that are second level directories</a:t>
+            </a:r>
+            <a:endParaRPr lang="nl-NL" dirty="0"/>
+          </a:p>
+        </p:txBody>
+      </p:sp>
+      <p:sp>
+        <p:nvSpPr>
+          <p:cNvPr id="7" name="Title 6">
+            <a:extLst>
+              <a:ext uri="{FF2B5EF4-FFF2-40B4-BE49-F238E27FC236}">
+                <a16:creationId xmlns:a16="http://schemas.microsoft.com/office/drawing/2014/main" id="{5C2D0917-B20E-3BD3-E915-1DB1A543ECBD}"/>
+              </a:ext>
+            </a:extLst>
+          </p:cNvPr>
+          <p:cNvSpPr>
+            <a:spLocks noGrp="1"/>
+          </p:cNvSpPr>
+          <p:nvPr>
+            <p:ph type="title"/>
+          </p:nvPr>
+        </p:nvSpPr>
+        <p:spPr>
+          <a:xfrm>
+            <a:off x="617220" y="182245"/>
+            <a:ext cx="10515600" cy="686435"/>
+          </a:xfrm>
+        </p:spPr>
+        <p:txBody>
+          <a:bodyPr>
+            <a:normAutofit fontScale="90000"/>
+          </a:bodyPr>
+          <a:lstStyle/>
+          <a:p>
+            <a:r>
+              <a:rPr lang="en-GB" dirty="0"/>
+              <a:t>Utilities</a:t>
+            </a:r>
+            <a:endParaRPr lang="nl-NL" dirty="0"/>
+          </a:p>
+        </p:txBody>
+      </p:sp>
+    </p:spTree>
+    <p:extLst>
+      <p:ext uri="{BB962C8B-B14F-4D97-AF65-F5344CB8AC3E}">
+        <p14:creationId xmlns:p14="http://schemas.microsoft.com/office/powerpoint/2010/main" val="162882362"/>
+      </p:ext>
+    </p:extLst>
+  </p:cSld>
+  <p:clrMapOvr>
+    <a:masterClrMapping/>
+  </p:clrMapOvr>
+</p:sld>
+</file>
+
+<file path=ppt/slides/slide18.xml><?xml version="1.0" encoding="utf-8"?>
+<p:sld xmlns:a="http://schemas.openxmlformats.org/drawingml/2006/main" xmlns:r="http://schemas.openxmlformats.org/officeDocument/2006/relationships" xmlns:p="http://schemas.openxmlformats.org/presentationml/2006/main">
+  <p:cSld>
+    <p:spTree>
+      <p:nvGrpSpPr>
+        <p:cNvPr id="1" name="">
+          <a:extLst>
+            <a:ext uri="{FF2B5EF4-FFF2-40B4-BE49-F238E27FC236}">
+              <a16:creationId xmlns:a16="http://schemas.microsoft.com/office/drawing/2014/main" id="{84920A9A-D37A-76F4-B33E-22DBD8F228AC}"/>
+            </a:ext>
+          </a:extLst>
+        </p:cNvPr>
+        <p:cNvGrpSpPr/>
+        <p:nvPr/>
+      </p:nvGrpSpPr>
+      <p:grpSpPr>
+        <a:xfrm>
+          <a:off x="0" y="0"/>
+          <a:ext cx="0" cy="0"/>
+          <a:chOff x="0" y="0"/>
+          <a:chExt cx="0" cy="0"/>
+        </a:xfrm>
+      </p:grpSpPr>
+      <p:graphicFrame>
+        <p:nvGraphicFramePr>
+          <p:cNvPr id="4" name="Content Placeholder 3">
+            <a:extLst>
+              <a:ext uri="{FF2B5EF4-FFF2-40B4-BE49-F238E27FC236}">
+                <a16:creationId xmlns:a16="http://schemas.microsoft.com/office/drawing/2014/main" id="{EE121EF3-4FC2-BD98-94B5-24F3A01444C6}"/>
+              </a:ext>
+            </a:extLst>
+          </p:cNvPr>
+          <p:cNvGraphicFramePr>
+            <a:graphicFrameLocks noGrp="1"/>
+          </p:cNvGraphicFramePr>
+          <p:nvPr>
+            <p:ph idx="1"/>
+            <p:extLst>
+              <p:ext uri="{D42A27DB-BD31-4B8C-83A1-F6EECF244321}">
+                <p14:modId xmlns:p14="http://schemas.microsoft.com/office/powerpoint/2010/main" val="17791855"/>
+              </p:ext>
+            </p:extLst>
+          </p:nvPr>
+        </p:nvGraphicFramePr>
+        <p:xfrm>
+          <a:off x="617220" y="992108"/>
+          <a:ext cx="11090935" cy="2931160"/>
+        </p:xfrm>
+        <a:graphic>
+          <a:graphicData uri="http://schemas.openxmlformats.org/drawingml/2006/table">
+            <a:tbl>
+              <a:tblPr firstRow="1" bandRow="1">
+                <a:tableStyleId>{5C22544A-7EE6-4342-B048-85BDC9FD1C3A}</a:tableStyleId>
+              </a:tblPr>
+              <a:tblGrid>
+                <a:gridCol w="2925826">
+                  <a:extLst>
+                    <a:ext uri="{9D8B030D-6E8A-4147-A177-3AD203B41FA5}">
+                      <a16:colId xmlns:a16="http://schemas.microsoft.com/office/drawing/2014/main" val="2840247616"/>
+                    </a:ext>
+                  </a:extLst>
+                </a:gridCol>
+                <a:gridCol w="1276629">
+                  <a:extLst>
+                    <a:ext uri="{9D8B030D-6E8A-4147-A177-3AD203B41FA5}">
+                      <a16:colId xmlns:a16="http://schemas.microsoft.com/office/drawing/2014/main" val="3158828686"/>
+                    </a:ext>
+                  </a:extLst>
+                </a:gridCol>
+                <a:gridCol w="1036320">
+                  <a:extLst>
+                    <a:ext uri="{9D8B030D-6E8A-4147-A177-3AD203B41FA5}">
+                      <a16:colId xmlns:a16="http://schemas.microsoft.com/office/drawing/2014/main" val="3723561695"/>
+                    </a:ext>
+                  </a:extLst>
+                </a:gridCol>
+                <a:gridCol w="5852160">
+                  <a:extLst>
+                    <a:ext uri="{9D8B030D-6E8A-4147-A177-3AD203B41FA5}">
+                      <a16:colId xmlns:a16="http://schemas.microsoft.com/office/drawing/2014/main" val="3936547858"/>
+                    </a:ext>
+                  </a:extLst>
+                </a:gridCol>
+              </a:tblGrid>
+              <a:tr h="370840">
+                <a:tc>
+                  <a:txBody>
+                    <a:bodyPr/>
+                    <a:lstStyle/>
+                    <a:p>
+                      <a:r>
+                        <a:rPr lang="en-GB" dirty="0"/>
+                        <a:t>Utility</a:t>
+                      </a:r>
+                      <a:endParaRPr lang="nl-NL" dirty="0"/>
+                    </a:p>
+                  </a:txBody>
+                  <a:tcPr/>
+                </a:tc>
+                <a:tc>
+                  <a:txBody>
+                    <a:bodyPr/>
+                    <a:lstStyle/>
+                    <a:p>
+                      <a:r>
+                        <a:rPr lang="en-GB" dirty="0"/>
+                        <a:t>Works on </a:t>
+                      </a:r>
+                      <a:r>
+                        <a:rPr lang="en-GB" dirty="0" err="1"/>
+                        <a:t>ini</a:t>
+                      </a:r>
+                      <a:endParaRPr lang="nl-NL" dirty="0"/>
+                    </a:p>
+                  </a:txBody>
+                  <a:tcPr/>
+                </a:tc>
+                <a:tc>
+                  <a:txBody>
+                    <a:bodyPr/>
+                    <a:lstStyle/>
+                    <a:p>
+                      <a:r>
+                        <a:rPr lang="en-GB" dirty="0"/>
+                        <a:t>Needs edits?*</a:t>
+                      </a:r>
+                      <a:endParaRPr lang="nl-NL" dirty="0"/>
+                    </a:p>
+                  </a:txBody>
+                  <a:tcPr/>
+                </a:tc>
+                <a:tc>
+                  <a:txBody>
+                    <a:bodyPr/>
+                    <a:lstStyle/>
+                    <a:p>
+                      <a:r>
+                        <a:rPr lang="en-GB" dirty="0"/>
+                        <a:t>Purpose</a:t>
+                      </a:r>
+                      <a:endParaRPr lang="nl-NL" dirty="0"/>
+                    </a:p>
+                  </a:txBody>
+                  <a:tcPr/>
+                </a:tc>
+                <a:extLst>
+                  <a:ext uri="{0D108BD9-81ED-4DB2-BD59-A6C34878D82A}">
+                    <a16:rowId xmlns:a16="http://schemas.microsoft.com/office/drawing/2014/main" val="2249949909"/>
+                  </a:ext>
+                </a:extLst>
+              </a:tr>
+              <a:tr h="370840">
+                <a:tc>
+                  <a:txBody>
+                    <a:bodyPr/>
+                    <a:lstStyle/>
+                    <a:p>
+                      <a:r>
+                        <a:rPr lang="en-GB" dirty="0"/>
+                        <a:t>svr8RecreateTripRepository</a:t>
+                      </a:r>
+                      <a:endParaRPr lang="nl-NL" dirty="0"/>
+                    </a:p>
+                  </a:txBody>
+                  <a:tcPr/>
+                </a:tc>
+                <a:tc>
+                  <a:txBody>
+                    <a:bodyPr/>
+                    <a:lstStyle/>
+                    <a:p>
+                      <a:r>
+                        <a:rPr lang="en-GB" dirty="0"/>
+                        <a:t>Trip</a:t>
+                      </a:r>
+                      <a:endParaRPr lang="nl-NL" dirty="0"/>
+                    </a:p>
+                  </a:txBody>
+                  <a:tcPr/>
+                </a:tc>
+                <a:tc>
+                  <a:txBody>
+                    <a:bodyPr/>
+                    <a:lstStyle/>
+                    <a:p>
+                      <a:r>
+                        <a:rPr lang="en-GB" dirty="0"/>
+                        <a:t>No</a:t>
+                      </a:r>
+                      <a:endParaRPr lang="nl-NL" dirty="0"/>
+                    </a:p>
+                  </a:txBody>
+                  <a:tcPr/>
+                </a:tc>
+                <a:tc>
+                  <a:txBody>
+                    <a:bodyPr/>
+                    <a:lstStyle/>
+                    <a:p>
+                      <a:r>
+                        <a:rPr lang="en-GB" dirty="0"/>
+                        <a:t>Recreate all blogs and biota tree.  This will delete all trip data and recreate it from the raw data. </a:t>
+                      </a:r>
+                      <a:endParaRPr lang="nl-NL" dirty="0"/>
+                    </a:p>
+                  </a:txBody>
+                  <a:tcPr/>
+                </a:tc>
+                <a:extLst>
+                  <a:ext uri="{0D108BD9-81ED-4DB2-BD59-A6C34878D82A}">
+                    <a16:rowId xmlns:a16="http://schemas.microsoft.com/office/drawing/2014/main" val="3096990806"/>
+                  </a:ext>
+                </a:extLst>
+              </a:tr>
+              <a:tr h="370840">
+                <a:tc>
+                  <a:txBody>
+                    <a:bodyPr/>
+                    <a:lstStyle/>
+                    <a:p>
+                      <a:r>
+                        <a:rPr lang="en-GB" dirty="0"/>
+                        <a:t>svr9RedoBlog</a:t>
+                      </a:r>
+                      <a:endParaRPr lang="nl-NL" dirty="0"/>
+                    </a:p>
+                  </a:txBody>
+                  <a:tcPr/>
+                </a:tc>
+                <a:tc>
+                  <a:txBody>
+                    <a:bodyPr/>
+                    <a:lstStyle/>
+                    <a:p>
+                      <a:r>
+                        <a:rPr lang="en-GB" dirty="0"/>
+                        <a:t>Trip</a:t>
+                      </a:r>
+                      <a:endParaRPr lang="nl-NL" dirty="0"/>
+                    </a:p>
+                  </a:txBody>
+                  <a:tcPr/>
+                </a:tc>
+                <a:tc>
+                  <a:txBody>
+                    <a:bodyPr/>
+                    <a:lstStyle/>
+                    <a:p>
+                      <a:endParaRPr lang="nl-NL" dirty="0"/>
+                    </a:p>
+                  </a:txBody>
+                  <a:tcPr/>
+                </a:tc>
+                <a:tc>
+                  <a:txBody>
+                    <a:bodyPr/>
+                    <a:lstStyle/>
+                    <a:p>
+                      <a:r>
+                        <a:rPr lang="en-GB" dirty="0"/>
+                        <a:t>Update blog using new code.</a:t>
+                      </a:r>
+                      <a:endParaRPr lang="nl-NL" dirty="0"/>
+                    </a:p>
+                  </a:txBody>
+                  <a:tcPr/>
+                </a:tc>
+                <a:extLst>
+                  <a:ext uri="{0D108BD9-81ED-4DB2-BD59-A6C34878D82A}">
+                    <a16:rowId xmlns:a16="http://schemas.microsoft.com/office/drawing/2014/main" val="4178548953"/>
+                  </a:ext>
+                </a:extLst>
+              </a:tr>
+              <a:tr h="370840">
+                <a:tc>
+                  <a:txBody>
+                    <a:bodyPr/>
+                    <a:lstStyle/>
+                    <a:p>
+                      <a:r>
+                        <a:rPr lang="en-GB" dirty="0"/>
+                        <a:t>svu1BirdingBreaks</a:t>
+                      </a:r>
+                      <a:endParaRPr lang="nl-NL" dirty="0"/>
+                    </a:p>
+                  </a:txBody>
+                  <a:tcPr/>
+                </a:tc>
+                <a:tc>
+                  <a:txBody>
+                    <a:bodyPr/>
+                    <a:lstStyle/>
+                    <a:p>
+                      <a:r>
+                        <a:rPr lang="en-GB" dirty="0"/>
+                        <a:t>n/a</a:t>
+                      </a:r>
+                      <a:endParaRPr lang="nl-NL" dirty="0"/>
+                    </a:p>
+                  </a:txBody>
+                  <a:tcPr/>
+                </a:tc>
+                <a:tc>
+                  <a:txBody>
+                    <a:bodyPr/>
+                    <a:lstStyle/>
+                    <a:p>
+                      <a:r>
+                        <a:rPr lang="en-GB" dirty="0"/>
+                        <a:t>Yes</a:t>
+                      </a:r>
+                      <a:endParaRPr lang="nl-NL" dirty="0"/>
+                    </a:p>
+                  </a:txBody>
+                  <a:tcPr/>
+                </a:tc>
+                <a:tc>
+                  <a:txBody>
+                    <a:bodyPr/>
+                    <a:lstStyle/>
+                    <a:p>
+                      <a:r>
+                        <a:rPr lang="en-GB" dirty="0"/>
+                        <a:t>Ad-hoc code to create a summary Excel for trip based on the </a:t>
+                      </a:r>
+                      <a:r>
+                        <a:rPr lang="en-GB" dirty="0" err="1"/>
+                        <a:t>BirdingBreak</a:t>
+                      </a:r>
+                      <a:r>
+                        <a:rPr lang="en-GB" dirty="0"/>
+                        <a:t> </a:t>
+                      </a:r>
+                      <a:r>
+                        <a:rPr lang="en-GB" dirty="0" err="1"/>
+                        <a:t>specieslist</a:t>
+                      </a:r>
+                      <a:r>
+                        <a:rPr lang="en-GB" dirty="0"/>
+                        <a:t>.</a:t>
+                      </a:r>
+                      <a:endParaRPr lang="nl-NL" dirty="0"/>
+                    </a:p>
+                  </a:txBody>
+                  <a:tcPr/>
+                </a:tc>
+                <a:extLst>
+                  <a:ext uri="{0D108BD9-81ED-4DB2-BD59-A6C34878D82A}">
+                    <a16:rowId xmlns:a16="http://schemas.microsoft.com/office/drawing/2014/main" val="2540119397"/>
+                  </a:ext>
+                </a:extLst>
+              </a:tr>
+              <a:tr h="370840">
+                <a:tc>
+                  <a:txBody>
+                    <a:bodyPr/>
+                    <a:lstStyle/>
+                    <a:p>
+                      <a:r>
+                        <a:rPr lang="en-GB" dirty="0"/>
+                        <a:t>Svu2avibase</a:t>
+                      </a:r>
+                      <a:endParaRPr lang="nl-NL" dirty="0"/>
+                    </a:p>
+                  </a:txBody>
+                  <a:tcPr/>
+                </a:tc>
+                <a:tc>
+                  <a:txBody>
+                    <a:bodyPr/>
+                    <a:lstStyle/>
+                    <a:p>
+                      <a:r>
+                        <a:rPr lang="en-GB" dirty="0"/>
+                        <a:t>n/a</a:t>
+                      </a:r>
+                      <a:endParaRPr lang="nl-NL" dirty="0"/>
+                    </a:p>
+                  </a:txBody>
+                  <a:tcPr/>
+                </a:tc>
+                <a:tc>
+                  <a:txBody>
+                    <a:bodyPr/>
+                    <a:lstStyle/>
+                    <a:p>
+                      <a:r>
+                        <a:rPr lang="en-GB" dirty="0"/>
+                        <a:t>Yes</a:t>
+                      </a:r>
+                      <a:endParaRPr lang="nl-NL" dirty="0"/>
+                    </a:p>
+                  </a:txBody>
+                  <a:tcPr/>
+                </a:tc>
+                <a:tc>
+                  <a:txBody>
+                    <a:bodyPr/>
+                    <a:lstStyle/>
+                    <a:p>
+                      <a:r>
+                        <a:rPr lang="en-GB" dirty="0"/>
+                        <a:t>Object is to use an </a:t>
+                      </a:r>
+                      <a:r>
+                        <a:rPr lang="en-GB" dirty="0" err="1"/>
+                        <a:t>avibase</a:t>
+                      </a:r>
+                      <a:r>
+                        <a:rPr lang="en-GB" dirty="0"/>
+                        <a:t> CSV to create a checklist, marking whether not a species is new for me.</a:t>
+                      </a:r>
+                      <a:endParaRPr lang="nl-NL" dirty="0"/>
+                    </a:p>
+                  </a:txBody>
+                  <a:tcPr/>
+                </a:tc>
+                <a:extLst>
+                  <a:ext uri="{0D108BD9-81ED-4DB2-BD59-A6C34878D82A}">
+                    <a16:rowId xmlns:a16="http://schemas.microsoft.com/office/drawing/2014/main" val="3735507902"/>
+                  </a:ext>
+                </a:extLst>
+              </a:tr>
+            </a:tbl>
+          </a:graphicData>
+        </a:graphic>
+      </p:graphicFrame>
+      <p:sp>
+        <p:nvSpPr>
+          <p:cNvPr id="7" name="Title 6">
+            <a:extLst>
+              <a:ext uri="{FF2B5EF4-FFF2-40B4-BE49-F238E27FC236}">
+                <a16:creationId xmlns:a16="http://schemas.microsoft.com/office/drawing/2014/main" id="{06F67CCF-F899-7CD7-9ADA-5EC81AD0241B}"/>
+              </a:ext>
+            </a:extLst>
+          </p:cNvPr>
+          <p:cNvSpPr>
+            <a:spLocks noGrp="1"/>
+          </p:cNvSpPr>
+          <p:nvPr>
+            <p:ph type="title"/>
+          </p:nvPr>
+        </p:nvSpPr>
+        <p:spPr>
+          <a:xfrm>
+            <a:off x="617220" y="182245"/>
+            <a:ext cx="10515600" cy="686435"/>
+          </a:xfrm>
+        </p:spPr>
+        <p:txBody>
+          <a:bodyPr>
+            <a:normAutofit fontScale="90000"/>
+          </a:bodyPr>
+          <a:lstStyle/>
+          <a:p>
+            <a:r>
+              <a:rPr lang="en-GB" dirty="0"/>
+              <a:t>Utilities</a:t>
+            </a:r>
+            <a:endParaRPr lang="nl-NL" dirty="0"/>
+          </a:p>
+        </p:txBody>
+      </p:sp>
+    </p:spTree>
+    <p:extLst>
+      <p:ext uri="{BB962C8B-B14F-4D97-AF65-F5344CB8AC3E}">
+        <p14:creationId xmlns:p14="http://schemas.microsoft.com/office/powerpoint/2010/main" val="2261623307"/>
+      </p:ext>
+    </p:extLst>
+  </p:cSld>
+  <p:clrMapOvr>
+    <a:masterClrMapping/>
+  </p:clrMapOvr>
+</p:sld>
+</file>
+
+<file path=ppt/slides/slide19.xml><?xml version="1.0" encoding="utf-8"?>
+<p:sld xmlns:a="http://schemas.openxmlformats.org/drawingml/2006/main" xmlns:r="http://schemas.openxmlformats.org/officeDocument/2006/relationships" xmlns:p="http://schemas.openxmlformats.org/presentationml/2006/main">
+  <p:cSld>
+    <p:spTree>
+      <p:nvGrpSpPr>
+        <p:cNvPr id="1" name="">
+          <a:extLst>
+            <a:ext uri="{FF2B5EF4-FFF2-40B4-BE49-F238E27FC236}">
+              <a16:creationId xmlns:a16="http://schemas.microsoft.com/office/drawing/2014/main" id="{BC9871F0-D734-DC34-4306-8F9ECF76B00B}"/>
+            </a:ext>
+          </a:extLst>
+        </p:cNvPr>
+        <p:cNvGrpSpPr/>
+        <p:nvPr/>
+      </p:nvGrpSpPr>
+      <p:grpSpPr>
+        <a:xfrm>
+          <a:off x="0" y="0"/>
+          <a:ext cx="0" cy="0"/>
+          <a:chOff x="0" y="0"/>
+          <a:chExt cx="0" cy="0"/>
+        </a:xfrm>
+      </p:grpSpPr>
+      <p:sp>
+        <p:nvSpPr>
+          <p:cNvPr id="2" name="Title 1">
+            <a:extLst>
+              <a:ext uri="{FF2B5EF4-FFF2-40B4-BE49-F238E27FC236}">
+                <a16:creationId xmlns:a16="http://schemas.microsoft.com/office/drawing/2014/main" id="{E08A16E7-24C7-BC78-C30C-C38DB7ED1EAB}"/>
+              </a:ext>
+            </a:extLst>
+          </p:cNvPr>
+          <p:cNvSpPr>
+            <a:spLocks noGrp="1"/>
+          </p:cNvSpPr>
+          <p:nvPr>
+            <p:ph type="title"/>
+          </p:nvPr>
+        </p:nvSpPr>
+        <p:spPr>
+          <a:xfrm>
+            <a:off x="526211" y="365125"/>
+            <a:ext cx="11205714" cy="1325563"/>
+          </a:xfrm>
+        </p:spPr>
+        <p:txBody>
+          <a:bodyPr/>
+          <a:lstStyle/>
+          <a:p>
+            <a:r>
+              <a:rPr lang="en-GB" dirty="0"/>
+              <a:t>Create a new trip</a:t>
+            </a:r>
+            <a:endParaRPr lang="nl-NL" dirty="0"/>
+          </a:p>
+        </p:txBody>
+      </p:sp>
+      <p:sp>
+        <p:nvSpPr>
+          <p:cNvPr id="3" name="Content Placeholder 2">
+            <a:extLst>
+              <a:ext uri="{FF2B5EF4-FFF2-40B4-BE49-F238E27FC236}">
+                <a16:creationId xmlns:a16="http://schemas.microsoft.com/office/drawing/2014/main" id="{1F2EB85F-F13F-F115-1806-69D3F4DA0B61}"/>
+              </a:ext>
+            </a:extLst>
+          </p:cNvPr>
+          <p:cNvSpPr>
+            <a:spLocks noGrp="1"/>
+          </p:cNvSpPr>
+          <p:nvPr>
+            <p:ph idx="1"/>
+          </p:nvPr>
+        </p:nvSpPr>
+        <p:spPr/>
+        <p:txBody>
+          <a:bodyPr>
+            <a:normAutofit/>
+          </a:bodyPr>
+          <a:lstStyle/>
+          <a:p>
+            <a:pPr marL="0" indent="0">
+              <a:buNone/>
+            </a:pPr>
+            <a:r>
+              <a:rPr lang="en-GB" sz="2400" dirty="0"/>
+              <a:t>Once the overall setup is done with a master database (see above) a </a:t>
+            </a:r>
+            <a:r>
+              <a:rPr lang="en-GB" sz="2400" b="1" dirty="0"/>
+              <a:t>Trip</a:t>
+            </a:r>
+            <a:r>
+              <a:rPr lang="en-GB" sz="2400" dirty="0"/>
+              <a:t> must defined. This is essentially a subtree in the </a:t>
+            </a:r>
+            <a:r>
+              <a:rPr lang="en-GB" sz="2400" b="1" dirty="0"/>
+              <a:t>Trips</a:t>
+            </a:r>
+            <a:r>
+              <a:rPr lang="en-GB" sz="2400" dirty="0"/>
+              <a:t> directory.</a:t>
+            </a:r>
+          </a:p>
+          <a:p>
+            <a:pPr marL="0" indent="0">
+              <a:buNone/>
+            </a:pPr>
+            <a:r>
+              <a:rPr lang="en-GB" sz="2400" dirty="0"/>
+              <a:t>Creating a new Trip requires:</a:t>
+            </a:r>
+          </a:p>
+          <a:p>
+            <a:r>
+              <a:rPr lang="en-GB" sz="2400" dirty="0"/>
+              <a:t>To manually create a new trip directory: &lt;</a:t>
+            </a:r>
+            <a:r>
+              <a:rPr lang="en-GB" sz="2400" dirty="0" err="1"/>
+              <a:t>tripname</a:t>
+            </a:r>
+            <a:r>
+              <a:rPr lang="en-GB" sz="2400" dirty="0"/>
+              <a:t>&gt;</a:t>
+            </a:r>
+            <a:r>
+              <a:rPr lang="en-GB" sz="2400" dirty="0" err="1"/>
+              <a:t>db</a:t>
+            </a:r>
+            <a:r>
+              <a:rPr lang="en-GB" sz="2400" dirty="0"/>
+              <a:t>, </a:t>
+            </a:r>
+            <a:r>
+              <a:rPr lang="en-GB" sz="2400" dirty="0" err="1"/>
+              <a:t>eg</a:t>
+            </a:r>
+            <a:r>
+              <a:rPr lang="en-GB" sz="2400" dirty="0"/>
+              <a:t> </a:t>
+            </a:r>
+            <a:r>
+              <a:rPr lang="en-GB" sz="2400" b="1" dirty="0" err="1"/>
+              <a:t>gambiadb</a:t>
+            </a:r>
+            <a:r>
+              <a:rPr lang="en-GB" sz="2400" b="1" dirty="0"/>
+              <a:t>, </a:t>
+            </a:r>
+            <a:r>
+              <a:rPr lang="en-GB" sz="2400" dirty="0"/>
+              <a:t>with in this directory three files:</a:t>
+            </a:r>
+            <a:endParaRPr lang="en-GB" sz="2400" b="1" dirty="0"/>
+          </a:p>
+          <a:p>
+            <a:pPr lvl="1"/>
+            <a:r>
+              <a:rPr lang="en-GB" sz="2000" dirty="0"/>
+              <a:t>Create a </a:t>
+            </a:r>
+            <a:r>
+              <a:rPr lang="en-GB" sz="2000" b="1" dirty="0"/>
+              <a:t>banner</a:t>
+            </a:r>
+            <a:r>
+              <a:rPr lang="en-GB" sz="2000" dirty="0"/>
+              <a:t> for each webpage about the trip, 2000x270 pixels.  Text must be readable when overlayed with info like a species name</a:t>
+            </a:r>
+          </a:p>
+          <a:p>
+            <a:pPr lvl="1"/>
+            <a:r>
+              <a:rPr lang="en-GB" sz="2000" dirty="0"/>
+              <a:t>Create a small </a:t>
+            </a:r>
+            <a:r>
+              <a:rPr lang="en-GB" sz="2000" b="1" dirty="0"/>
+              <a:t>picture</a:t>
+            </a:r>
+            <a:r>
+              <a:rPr lang="en-GB" sz="2000" dirty="0"/>
+              <a:t> 600x450 pixels for visual lists</a:t>
+            </a:r>
+          </a:p>
+          <a:p>
+            <a:pPr lvl="1"/>
+            <a:r>
+              <a:rPr lang="en-GB" sz="2000" dirty="0"/>
+              <a:t>A </a:t>
+            </a:r>
+            <a:r>
+              <a:rPr lang="en-GB" sz="2000" b="1" dirty="0"/>
+              <a:t>trip.ini </a:t>
+            </a:r>
+            <a:r>
+              <a:rPr lang="en-GB" sz="2000" dirty="0"/>
+              <a:t>file that describes the trip (example on next slide)</a:t>
+            </a:r>
+          </a:p>
+          <a:p>
+            <a:r>
+              <a:rPr lang="en-GB" sz="2400" dirty="0"/>
+              <a:t>To run the Python program sv1MakeRepository</a:t>
+            </a:r>
+          </a:p>
+          <a:p>
+            <a:pPr lvl="1"/>
+            <a:r>
+              <a:rPr lang="en-GB" sz="2000" dirty="0"/>
+              <a:t>with another </a:t>
+            </a:r>
+            <a:r>
+              <a:rPr lang="en-GB" sz="2000" dirty="0" err="1"/>
+              <a:t>ini</a:t>
+            </a:r>
+            <a:r>
+              <a:rPr lang="en-GB" sz="2000" dirty="0"/>
+              <a:t> file passed to it, </a:t>
+            </a:r>
+            <a:r>
+              <a:rPr lang="en-GB" sz="2000" dirty="0" err="1"/>
+              <a:t>eg</a:t>
+            </a:r>
+            <a:r>
+              <a:rPr lang="en-GB" sz="2000" dirty="0"/>
+              <a:t> svconfig.ini (example below)</a:t>
+            </a:r>
+          </a:p>
+        </p:txBody>
+      </p:sp>
+    </p:spTree>
+    <p:extLst>
+      <p:ext uri="{BB962C8B-B14F-4D97-AF65-F5344CB8AC3E}">
+        <p14:creationId xmlns:p14="http://schemas.microsoft.com/office/powerpoint/2010/main" val="4142673628"/>
       </p:ext>
     </p:extLst>
   </p:cSld>
@@ -9157,6 +13074,1088 @@
 </p:sld>
 </file>
 
+<file path=ppt/slides/slide20.xml><?xml version="1.0" encoding="utf-8"?>
+<p:sld xmlns:a="http://schemas.openxmlformats.org/drawingml/2006/main" xmlns:r="http://schemas.openxmlformats.org/officeDocument/2006/relationships" xmlns:p="http://schemas.openxmlformats.org/presentationml/2006/main">
+  <p:cSld>
+    <p:spTree>
+      <p:nvGrpSpPr>
+        <p:cNvPr id="1" name="">
+          <a:extLst>
+            <a:ext uri="{FF2B5EF4-FFF2-40B4-BE49-F238E27FC236}">
+              <a16:creationId xmlns:a16="http://schemas.microsoft.com/office/drawing/2014/main" id="{F97A45C8-9266-0196-C399-61E15707A539}"/>
+            </a:ext>
+          </a:extLst>
+        </p:cNvPr>
+        <p:cNvGrpSpPr/>
+        <p:nvPr/>
+      </p:nvGrpSpPr>
+      <p:grpSpPr>
+        <a:xfrm>
+          <a:off x="0" y="0"/>
+          <a:ext cx="0" cy="0"/>
+          <a:chOff x="0" y="0"/>
+          <a:chExt cx="0" cy="0"/>
+        </a:xfrm>
+      </p:grpSpPr>
+      <p:sp>
+        <p:nvSpPr>
+          <p:cNvPr id="2" name="Title 1">
+            <a:extLst>
+              <a:ext uri="{FF2B5EF4-FFF2-40B4-BE49-F238E27FC236}">
+                <a16:creationId xmlns:a16="http://schemas.microsoft.com/office/drawing/2014/main" id="{85D5F6CD-18DD-07DB-EC43-891E1527B897}"/>
+              </a:ext>
+            </a:extLst>
+          </p:cNvPr>
+          <p:cNvSpPr>
+            <a:spLocks noGrp="1"/>
+          </p:cNvSpPr>
+          <p:nvPr>
+            <p:ph type="title"/>
+          </p:nvPr>
+        </p:nvSpPr>
+        <p:spPr>
+          <a:xfrm>
+            <a:off x="526211" y="365125"/>
+            <a:ext cx="11205714" cy="1325563"/>
+          </a:xfrm>
+        </p:spPr>
+        <p:txBody>
+          <a:bodyPr/>
+          <a:lstStyle/>
+          <a:p>
+            <a:r>
+              <a:rPr lang="en-GB" dirty="0"/>
+              <a:t>Sample trip.ini file (page 1)</a:t>
+            </a:r>
+            <a:endParaRPr lang="nl-NL" dirty="0"/>
+          </a:p>
+        </p:txBody>
+      </p:sp>
+      <p:sp>
+        <p:nvSpPr>
+          <p:cNvPr id="3" name="Content Placeholder 2">
+            <a:extLst>
+              <a:ext uri="{FF2B5EF4-FFF2-40B4-BE49-F238E27FC236}">
+                <a16:creationId xmlns:a16="http://schemas.microsoft.com/office/drawing/2014/main" id="{D09412B8-8DD1-4D18-2C04-21D8F0EF5A1E}"/>
+              </a:ext>
+            </a:extLst>
+          </p:cNvPr>
+          <p:cNvSpPr>
+            <a:spLocks noGrp="1"/>
+          </p:cNvSpPr>
+          <p:nvPr>
+            <p:ph idx="1"/>
+          </p:nvPr>
+        </p:nvSpPr>
+        <p:spPr/>
+        <p:txBody>
+          <a:bodyPr>
+            <a:normAutofit/>
+          </a:bodyPr>
+          <a:lstStyle/>
+          <a:p>
+            <a:pPr marL="0" indent="0">
+              <a:buNone/>
+            </a:pPr>
+            <a:r>
+              <a:rPr lang="en-GB" sz="2000" dirty="0"/>
+              <a:t>[</a:t>
+            </a:r>
+            <a:r>
+              <a:rPr lang="en-GB" sz="2000" dirty="0" err="1"/>
+              <a:t>trip_config</a:t>
+            </a:r>
+            <a:r>
+              <a:rPr lang="en-GB" sz="2000" dirty="0"/>
+              <a:t>]					# group</a:t>
+            </a:r>
+          </a:p>
+          <a:p>
+            <a:pPr marL="0" indent="0">
+              <a:buNone/>
+            </a:pPr>
+            <a:r>
+              <a:rPr lang="en-GB" sz="2000" dirty="0" err="1"/>
+              <a:t>master_repository_web</a:t>
+            </a:r>
+            <a:r>
+              <a:rPr lang="en-GB" sz="2000" dirty="0"/>
+              <a:t> = /nature/		# web address for master</a:t>
+            </a:r>
+          </a:p>
+          <a:p>
+            <a:pPr marL="0" indent="0">
+              <a:buNone/>
+            </a:pPr>
+            <a:r>
+              <a:rPr lang="en-GB" sz="2000" dirty="0" err="1"/>
+              <a:t>master_repository_disk</a:t>
+            </a:r>
+            <a:r>
+              <a:rPr lang="en-GB" sz="2000" dirty="0"/>
+              <a:t> = E:\Dropbox\naturedb	# location on Windows or Linux</a:t>
+            </a:r>
+          </a:p>
+          <a:p>
+            <a:pPr marL="0" indent="0">
+              <a:buNone/>
+            </a:pPr>
+            <a:r>
+              <a:rPr lang="en-GB" sz="2000" dirty="0" err="1"/>
+              <a:t>trip_banner</a:t>
+            </a:r>
+            <a:r>
+              <a:rPr lang="en-GB" sz="2000" dirty="0"/>
+              <a:t> = bannergambia.jpg			# banner just created</a:t>
+            </a:r>
+          </a:p>
+          <a:p>
+            <a:pPr marL="0" indent="0">
+              <a:buNone/>
+            </a:pPr>
+            <a:r>
+              <a:rPr lang="en-GB" sz="2000" dirty="0" err="1"/>
+              <a:t>trip_picture</a:t>
+            </a:r>
+            <a:r>
+              <a:rPr lang="en-GB" sz="2000" dirty="0"/>
+              <a:t> = gambiatrip.jpg			# picture for visual trip list</a:t>
+            </a:r>
+          </a:p>
+          <a:p>
+            <a:pPr marL="0" indent="0">
+              <a:buNone/>
+            </a:pPr>
+            <a:r>
+              <a:rPr lang="en-GB" sz="2000" dirty="0"/>
+              <a:t>created = 2025-07-13 12:28			# last time file is updated</a:t>
+            </a:r>
+          </a:p>
+          <a:p>
+            <a:pPr marL="0" indent="0">
+              <a:buNone/>
+            </a:pPr>
+            <a:r>
+              <a:rPr lang="en-GB" sz="2000" dirty="0" err="1"/>
+              <a:t>trip_name</a:t>
+            </a:r>
+            <a:r>
+              <a:rPr lang="en-GB" sz="2000" dirty="0"/>
+              <a:t> = </a:t>
+            </a:r>
+            <a:r>
+              <a:rPr lang="en-GB" sz="2000" dirty="0" err="1"/>
+              <a:t>gambia</a:t>
+            </a:r>
+            <a:r>
+              <a:rPr lang="en-GB" sz="2000" dirty="0"/>
+              <a:t>				# the (web) address for the trip</a:t>
+            </a:r>
+          </a:p>
+          <a:p>
+            <a:pPr marL="0" indent="0">
+              <a:buNone/>
+            </a:pPr>
+            <a:r>
+              <a:rPr lang="en-GB" sz="2000" dirty="0" err="1"/>
+              <a:t>fromdate</a:t>
+            </a:r>
+            <a:r>
+              <a:rPr lang="en-GB" sz="2000" dirty="0"/>
+              <a:t> = 2025-02-17				# consider only pictures from</a:t>
+            </a:r>
+          </a:p>
+          <a:p>
+            <a:pPr marL="0" indent="0">
+              <a:buNone/>
+            </a:pPr>
+            <a:r>
+              <a:rPr lang="en-GB" sz="2000" dirty="0" err="1"/>
+              <a:t>todate</a:t>
+            </a:r>
+            <a:r>
+              <a:rPr lang="en-GB" sz="2000" dirty="0"/>
+              <a:t> = 2025-03-17				#     this date range</a:t>
+            </a:r>
+          </a:p>
+          <a:p>
+            <a:pPr marL="0" indent="0">
+              <a:buNone/>
+            </a:pPr>
+            <a:r>
+              <a:rPr lang="en-GB" sz="2000" dirty="0" err="1"/>
+              <a:t>oneblog</a:t>
+            </a:r>
+            <a:r>
+              <a:rPr lang="en-GB" sz="2000" dirty="0"/>
+              <a:t> = day					# the blog entry is about day or month</a:t>
+            </a:r>
+          </a:p>
+        </p:txBody>
+      </p:sp>
+    </p:spTree>
+    <p:extLst>
+      <p:ext uri="{BB962C8B-B14F-4D97-AF65-F5344CB8AC3E}">
+        <p14:creationId xmlns:p14="http://schemas.microsoft.com/office/powerpoint/2010/main" val="4146949404"/>
+      </p:ext>
+    </p:extLst>
+  </p:cSld>
+  <p:clrMapOvr>
+    <a:masterClrMapping/>
+  </p:clrMapOvr>
+</p:sld>
+</file>
+
+<file path=ppt/slides/slide21.xml><?xml version="1.0" encoding="utf-8"?>
+<p:sld xmlns:a="http://schemas.openxmlformats.org/drawingml/2006/main" xmlns:r="http://schemas.openxmlformats.org/officeDocument/2006/relationships" xmlns:p="http://schemas.openxmlformats.org/presentationml/2006/main">
+  <p:cSld>
+    <p:spTree>
+      <p:nvGrpSpPr>
+        <p:cNvPr id="1" name="">
+          <a:extLst>
+            <a:ext uri="{FF2B5EF4-FFF2-40B4-BE49-F238E27FC236}">
+              <a16:creationId xmlns:a16="http://schemas.microsoft.com/office/drawing/2014/main" id="{2BEB95EE-A8DD-4E40-5432-6DFD6E7A09E8}"/>
+            </a:ext>
+          </a:extLst>
+        </p:cNvPr>
+        <p:cNvGrpSpPr/>
+        <p:nvPr/>
+      </p:nvGrpSpPr>
+      <p:grpSpPr>
+        <a:xfrm>
+          <a:off x="0" y="0"/>
+          <a:ext cx="0" cy="0"/>
+          <a:chOff x="0" y="0"/>
+          <a:chExt cx="0" cy="0"/>
+        </a:xfrm>
+      </p:grpSpPr>
+      <p:sp>
+        <p:nvSpPr>
+          <p:cNvPr id="2" name="Title 1">
+            <a:extLst>
+              <a:ext uri="{FF2B5EF4-FFF2-40B4-BE49-F238E27FC236}">
+                <a16:creationId xmlns:a16="http://schemas.microsoft.com/office/drawing/2014/main" id="{176EB14F-A830-D83C-BC4F-45F7E663A57A}"/>
+              </a:ext>
+            </a:extLst>
+          </p:cNvPr>
+          <p:cNvSpPr>
+            <a:spLocks noGrp="1"/>
+          </p:cNvSpPr>
+          <p:nvPr>
+            <p:ph type="title"/>
+          </p:nvPr>
+        </p:nvSpPr>
+        <p:spPr>
+          <a:xfrm>
+            <a:off x="526211" y="365125"/>
+            <a:ext cx="11205714" cy="1325563"/>
+          </a:xfrm>
+        </p:spPr>
+        <p:txBody>
+          <a:bodyPr/>
+          <a:lstStyle/>
+          <a:p>
+            <a:r>
+              <a:rPr lang="en-GB" dirty="0"/>
+              <a:t>Sample trip.ini file (page 2) – </a:t>
+            </a:r>
+            <a:br>
+              <a:rPr lang="en-GB" dirty="0"/>
+            </a:br>
+            <a:r>
+              <a:rPr lang="en-GB" dirty="0"/>
+              <a:t>Text for Dutch and English version</a:t>
+            </a:r>
+            <a:endParaRPr lang="nl-NL" dirty="0"/>
+          </a:p>
+        </p:txBody>
+      </p:sp>
+      <p:sp>
+        <p:nvSpPr>
+          <p:cNvPr id="3" name="Content Placeholder 2">
+            <a:extLst>
+              <a:ext uri="{FF2B5EF4-FFF2-40B4-BE49-F238E27FC236}">
+                <a16:creationId xmlns:a16="http://schemas.microsoft.com/office/drawing/2014/main" id="{37EDA81C-AB9C-DE8D-7A7B-009D9DE150C7}"/>
+              </a:ext>
+            </a:extLst>
+          </p:cNvPr>
+          <p:cNvSpPr>
+            <a:spLocks noGrp="1"/>
+          </p:cNvSpPr>
+          <p:nvPr>
+            <p:ph idx="1"/>
+          </p:nvPr>
+        </p:nvSpPr>
+        <p:spPr/>
+        <p:txBody>
+          <a:bodyPr>
+            <a:normAutofit fontScale="77500" lnSpcReduction="20000"/>
+          </a:bodyPr>
+          <a:lstStyle/>
+          <a:p>
+            <a:pPr marL="0" indent="0">
+              <a:buNone/>
+            </a:pPr>
+            <a:r>
+              <a:rPr lang="en-GB" sz="2000" dirty="0"/>
+              <a:t>[</a:t>
+            </a:r>
+            <a:r>
+              <a:rPr lang="en-GB" sz="2000" dirty="0" err="1"/>
+              <a:t>trip_text</a:t>
+            </a:r>
+            <a:r>
+              <a:rPr lang="en-GB" sz="2000" dirty="0"/>
+              <a:t>]</a:t>
+            </a:r>
+          </a:p>
+          <a:p>
+            <a:pPr marL="0" indent="0">
+              <a:buNone/>
+            </a:pPr>
+            <a:r>
+              <a:rPr lang="en-GB" sz="2000" dirty="0" err="1"/>
+              <a:t>title_nl</a:t>
+            </a:r>
+            <a:r>
+              <a:rPr lang="en-GB" sz="2000" dirty="0"/>
+              <a:t> = Gambia</a:t>
+            </a:r>
+          </a:p>
+          <a:p>
+            <a:pPr marL="0" indent="0">
+              <a:buNone/>
+            </a:pPr>
+            <a:r>
+              <a:rPr lang="en-GB" sz="2000" dirty="0" err="1"/>
+              <a:t>message_nl</a:t>
+            </a:r>
+            <a:r>
+              <a:rPr lang="en-GB" sz="2000" dirty="0"/>
+              <a:t> = </a:t>
+            </a:r>
+            <a:r>
+              <a:rPr lang="en-GB" sz="2000" dirty="0" err="1"/>
+              <a:t>Vanaf</a:t>
+            </a:r>
+            <a:r>
+              <a:rPr lang="en-GB" sz="2000" dirty="0"/>
+              <a:t> half </a:t>
+            </a:r>
+            <a:r>
+              <a:rPr lang="en-GB" sz="2000" dirty="0" err="1"/>
+              <a:t>februari</a:t>
+            </a:r>
+            <a:r>
+              <a:rPr lang="en-GB" sz="2000" dirty="0"/>
+              <a:t> ben </a:t>
+            </a:r>
+            <a:r>
+              <a:rPr lang="en-GB" sz="2000" dirty="0" err="1"/>
+              <a:t>ik</a:t>
+            </a:r>
+            <a:r>
+              <a:rPr lang="en-GB" sz="2000" dirty="0"/>
+              <a:t> 4 </a:t>
+            </a:r>
+            <a:r>
+              <a:rPr lang="en-GB" sz="2000" dirty="0" err="1"/>
+              <a:t>weken</a:t>
+            </a:r>
+            <a:r>
+              <a:rPr lang="en-GB" sz="2000" dirty="0"/>
+              <a:t> </a:t>
+            </a:r>
+            <a:r>
+              <a:rPr lang="en-GB" sz="2000" dirty="0" err="1"/>
+              <a:t>naar</a:t>
+            </a:r>
+            <a:r>
+              <a:rPr lang="en-GB" sz="2000" dirty="0"/>
+              <a:t> de </a:t>
+            </a:r>
+            <a:r>
+              <a:rPr lang="en-GB" sz="2000" dirty="0" err="1"/>
+              <a:t>warmte</a:t>
+            </a:r>
+            <a:r>
+              <a:rPr lang="en-GB" sz="2000" dirty="0"/>
+              <a:t> van Gambia </a:t>
+            </a:r>
+            <a:r>
+              <a:rPr lang="en-GB" sz="2000" dirty="0" err="1"/>
+              <a:t>geweest</a:t>
+            </a:r>
+            <a:r>
+              <a:rPr lang="en-GB" sz="2000" dirty="0"/>
+              <a:t>.  De reis is </a:t>
+            </a:r>
+            <a:r>
+              <a:rPr lang="en-GB" sz="2000" dirty="0" err="1"/>
+              <a:t>georganiseerd</a:t>
+            </a:r>
+            <a:r>
+              <a:rPr lang="en-GB" sz="2000" dirty="0"/>
+              <a:t> door &lt;a </a:t>
+            </a:r>
+            <a:r>
+              <a:rPr lang="en-GB" sz="2000" dirty="0" err="1"/>
+              <a:t>href</a:t>
+            </a:r>
+            <a:r>
+              <a:rPr lang="en-GB" sz="2000" dirty="0"/>
+              <a:t>="https://www.senegambiabirding.com/nl/" ​​target="_blank"&gt;Senegambia Birding&lt;/a&gt;.  De </a:t>
+            </a:r>
+            <a:r>
+              <a:rPr lang="en-GB" sz="2000" dirty="0" err="1"/>
+              <a:t>organisatie</a:t>
+            </a:r>
+            <a:r>
+              <a:rPr lang="en-GB" sz="2000" dirty="0"/>
+              <a:t> is </a:t>
+            </a:r>
+            <a:r>
+              <a:rPr lang="en-GB" sz="2000" dirty="0" err="1"/>
+              <a:t>bijzonder</a:t>
+            </a:r>
+            <a:r>
+              <a:rPr lang="en-GB" sz="2000" dirty="0"/>
+              <a:t> </a:t>
+            </a:r>
+            <a:r>
+              <a:rPr lang="en-GB" sz="2000" dirty="0" err="1"/>
+              <a:t>omdat</a:t>
+            </a:r>
+            <a:r>
+              <a:rPr lang="en-GB" sz="2000" dirty="0"/>
+              <a:t> ze </a:t>
+            </a:r>
+            <a:r>
+              <a:rPr lang="en-GB" sz="2000" dirty="0" err="1"/>
+              <a:t>alleen</a:t>
+            </a:r>
+            <a:r>
+              <a:rPr lang="en-GB" sz="2000" dirty="0"/>
+              <a:t> met </a:t>
+            </a:r>
+            <a:r>
+              <a:rPr lang="en-GB" sz="2000" dirty="0" err="1"/>
+              <a:t>lokale</a:t>
+            </a:r>
+            <a:r>
+              <a:rPr lang="en-GB" sz="2000" dirty="0"/>
+              <a:t> </a:t>
+            </a:r>
+            <a:r>
+              <a:rPr lang="en-GB" sz="2000" dirty="0" err="1"/>
+              <a:t>mensen</a:t>
+            </a:r>
+            <a:r>
+              <a:rPr lang="en-GB" sz="2000" dirty="0"/>
+              <a:t> </a:t>
+            </a:r>
+            <a:r>
+              <a:rPr lang="en-GB" sz="2000" dirty="0" err="1"/>
+              <a:t>werken</a:t>
+            </a:r>
+            <a:r>
+              <a:rPr lang="en-GB" sz="2000" dirty="0"/>
+              <a:t>, </a:t>
+            </a:r>
+            <a:r>
+              <a:rPr lang="en-GB" sz="2000" dirty="0" err="1"/>
+              <a:t>onder</a:t>
+            </a:r>
+            <a:r>
+              <a:rPr lang="en-GB" sz="2000" dirty="0"/>
+              <a:t> </a:t>
+            </a:r>
+            <a:r>
+              <a:rPr lang="en-GB" sz="2000" dirty="0" err="1"/>
+              <a:t>leiding</a:t>
+            </a:r>
+            <a:r>
+              <a:rPr lang="en-GB" sz="2000" dirty="0"/>
+              <a:t> van </a:t>
+            </a:r>
+            <a:r>
+              <a:rPr lang="en-GB" sz="2000" dirty="0" err="1"/>
+              <a:t>een</a:t>
+            </a:r>
+            <a:r>
+              <a:rPr lang="en-GB" sz="2000" dirty="0"/>
+              <a:t> </a:t>
+            </a:r>
+            <a:r>
+              <a:rPr lang="en-GB" sz="2000" dirty="0" err="1"/>
+              <a:t>bevlogen</a:t>
+            </a:r>
+            <a:r>
+              <a:rPr lang="en-GB" sz="2000" dirty="0"/>
+              <a:t> Belg. Ze laten </a:t>
+            </a:r>
+            <a:r>
+              <a:rPr lang="en-GB" sz="2000" dirty="0" err="1"/>
+              <a:t>hun</a:t>
+            </a:r>
+            <a:r>
+              <a:rPr lang="en-GB" sz="2000" dirty="0"/>
+              <a:t> </a:t>
+            </a:r>
+            <a:r>
+              <a:rPr lang="en-GB" sz="2000" dirty="0" err="1"/>
+              <a:t>gasten</a:t>
+            </a:r>
+            <a:r>
+              <a:rPr lang="en-GB" sz="2000" dirty="0"/>
+              <a:t> de </a:t>
+            </a:r>
+            <a:r>
+              <a:rPr lang="en-GB" sz="2000" dirty="0" err="1"/>
+              <a:t>natuur</a:t>
+            </a:r>
+            <a:r>
+              <a:rPr lang="en-GB" sz="2000" dirty="0"/>
+              <a:t> </a:t>
+            </a:r>
+            <a:r>
+              <a:rPr lang="en-GB" sz="2000" dirty="0" err="1"/>
+              <a:t>zien</a:t>
+            </a:r>
+            <a:r>
+              <a:rPr lang="en-GB" sz="2000" dirty="0"/>
+              <a:t> en de </a:t>
+            </a:r>
+            <a:r>
+              <a:rPr lang="en-GB" sz="2000" dirty="0" err="1"/>
+              <a:t>cultuur</a:t>
+            </a:r>
+            <a:r>
+              <a:rPr lang="en-GB" sz="2000" dirty="0"/>
+              <a:t> </a:t>
+            </a:r>
+            <a:r>
+              <a:rPr lang="en-GB" sz="2000" dirty="0" err="1"/>
+              <a:t>ervaren</a:t>
+            </a:r>
+            <a:r>
+              <a:rPr lang="en-GB" sz="2000" dirty="0"/>
+              <a:t>. In Gambia </a:t>
+            </a:r>
+            <a:r>
+              <a:rPr lang="en-GB" sz="2000" dirty="0" err="1"/>
+              <a:t>worden</a:t>
+            </a:r>
+            <a:r>
+              <a:rPr lang="en-GB" sz="2000" dirty="0"/>
+              <a:t> 9 </a:t>
+            </a:r>
+            <a:r>
+              <a:rPr lang="en-GB" sz="2000" dirty="0" err="1"/>
+              <a:t>talen</a:t>
+            </a:r>
+            <a:r>
+              <a:rPr lang="en-GB" sz="2000" dirty="0"/>
+              <a:t> </a:t>
+            </a:r>
+            <a:r>
+              <a:rPr lang="en-GB" sz="2000" dirty="0" err="1"/>
+              <a:t>gesproken</a:t>
+            </a:r>
+            <a:r>
+              <a:rPr lang="en-GB" sz="2000" dirty="0"/>
+              <a:t>, en </a:t>
+            </a:r>
+            <a:r>
+              <a:rPr lang="en-GB" sz="2000" dirty="0" err="1"/>
+              <a:t>daarnaast</a:t>
+            </a:r>
+            <a:r>
+              <a:rPr lang="en-GB" sz="2000" dirty="0"/>
+              <a:t> </a:t>
+            </a:r>
+            <a:r>
+              <a:rPr lang="en-GB" sz="2000" dirty="0" err="1"/>
+              <a:t>leert</a:t>
+            </a:r>
+            <a:r>
+              <a:rPr lang="en-GB" sz="2000" dirty="0"/>
+              <a:t> de </a:t>
+            </a:r>
+            <a:r>
+              <a:rPr lang="en-GB" sz="2000" dirty="0" err="1"/>
+              <a:t>islamische</a:t>
+            </a:r>
+            <a:r>
+              <a:rPr lang="en-GB" sz="2000" dirty="0"/>
+              <a:t> </a:t>
+            </a:r>
+            <a:r>
+              <a:rPr lang="en-GB" sz="2000" dirty="0" err="1"/>
+              <a:t>bevolking</a:t>
+            </a:r>
+            <a:r>
+              <a:rPr lang="en-GB" sz="2000" dirty="0"/>
+              <a:t> </a:t>
+            </a:r>
+            <a:r>
+              <a:rPr lang="en-GB" sz="2000" dirty="0" err="1"/>
+              <a:t>veel</a:t>
+            </a:r>
+            <a:r>
+              <a:rPr lang="en-GB" sz="2000" dirty="0"/>
+              <a:t> van </a:t>
+            </a:r>
+            <a:r>
+              <a:rPr lang="en-GB" sz="2000" dirty="0" err="1"/>
+              <a:t>hun</a:t>
+            </a:r>
+            <a:r>
+              <a:rPr lang="en-GB" sz="2000" dirty="0"/>
+              <a:t> </a:t>
+            </a:r>
+            <a:r>
+              <a:rPr lang="en-GB" sz="2000" dirty="0" err="1"/>
+              <a:t>godsdienst</a:t>
+            </a:r>
+            <a:r>
+              <a:rPr lang="en-GB" sz="2000" dirty="0"/>
+              <a:t>. Dat </a:t>
+            </a:r>
+            <a:r>
+              <a:rPr lang="en-GB" sz="2000" dirty="0" err="1"/>
+              <a:t>maakt</a:t>
+            </a:r>
+            <a:r>
+              <a:rPr lang="en-GB" sz="2000" dirty="0"/>
+              <a:t> </a:t>
+            </a:r>
+            <a:r>
+              <a:rPr lang="en-GB" sz="2000" dirty="0" err="1"/>
+              <a:t>onderwijs</a:t>
+            </a:r>
+            <a:r>
+              <a:rPr lang="en-GB" sz="2000" dirty="0"/>
+              <a:t> </a:t>
+            </a:r>
+            <a:r>
+              <a:rPr lang="en-GB" sz="2000" dirty="0" err="1"/>
+              <a:t>moeilijk</a:t>
+            </a:r>
+            <a:r>
+              <a:rPr lang="en-GB" sz="2000" dirty="0"/>
+              <a:t>. Er is </a:t>
+            </a:r>
+            <a:r>
+              <a:rPr lang="en-GB" sz="2000" dirty="0" err="1"/>
+              <a:t>weinig</a:t>
+            </a:r>
+            <a:r>
+              <a:rPr lang="en-GB" sz="2000" dirty="0"/>
+              <a:t> </a:t>
+            </a:r>
+            <a:r>
+              <a:rPr lang="en-GB" sz="2000" dirty="0" err="1"/>
+              <a:t>infrastructuur</a:t>
+            </a:r>
+            <a:r>
+              <a:rPr lang="en-GB" sz="2000" dirty="0"/>
+              <a:t>: </a:t>
+            </a:r>
+            <a:r>
+              <a:rPr lang="en-GB" sz="2000" dirty="0" err="1"/>
+              <a:t>bijna</a:t>
+            </a:r>
+            <a:r>
+              <a:rPr lang="en-GB" sz="2000" dirty="0"/>
+              <a:t> alle </a:t>
+            </a:r>
+            <a:r>
+              <a:rPr lang="en-GB" sz="2000" dirty="0" err="1"/>
+              <a:t>wegen</a:t>
+            </a:r>
+            <a:r>
+              <a:rPr lang="en-GB" sz="2000" dirty="0"/>
+              <a:t> </a:t>
+            </a:r>
+            <a:r>
+              <a:rPr lang="en-GB" sz="2000" dirty="0" err="1"/>
+              <a:t>zijn</a:t>
+            </a:r>
+            <a:r>
+              <a:rPr lang="en-GB" sz="2000" dirty="0"/>
+              <a:t> </a:t>
+            </a:r>
+            <a:r>
+              <a:rPr lang="en-GB" sz="2000" dirty="0" err="1"/>
+              <a:t>zandwegen</a:t>
+            </a:r>
+            <a:r>
+              <a:rPr lang="en-GB" sz="2000" dirty="0"/>
+              <a:t>, er is </a:t>
+            </a:r>
+            <a:r>
+              <a:rPr lang="en-GB" sz="2000" dirty="0" err="1"/>
+              <a:t>bijvoorbeeld</a:t>
+            </a:r>
+            <a:r>
+              <a:rPr lang="en-GB" sz="2000" dirty="0"/>
+              <a:t> </a:t>
+            </a:r>
+            <a:r>
+              <a:rPr lang="en-GB" sz="2000" dirty="0" err="1"/>
+              <a:t>geen</a:t>
+            </a:r>
+            <a:r>
+              <a:rPr lang="en-GB" sz="2000" dirty="0"/>
+              <a:t> </a:t>
+            </a:r>
+            <a:r>
+              <a:rPr lang="en-GB" sz="2000" dirty="0" err="1"/>
+              <a:t>vuilnisophaaldienst</a:t>
+            </a:r>
+            <a:r>
+              <a:rPr lang="en-GB" sz="2000" dirty="0"/>
+              <a:t>, er is </a:t>
+            </a:r>
+            <a:r>
+              <a:rPr lang="en-GB" sz="2000" dirty="0" err="1"/>
+              <a:t>geen</a:t>
+            </a:r>
+            <a:r>
+              <a:rPr lang="en-GB" sz="2000" dirty="0"/>
+              <a:t> post, er is heel </a:t>
+            </a:r>
+            <a:r>
+              <a:rPr lang="en-GB" sz="2000" dirty="0" err="1"/>
+              <a:t>weinig</a:t>
+            </a:r>
+            <a:r>
+              <a:rPr lang="en-GB" sz="2000" dirty="0"/>
+              <a:t> </a:t>
+            </a:r>
+            <a:r>
+              <a:rPr lang="en-GB" sz="2000" dirty="0" err="1"/>
+              <a:t>werk</a:t>
+            </a:r>
+            <a:r>
+              <a:rPr lang="en-GB" sz="2000" dirty="0"/>
+              <a:t>.  Het </a:t>
+            </a:r>
+            <a:r>
+              <a:rPr lang="en-GB" sz="2000" dirty="0" err="1"/>
+              <a:t>gemiddelde</a:t>
+            </a:r>
+            <a:r>
+              <a:rPr lang="en-GB" sz="2000" dirty="0"/>
+              <a:t> </a:t>
+            </a:r>
+            <a:r>
+              <a:rPr lang="en-GB" sz="2000" dirty="0" err="1"/>
+              <a:t>inkomen</a:t>
+            </a:r>
+            <a:r>
+              <a:rPr lang="en-GB" sz="2000" dirty="0"/>
+              <a:t> per </a:t>
+            </a:r>
+            <a:r>
+              <a:rPr lang="en-GB" sz="2000" dirty="0" err="1"/>
+              <a:t>inwoner</a:t>
+            </a:r>
+            <a:r>
+              <a:rPr lang="en-GB" sz="2000" dirty="0"/>
+              <a:t> is 100x lager dan in Nederland.  Dat al </a:t>
+            </a:r>
+            <a:r>
+              <a:rPr lang="en-GB" sz="2000" dirty="0" err="1"/>
+              <a:t>maakt</a:t>
+            </a:r>
+            <a:r>
+              <a:rPr lang="en-GB" sz="2000" dirty="0"/>
+              <a:t> de reis </a:t>
+            </a:r>
+            <a:r>
+              <a:rPr lang="en-GB" sz="2000" dirty="0" err="1"/>
+              <a:t>bijzonder</a:t>
+            </a:r>
+            <a:r>
+              <a:rPr lang="en-GB" sz="2000" dirty="0"/>
+              <a:t>, en </a:t>
+            </a:r>
+            <a:r>
+              <a:rPr lang="en-GB" sz="2000" dirty="0" err="1"/>
+              <a:t>ook</a:t>
+            </a:r>
+            <a:r>
+              <a:rPr lang="en-GB" sz="2000" dirty="0"/>
+              <a:t> </a:t>
+            </a:r>
+            <a:r>
+              <a:rPr lang="en-GB" sz="2000" dirty="0" err="1"/>
+              <a:t>voordelig</a:t>
+            </a:r>
+            <a:r>
+              <a:rPr lang="en-GB" sz="2000" dirty="0"/>
+              <a:t>. Het Engels van de </a:t>
+            </a:r>
+            <a:r>
+              <a:rPr lang="en-GB" sz="2000" dirty="0" err="1"/>
+              <a:t>gidsen</a:t>
+            </a:r>
+            <a:r>
+              <a:rPr lang="en-GB" sz="2000" dirty="0"/>
+              <a:t> is </a:t>
+            </a:r>
+            <a:r>
+              <a:rPr lang="en-GB" sz="2000" dirty="0" err="1"/>
+              <a:t>ook</a:t>
+            </a:r>
+            <a:r>
+              <a:rPr lang="en-GB" sz="2000" dirty="0"/>
+              <a:t> </a:t>
+            </a:r>
+            <a:r>
+              <a:rPr lang="en-GB" sz="2000" dirty="0" err="1"/>
+              <a:t>goed</a:t>
+            </a:r>
+            <a:r>
+              <a:rPr lang="en-GB" sz="2000" dirty="0"/>
+              <a:t> </a:t>
+            </a:r>
+            <a:r>
+              <a:rPr lang="en-GB" sz="2000" dirty="0" err="1"/>
+              <a:t>kan</a:t>
+            </a:r>
+            <a:r>
+              <a:rPr lang="en-GB" sz="2000" dirty="0"/>
+              <a:t> </a:t>
+            </a:r>
+            <a:r>
+              <a:rPr lang="en-GB" sz="2000" dirty="0" err="1"/>
+              <a:t>ik</a:t>
+            </a:r>
+            <a:r>
+              <a:rPr lang="en-GB" sz="2000" dirty="0"/>
+              <a:t> </a:t>
+            </a:r>
+            <a:r>
+              <a:rPr lang="en-GB" sz="2000" dirty="0" err="1"/>
+              <a:t>ervaring</a:t>
+            </a:r>
+            <a:r>
+              <a:rPr lang="en-GB" sz="2000" dirty="0"/>
+              <a:t> </a:t>
+            </a:r>
+            <a:r>
+              <a:rPr lang="en-GB" sz="2000" dirty="0" err="1"/>
+              <a:t>zeggen</a:t>
+            </a:r>
+            <a:r>
+              <a:rPr lang="en-GB" sz="2000" dirty="0"/>
+              <a:t>. Hun </a:t>
+            </a:r>
+            <a:r>
+              <a:rPr lang="en-GB" sz="2000" dirty="0" err="1"/>
+              <a:t>nadruk</a:t>
+            </a:r>
+            <a:r>
+              <a:rPr lang="en-GB" sz="2000" dirty="0"/>
+              <a:t> is </a:t>
+            </a:r>
+            <a:r>
+              <a:rPr lang="en-GB" sz="2000" dirty="0" err="1"/>
+              <a:t>fotografie</a:t>
+            </a:r>
+            <a:r>
+              <a:rPr lang="en-GB" sz="2000" dirty="0"/>
+              <a:t>, </a:t>
+            </a:r>
+            <a:r>
+              <a:rPr lang="en-GB" sz="2000" dirty="0" err="1"/>
+              <a:t>precies</a:t>
+            </a:r>
+            <a:r>
+              <a:rPr lang="en-GB" sz="2000" dirty="0"/>
+              <a:t> wat </a:t>
+            </a:r>
+            <a:r>
+              <a:rPr lang="en-GB" sz="2000" dirty="0" err="1"/>
+              <a:t>ik</a:t>
+            </a:r>
+            <a:r>
+              <a:rPr lang="en-GB" sz="2000" dirty="0"/>
+              <a:t> </a:t>
+            </a:r>
+            <a:r>
+              <a:rPr lang="en-GB" sz="2000" dirty="0" err="1"/>
+              <a:t>wilde</a:t>
+            </a:r>
+            <a:r>
+              <a:rPr lang="en-GB" sz="2000" dirty="0"/>
+              <a:t>.  Ik </a:t>
+            </a:r>
+            <a:r>
+              <a:rPr lang="en-GB" sz="2000" dirty="0" err="1"/>
+              <a:t>heb</a:t>
+            </a:r>
+            <a:r>
+              <a:rPr lang="en-GB" sz="2000" dirty="0"/>
+              <a:t> 240 </a:t>
+            </a:r>
+            <a:r>
+              <a:rPr lang="en-GB" sz="2000" dirty="0" err="1"/>
+              <a:t>verschillende</a:t>
+            </a:r>
+            <a:r>
+              <a:rPr lang="en-GB" sz="2000" dirty="0"/>
+              <a:t> </a:t>
+            </a:r>
+            <a:r>
+              <a:rPr lang="en-GB" sz="2000" dirty="0" err="1"/>
+              <a:t>vogelsoorten</a:t>
+            </a:r>
+            <a:r>
+              <a:rPr lang="en-GB" sz="2000" dirty="0"/>
+              <a:t> </a:t>
+            </a:r>
+            <a:r>
+              <a:rPr lang="en-GB" sz="2000" dirty="0" err="1"/>
+              <a:t>gezien</a:t>
+            </a:r>
+            <a:r>
+              <a:rPr lang="en-GB" sz="2000" dirty="0"/>
+              <a:t>, </a:t>
+            </a:r>
+            <a:r>
+              <a:rPr lang="en-GB" sz="2000" dirty="0" err="1"/>
+              <a:t>waarvan</a:t>
+            </a:r>
+            <a:r>
+              <a:rPr lang="en-GB" sz="2000" dirty="0"/>
+              <a:t> 139 voor </a:t>
+            </a:r>
+            <a:r>
+              <a:rPr lang="en-GB" sz="2000" dirty="0" err="1"/>
+              <a:t>mij</a:t>
+            </a:r>
+            <a:r>
+              <a:rPr lang="en-GB" sz="2000" dirty="0"/>
+              <a:t> </a:t>
+            </a:r>
+            <a:r>
+              <a:rPr lang="en-GB" sz="2000" dirty="0" err="1"/>
+              <a:t>nieuw</a:t>
+            </a:r>
+            <a:r>
+              <a:rPr lang="en-GB" sz="2000" dirty="0"/>
+              <a:t>.  240 </a:t>
+            </a:r>
+            <a:r>
+              <a:rPr lang="en-GB" sz="2000" dirty="0" err="1"/>
+              <a:t>nieuwe</a:t>
+            </a:r>
+            <a:r>
+              <a:rPr lang="en-GB" sz="2000" dirty="0"/>
+              <a:t> </a:t>
+            </a:r>
+            <a:r>
+              <a:rPr lang="en-GB" sz="2000" dirty="0" err="1"/>
+              <a:t>soorten</a:t>
+            </a:r>
+            <a:r>
+              <a:rPr lang="en-GB" sz="2000" dirty="0"/>
+              <a:t> is heel </a:t>
+            </a:r>
+            <a:r>
+              <a:rPr lang="en-GB" sz="2000" dirty="0" err="1"/>
+              <a:t>veel</a:t>
+            </a:r>
+            <a:r>
+              <a:rPr lang="en-GB" sz="2000" dirty="0"/>
+              <a:t> in </a:t>
+            </a:r>
+            <a:r>
+              <a:rPr lang="en-GB" sz="2000" dirty="0" err="1"/>
+              <a:t>zo'n</a:t>
+            </a:r>
+            <a:r>
+              <a:rPr lang="en-GB" sz="2000" dirty="0"/>
+              <a:t> </a:t>
+            </a:r>
+            <a:r>
+              <a:rPr lang="en-GB" sz="2000" dirty="0" err="1"/>
+              <a:t>klein</a:t>
+            </a:r>
+            <a:r>
+              <a:rPr lang="en-GB" sz="2000" dirty="0"/>
+              <a:t> </a:t>
+            </a:r>
+            <a:r>
+              <a:rPr lang="en-GB" sz="2000" dirty="0" err="1"/>
+              <a:t>gebied</a:t>
+            </a:r>
+            <a:r>
+              <a:rPr lang="en-GB" sz="2000" dirty="0"/>
+              <a:t> </a:t>
+            </a:r>
+            <a:r>
+              <a:rPr lang="en-GB" sz="2000" dirty="0" err="1"/>
+              <a:t>als</a:t>
+            </a:r>
+            <a:r>
+              <a:rPr lang="en-GB" sz="2000" dirty="0"/>
+              <a:t> Gambia is.</a:t>
+            </a:r>
+          </a:p>
+          <a:p>
+            <a:pPr marL="0" indent="0">
+              <a:buNone/>
+            </a:pPr>
+            <a:r>
+              <a:rPr lang="en-GB" sz="2000" dirty="0" err="1"/>
+              <a:t>title_en</a:t>
+            </a:r>
+            <a:r>
+              <a:rPr lang="en-GB" sz="2000" dirty="0"/>
+              <a:t> = Gambia</a:t>
+            </a:r>
+          </a:p>
+          <a:p>
+            <a:pPr marL="0" indent="0">
+              <a:buNone/>
+            </a:pPr>
+            <a:r>
+              <a:rPr lang="en-GB" sz="2000" dirty="0" err="1"/>
+              <a:t>message_en</a:t>
+            </a:r>
+            <a:r>
+              <a:rPr lang="en-GB" sz="2000" dirty="0"/>
+              <a:t> = From mid-February I went to the warmth of Gambia for 4 weeks. The trip was organized by &lt;a </a:t>
+            </a:r>
+            <a:r>
+              <a:rPr lang="en-GB" sz="2000" dirty="0" err="1"/>
+              <a:t>href</a:t>
+            </a:r>
+            <a:r>
+              <a:rPr lang="en-GB" sz="2000" dirty="0"/>
+              <a:t>="https://www.senegambiabirding.com/" ​​target="_blank"&gt;Senegambia Birding&lt;/a&gt;. The organization is special because they only work with local people, led by an enthusiastic Belgian. They show their guests nature and experience the culture. 9 languages ​​are spoken in Gambia, and in addition, the Muslim population learns a lot from their religion. That makes education difficult. There is little infrastructure: almost all roads are dirt roads, there is no garbage collection service, there is no post, there is very little work. The average income per inhabitant is 100x lower than in the Netherlands. That makes the trip special, and also affordable. The English of the guides is also good, I can say from experience. Their emphasis is photography, exactly what I wanted. I saw 240 different bird species, of which 139 were new to me. 240 new species is a lot in such a small area as Gambia.</a:t>
+            </a:r>
+          </a:p>
+        </p:txBody>
+      </p:sp>
+    </p:spTree>
+    <p:extLst>
+      <p:ext uri="{BB962C8B-B14F-4D97-AF65-F5344CB8AC3E}">
+        <p14:creationId xmlns:p14="http://schemas.microsoft.com/office/powerpoint/2010/main" val="2915221420"/>
+      </p:ext>
+    </p:extLst>
+  </p:cSld>
+  <p:clrMapOvr>
+    <a:masterClrMapping/>
+  </p:clrMapOvr>
+</p:sld>
+</file>
+
 <file path=ppt/slides/slide3.xml><?xml version="1.0" encoding="utf-8"?>
 <p:sld xmlns:a="http://schemas.openxmlformats.org/drawingml/2006/main" xmlns:r="http://schemas.openxmlformats.org/officeDocument/2006/relationships" xmlns:p="http://schemas.openxmlformats.org/presentationml/2006/main">
   <p:cSld>
@@ -11622,750 +16621,12 @@
           <a:chExt cx="0" cy="0"/>
         </a:xfrm>
       </p:grpSpPr>
-      <p:graphicFrame>
-        <p:nvGraphicFramePr>
-          <p:cNvPr id="4" name="Content Placeholder 3">
+      <p:sp>
+        <p:nvSpPr>
+          <p:cNvPr id="2" name="Title 1">
             <a:extLst>
               <a:ext uri="{FF2B5EF4-FFF2-40B4-BE49-F238E27FC236}">
-                <a16:creationId xmlns:a16="http://schemas.microsoft.com/office/drawing/2014/main" id="{C0E71C7F-F767-0336-6436-4FECD5351309}"/>
-              </a:ext>
-            </a:extLst>
-          </p:cNvPr>
-          <p:cNvGraphicFramePr>
-            <a:graphicFrameLocks noGrp="1"/>
-          </p:cNvGraphicFramePr>
-          <p:nvPr>
-            <p:ph idx="1"/>
-            <p:extLst>
-              <p:ext uri="{D42A27DB-BD31-4B8C-83A1-F6EECF244321}">
-                <p14:modId xmlns:p14="http://schemas.microsoft.com/office/powerpoint/2010/main" val="2296702942"/>
-              </p:ext>
-            </p:extLst>
-          </p:nvPr>
-        </p:nvGraphicFramePr>
-        <p:xfrm>
-          <a:off x="617220" y="992108"/>
-          <a:ext cx="11064240" cy="5496560"/>
-        </p:xfrm>
-        <a:graphic>
-          <a:graphicData uri="http://schemas.openxmlformats.org/drawingml/2006/table">
-            <a:tbl>
-              <a:tblPr firstRow="1" bandRow="1">
-                <a:tableStyleId>{5C22544A-7EE6-4342-B048-85BDC9FD1C3A}</a:tableStyleId>
-              </a:tblPr>
-              <a:tblGrid>
-                <a:gridCol w="3139440">
-                  <a:extLst>
-                    <a:ext uri="{9D8B030D-6E8A-4147-A177-3AD203B41FA5}">
-                      <a16:colId xmlns:a16="http://schemas.microsoft.com/office/drawing/2014/main" val="2840247616"/>
-                    </a:ext>
-                  </a:extLst>
-                </a:gridCol>
-                <a:gridCol w="1036320">
-                  <a:extLst>
-                    <a:ext uri="{9D8B030D-6E8A-4147-A177-3AD203B41FA5}">
-                      <a16:colId xmlns:a16="http://schemas.microsoft.com/office/drawing/2014/main" val="3158828686"/>
-                    </a:ext>
-                  </a:extLst>
-                </a:gridCol>
-                <a:gridCol w="1036320">
-                  <a:extLst>
-                    <a:ext uri="{9D8B030D-6E8A-4147-A177-3AD203B41FA5}">
-                      <a16:colId xmlns:a16="http://schemas.microsoft.com/office/drawing/2014/main" val="3723561695"/>
-                    </a:ext>
-                  </a:extLst>
-                </a:gridCol>
-                <a:gridCol w="5852160">
-                  <a:extLst>
-                    <a:ext uri="{9D8B030D-6E8A-4147-A177-3AD203B41FA5}">
-                      <a16:colId xmlns:a16="http://schemas.microsoft.com/office/drawing/2014/main" val="3936547858"/>
-                    </a:ext>
-                  </a:extLst>
-                </a:gridCol>
-              </a:tblGrid>
-              <a:tr h="370840">
-                <a:tc>
-                  <a:txBody>
-                    <a:bodyPr/>
-                    <a:lstStyle/>
-                    <a:p>
-                      <a:r>
-                        <a:rPr lang="en-GB" dirty="0"/>
-                        <a:t>Utility</a:t>
-                      </a:r>
-                      <a:endParaRPr lang="nl-NL" dirty="0"/>
-                    </a:p>
-                  </a:txBody>
-                  <a:tcPr/>
-                </a:tc>
-                <a:tc>
-                  <a:txBody>
-                    <a:bodyPr/>
-                    <a:lstStyle/>
-                    <a:p>
-                      <a:r>
-                        <a:rPr lang="en-GB" dirty="0"/>
-                        <a:t>Works on </a:t>
-                      </a:r>
-                      <a:r>
-                        <a:rPr lang="en-GB" dirty="0" err="1"/>
-                        <a:t>ini</a:t>
-                      </a:r>
-                      <a:endParaRPr lang="nl-NL" dirty="0"/>
-                    </a:p>
-                  </a:txBody>
-                  <a:tcPr/>
-                </a:tc>
-                <a:tc>
-                  <a:txBody>
-                    <a:bodyPr/>
-                    <a:lstStyle/>
-                    <a:p>
-                      <a:r>
-                        <a:rPr lang="en-GB" dirty="0"/>
-                        <a:t>Needs edits?*</a:t>
-                      </a:r>
-                      <a:endParaRPr lang="nl-NL" dirty="0"/>
-                    </a:p>
-                  </a:txBody>
-                  <a:tcPr/>
-                </a:tc>
-                <a:tc>
-                  <a:txBody>
-                    <a:bodyPr/>
-                    <a:lstStyle/>
-                    <a:p>
-                      <a:r>
-                        <a:rPr lang="en-GB" dirty="0"/>
-                        <a:t>Purpose</a:t>
-                      </a:r>
-                      <a:endParaRPr lang="nl-NL" dirty="0"/>
-                    </a:p>
-                  </a:txBody>
-                  <a:tcPr/>
-                </a:tc>
-                <a:extLst>
-                  <a:ext uri="{0D108BD9-81ED-4DB2-BD59-A6C34878D82A}">
-                    <a16:rowId xmlns:a16="http://schemas.microsoft.com/office/drawing/2014/main" val="2249949909"/>
-                  </a:ext>
-                </a:extLst>
-              </a:tr>
-              <a:tr h="370840">
-                <a:tc>
-                  <a:txBody>
-                    <a:bodyPr/>
-                    <a:lstStyle/>
-                    <a:p>
-                      <a:r>
-                        <a:rPr lang="en-GB" dirty="0"/>
-                        <a:t>svr1AddSpecies</a:t>
-                      </a:r>
-                      <a:endParaRPr lang="nl-NL" dirty="0"/>
-                    </a:p>
-                  </a:txBody>
-                  <a:tcPr/>
-                </a:tc>
-                <a:tc>
-                  <a:txBody>
-                    <a:bodyPr/>
-                    <a:lstStyle/>
-                    <a:p>
-                      <a:r>
-                        <a:rPr lang="en-GB" dirty="0"/>
-                        <a:t>Both</a:t>
-                      </a:r>
-                      <a:endParaRPr lang="nl-NL" dirty="0"/>
-                    </a:p>
-                  </a:txBody>
-                  <a:tcPr/>
-                </a:tc>
-                <a:tc>
-                  <a:txBody>
-                    <a:bodyPr/>
-                    <a:lstStyle/>
-                    <a:p>
-                      <a:r>
-                        <a:rPr lang="en-GB" dirty="0"/>
-                        <a:t>No</a:t>
-                      </a:r>
-                      <a:endParaRPr lang="nl-NL" dirty="0"/>
-                    </a:p>
-                  </a:txBody>
-                  <a:tcPr/>
-                </a:tc>
-                <a:tc>
-                  <a:txBody>
-                    <a:bodyPr/>
-                    <a:lstStyle/>
-                    <a:p>
-                      <a:pPr marL="0" marR="0" lvl="0" indent="0" algn="l" defTabSz="914400" rtl="0" eaLnBrk="1" fontAlgn="auto" latinLnBrk="0" hangingPunct="1">
-                        <a:lnSpc>
-                          <a:spcPct val="100000"/>
-                        </a:lnSpc>
-                        <a:spcBef>
-                          <a:spcPts val="0"/>
-                        </a:spcBef>
-                        <a:spcAft>
-                          <a:spcPts val="0"/>
-                        </a:spcAft>
-                        <a:buClrTx/>
-                        <a:buSzTx/>
-                        <a:buFontTx/>
-                        <a:buNone/>
-                        <a:tabLst/>
-                        <a:defRPr/>
-                      </a:pPr>
-                      <a:r>
-                        <a:rPr lang="en-GB" dirty="0"/>
-                        <a:t>Helper.  Add species to </a:t>
-                      </a:r>
-                      <a:r>
-                        <a:rPr lang="nl-NL" sz="1800" b="0" kern="1200" dirty="0">
-                          <a:solidFill>
-                            <a:schemeClr val="dk1"/>
-                          </a:solidFill>
-                          <a:effectLst/>
-                          <a:latin typeface="+mn-lt"/>
-                          <a:ea typeface="+mn-ea"/>
-                          <a:cs typeface="+mn-cs"/>
-                        </a:rPr>
-                        <a:t>speciescollection.csv </a:t>
-                      </a:r>
-                      <a:r>
-                        <a:rPr lang="nl-NL" sz="1800" b="0" kern="1200" dirty="0" err="1">
-                          <a:solidFill>
-                            <a:schemeClr val="dk1"/>
-                          </a:solidFill>
-                          <a:effectLst/>
-                          <a:latin typeface="+mn-lt"/>
-                          <a:ea typeface="+mn-ea"/>
-                          <a:cs typeface="+mn-cs"/>
-                        </a:rPr>
-                        <a:t>based</a:t>
-                      </a:r>
-                      <a:r>
-                        <a:rPr lang="nl-NL" sz="1800" b="0" kern="1200" dirty="0">
-                          <a:solidFill>
-                            <a:schemeClr val="dk1"/>
-                          </a:solidFill>
-                          <a:effectLst/>
-                          <a:latin typeface="+mn-lt"/>
-                          <a:ea typeface="+mn-ea"/>
-                          <a:cs typeface="+mn-cs"/>
-                        </a:rPr>
-                        <a:t> on list in </a:t>
-                      </a:r>
-                      <a:r>
-                        <a:rPr lang="nl-NL" sz="1800" b="0" kern="1200" dirty="0" err="1">
-                          <a:solidFill>
-                            <a:schemeClr val="dk1"/>
-                          </a:solidFill>
-                          <a:effectLst/>
-                          <a:latin typeface="+mn-lt"/>
-                          <a:ea typeface="+mn-ea"/>
-                          <a:cs typeface="+mn-cs"/>
-                        </a:rPr>
-                        <a:t>admin</a:t>
-                      </a:r>
-                      <a:r>
-                        <a:rPr lang="nl-NL" sz="1800" b="0" kern="1200" dirty="0">
-                          <a:solidFill>
-                            <a:schemeClr val="dk1"/>
-                          </a:solidFill>
-                          <a:effectLst/>
-                          <a:latin typeface="+mn-lt"/>
-                          <a:ea typeface="+mn-ea"/>
-                          <a:cs typeface="+mn-cs"/>
-                        </a:rPr>
-                        <a:t>/speclist.csv</a:t>
-                      </a:r>
-                    </a:p>
-                  </a:txBody>
-                  <a:tcPr/>
-                </a:tc>
-                <a:extLst>
-                  <a:ext uri="{0D108BD9-81ED-4DB2-BD59-A6C34878D82A}">
-                    <a16:rowId xmlns:a16="http://schemas.microsoft.com/office/drawing/2014/main" val="1354462080"/>
-                  </a:ext>
-                </a:extLst>
-              </a:tr>
-              <a:tr h="370840">
-                <a:tc>
-                  <a:txBody>
-                    <a:bodyPr/>
-                    <a:lstStyle/>
-                    <a:p>
-                      <a:r>
-                        <a:rPr lang="en-GB" dirty="0"/>
-                        <a:t>svr2CountSpecies</a:t>
-                      </a:r>
-                      <a:endParaRPr lang="nl-NL" dirty="0"/>
-                    </a:p>
-                  </a:txBody>
-                  <a:tcPr/>
-                </a:tc>
-                <a:tc>
-                  <a:txBody>
-                    <a:bodyPr/>
-                    <a:lstStyle/>
-                    <a:p>
-                      <a:r>
-                        <a:rPr lang="en-GB" dirty="0"/>
-                        <a:t>Trip</a:t>
-                      </a:r>
-                      <a:endParaRPr lang="nl-NL" dirty="0"/>
-                    </a:p>
-                  </a:txBody>
-                  <a:tcPr/>
-                </a:tc>
-                <a:tc>
-                  <a:txBody>
-                    <a:bodyPr/>
-                    <a:lstStyle/>
-                    <a:p>
-                      <a:r>
-                        <a:rPr lang="en-GB" dirty="0"/>
-                        <a:t>No</a:t>
-                      </a:r>
-                      <a:endParaRPr lang="nl-NL" dirty="0"/>
-                    </a:p>
-                  </a:txBody>
-                  <a:tcPr/>
-                </a:tc>
-                <a:tc>
-                  <a:txBody>
-                    <a:bodyPr/>
-                    <a:lstStyle/>
-                    <a:p>
-                      <a:r>
-                        <a:rPr lang="en-GB" dirty="0"/>
-                        <a:t>Stats. Count the number of species that are not yet in master</a:t>
-                      </a:r>
-                      <a:endParaRPr lang="nl-NL" dirty="0"/>
-                    </a:p>
-                  </a:txBody>
-                  <a:tcPr/>
-                </a:tc>
-                <a:extLst>
-                  <a:ext uri="{0D108BD9-81ED-4DB2-BD59-A6C34878D82A}">
-                    <a16:rowId xmlns:a16="http://schemas.microsoft.com/office/drawing/2014/main" val="2019498000"/>
-                  </a:ext>
-                </a:extLst>
-              </a:tr>
-              <a:tr h="370840">
-                <a:tc>
-                  <a:txBody>
-                    <a:bodyPr/>
-                    <a:lstStyle/>
-                    <a:p>
-                      <a:r>
-                        <a:rPr lang="en-GB" dirty="0"/>
-                        <a:t>svr3StatusProjects</a:t>
-                      </a:r>
-                      <a:endParaRPr lang="nl-NL" dirty="0"/>
-                    </a:p>
-                  </a:txBody>
-                  <a:tcPr/>
-                </a:tc>
-                <a:tc>
-                  <a:txBody>
-                    <a:bodyPr/>
-                    <a:lstStyle/>
-                    <a:p>
-                      <a:r>
-                        <a:rPr lang="en-GB" dirty="0"/>
-                        <a:t>Trip</a:t>
-                      </a:r>
-                      <a:endParaRPr lang="nl-NL" dirty="0"/>
-                    </a:p>
-                  </a:txBody>
-                  <a:tcPr/>
-                </a:tc>
-                <a:tc>
-                  <a:txBody>
-                    <a:bodyPr/>
-                    <a:lstStyle/>
-                    <a:p>
-                      <a:r>
-                        <a:rPr lang="en-GB" dirty="0"/>
-                        <a:t>No</a:t>
-                      </a:r>
-                      <a:endParaRPr lang="nl-NL" dirty="0"/>
-                    </a:p>
-                  </a:txBody>
-                  <a:tcPr/>
-                </a:tc>
-                <a:tc>
-                  <a:txBody>
-                    <a:bodyPr/>
-                    <a:lstStyle/>
-                    <a:p>
-                      <a:r>
-                        <a:rPr lang="en-GB" dirty="0"/>
-                        <a:t>Stats. Report project steps that are run for trip</a:t>
-                      </a:r>
-                      <a:endParaRPr lang="nl-NL" dirty="0"/>
-                    </a:p>
-                  </a:txBody>
-                  <a:tcPr/>
-                </a:tc>
-                <a:extLst>
-                  <a:ext uri="{0D108BD9-81ED-4DB2-BD59-A6C34878D82A}">
-                    <a16:rowId xmlns:a16="http://schemas.microsoft.com/office/drawing/2014/main" val="253633987"/>
-                  </a:ext>
-                </a:extLst>
-              </a:tr>
-              <a:tr h="370840">
-                <a:tc>
-                  <a:txBody>
-                    <a:bodyPr/>
-                    <a:lstStyle/>
-                    <a:p>
-                      <a:r>
-                        <a:rPr lang="en-GB" dirty="0"/>
-                        <a:t>svr4UpdateTrips</a:t>
-                      </a:r>
-                      <a:endParaRPr lang="nl-NL" dirty="0"/>
-                    </a:p>
-                  </a:txBody>
-                  <a:tcPr/>
-                </a:tc>
-                <a:tc>
-                  <a:txBody>
-                    <a:bodyPr/>
-                    <a:lstStyle/>
-                    <a:p>
-                      <a:r>
-                        <a:rPr lang="en-GB" dirty="0"/>
-                        <a:t>Trip</a:t>
-                      </a:r>
-                      <a:endParaRPr lang="nl-NL" dirty="0"/>
-                    </a:p>
-                  </a:txBody>
-                  <a:tcPr/>
-                </a:tc>
-                <a:tc>
-                  <a:txBody>
-                    <a:bodyPr/>
-                    <a:lstStyle/>
-                    <a:p>
-                      <a:r>
-                        <a:rPr lang="en-GB" dirty="0"/>
-                        <a:t>trip.ini</a:t>
-                      </a:r>
-                      <a:endParaRPr lang="nl-NL" dirty="0"/>
-                    </a:p>
-                  </a:txBody>
-                  <a:tcPr/>
-                </a:tc>
-                <a:tc>
-                  <a:txBody>
-                    <a:bodyPr/>
-                    <a:lstStyle/>
-                    <a:p>
-                      <a:r>
-                        <a:rPr lang="en-GB" dirty="0"/>
-                        <a:t>Needed for each trip. Update the metadata for trip and update website.  </a:t>
-                      </a:r>
-                      <a:endParaRPr lang="nl-NL" dirty="0"/>
-                    </a:p>
-                  </a:txBody>
-                  <a:tcPr/>
-                </a:tc>
-                <a:extLst>
-                  <a:ext uri="{0D108BD9-81ED-4DB2-BD59-A6C34878D82A}">
-                    <a16:rowId xmlns:a16="http://schemas.microsoft.com/office/drawing/2014/main" val="775449291"/>
-                  </a:ext>
-                </a:extLst>
-              </a:tr>
-              <a:tr h="370840">
-                <a:tc>
-                  <a:txBody>
-                    <a:bodyPr/>
-                    <a:lstStyle/>
-                    <a:p>
-                      <a:r>
-                        <a:rPr lang="nl-NL" dirty="0"/>
-                        <a:t>svr5MergeSpeciesCollections</a:t>
-                      </a:r>
-                    </a:p>
-                  </a:txBody>
-                  <a:tcPr/>
-                </a:tc>
-                <a:tc>
-                  <a:txBody>
-                    <a:bodyPr/>
-                    <a:lstStyle/>
-                    <a:p>
-                      <a:endParaRPr lang="nl-NL"/>
-                    </a:p>
-                  </a:txBody>
-                  <a:tcPr/>
-                </a:tc>
-                <a:tc>
-                  <a:txBody>
-                    <a:bodyPr/>
-                    <a:lstStyle/>
-                    <a:p>
-                      <a:r>
-                        <a:rPr lang="en-GB" dirty="0"/>
-                        <a:t>Yes</a:t>
-                      </a:r>
-                      <a:endParaRPr lang="nl-NL" dirty="0"/>
-                    </a:p>
-                  </a:txBody>
-                  <a:tcPr/>
-                </a:tc>
-                <a:tc>
-                  <a:txBody>
-                    <a:bodyPr/>
-                    <a:lstStyle/>
-                    <a:p>
-                      <a:r>
-                        <a:rPr lang="en-GB" dirty="0"/>
-                        <a:t>Needed for </a:t>
-                      </a:r>
-                      <a:r>
-                        <a:rPr lang="en-GB"/>
-                        <a:t>new English/</a:t>
-                      </a:r>
-                      <a:r>
-                        <a:rPr lang="en-GB" dirty="0"/>
-                        <a:t>Dutch names.  Merge the species from 2 lists, </a:t>
-                      </a:r>
-                      <a:r>
-                        <a:rPr lang="en-GB" dirty="0" err="1"/>
-                        <a:t>eg</a:t>
-                      </a:r>
-                      <a:r>
-                        <a:rPr lang="en-GB" dirty="0"/>
-                        <a:t> master and trip</a:t>
-                      </a:r>
-                      <a:endParaRPr lang="nl-NL" dirty="0"/>
-                    </a:p>
-                  </a:txBody>
-                  <a:tcPr/>
-                </a:tc>
-                <a:extLst>
-                  <a:ext uri="{0D108BD9-81ED-4DB2-BD59-A6C34878D82A}">
-                    <a16:rowId xmlns:a16="http://schemas.microsoft.com/office/drawing/2014/main" val="466339600"/>
-                  </a:ext>
-                </a:extLst>
-              </a:tr>
-              <a:tr h="370840">
-                <a:tc>
-                  <a:txBody>
-                    <a:bodyPr/>
-                    <a:lstStyle/>
-                    <a:p>
-                      <a:r>
-                        <a:rPr lang="nl-NL" dirty="0"/>
-                        <a:t>svr6MergeBlogsForMaster</a:t>
-                      </a:r>
-                    </a:p>
-                  </a:txBody>
-                  <a:tcPr/>
-                </a:tc>
-                <a:tc>
-                  <a:txBody>
-                    <a:bodyPr/>
-                    <a:lstStyle/>
-                    <a:p>
-                      <a:r>
-                        <a:rPr lang="en-GB" dirty="0"/>
-                        <a:t>Master</a:t>
-                      </a:r>
-                      <a:endParaRPr lang="nl-NL" dirty="0"/>
-                    </a:p>
-                  </a:txBody>
-                  <a:tcPr/>
-                </a:tc>
-                <a:tc>
-                  <a:txBody>
-                    <a:bodyPr/>
-                    <a:lstStyle/>
-                    <a:p>
-                      <a:r>
-                        <a:rPr lang="en-GB" dirty="0"/>
-                        <a:t>No</a:t>
-                      </a:r>
-                      <a:endParaRPr lang="nl-NL" dirty="0"/>
-                    </a:p>
-                  </a:txBody>
-                  <a:tcPr/>
-                </a:tc>
-                <a:tc>
-                  <a:txBody>
-                    <a:bodyPr/>
-                    <a:lstStyle/>
-                    <a:p>
-                      <a:r>
-                        <a:rPr lang="en-GB" dirty="0"/>
-                        <a:t>Needs at least once for each trip, blog count update not automatic.  Create a different blog report for master, blogs per trips rather than all blogs</a:t>
-                      </a:r>
-                      <a:endParaRPr lang="nl-NL" dirty="0"/>
-                    </a:p>
-                  </a:txBody>
-                  <a:tcPr/>
-                </a:tc>
-                <a:extLst>
-                  <a:ext uri="{0D108BD9-81ED-4DB2-BD59-A6C34878D82A}">
-                    <a16:rowId xmlns:a16="http://schemas.microsoft.com/office/drawing/2014/main" val="1830438468"/>
-                  </a:ext>
-                </a:extLst>
-              </a:tr>
-              <a:tr h="370840">
-                <a:tc>
-                  <a:txBody>
-                    <a:bodyPr/>
-                    <a:lstStyle/>
-                    <a:p>
-                      <a:r>
-                        <a:rPr lang="en-GB" dirty="0"/>
-                        <a:t>svr7DeleteFiles</a:t>
-                      </a:r>
-                      <a:endParaRPr lang="nl-NL" dirty="0"/>
-                    </a:p>
-                  </a:txBody>
-                  <a:tcPr/>
-                </a:tc>
-                <a:tc>
-                  <a:txBody>
-                    <a:bodyPr/>
-                    <a:lstStyle/>
-                    <a:p>
-                      <a:r>
-                        <a:rPr lang="en-GB" dirty="0"/>
-                        <a:t>Both</a:t>
-                      </a:r>
-                      <a:endParaRPr lang="nl-NL" dirty="0"/>
-                    </a:p>
-                  </a:txBody>
-                  <a:tcPr/>
-                </a:tc>
-                <a:tc>
-                  <a:txBody>
-                    <a:bodyPr/>
-                    <a:lstStyle/>
-                    <a:p>
-                      <a:endParaRPr lang="nl-NL"/>
-                    </a:p>
-                  </a:txBody>
-                  <a:tcPr/>
-                </a:tc>
-                <a:tc>
-                  <a:txBody>
-                    <a:bodyPr/>
-                    <a:lstStyle/>
-                    <a:p>
-                      <a:r>
-                        <a:rPr lang="en-GB" dirty="0"/>
-                        <a:t>Clean duplicate files. (does not yet exist) Delete files that have been copied to master</a:t>
-                      </a:r>
-                      <a:endParaRPr lang="nl-NL" dirty="0"/>
-                    </a:p>
-                  </a:txBody>
-                  <a:tcPr/>
-                </a:tc>
-                <a:extLst>
-                  <a:ext uri="{0D108BD9-81ED-4DB2-BD59-A6C34878D82A}">
-                    <a16:rowId xmlns:a16="http://schemas.microsoft.com/office/drawing/2014/main" val="1080765452"/>
-                  </a:ext>
-                </a:extLst>
-              </a:tr>
-              <a:tr h="370840">
-                <a:tc>
-                  <a:txBody>
-                    <a:bodyPr/>
-                    <a:lstStyle/>
-                    <a:p>
-                      <a:endParaRPr lang="nl-NL" dirty="0"/>
-                    </a:p>
-                  </a:txBody>
-                  <a:tcPr/>
-                </a:tc>
-                <a:tc>
-                  <a:txBody>
-                    <a:bodyPr/>
-                    <a:lstStyle/>
-                    <a:p>
-                      <a:endParaRPr lang="nl-NL" dirty="0"/>
-                    </a:p>
-                  </a:txBody>
-                  <a:tcPr/>
-                </a:tc>
-                <a:tc>
-                  <a:txBody>
-                    <a:bodyPr/>
-                    <a:lstStyle/>
-                    <a:p>
-                      <a:endParaRPr lang="nl-NL"/>
-                    </a:p>
-                  </a:txBody>
-                  <a:tcPr/>
-                </a:tc>
-                <a:tc>
-                  <a:txBody>
-                    <a:bodyPr/>
-                    <a:lstStyle/>
-                    <a:p>
-                      <a:endParaRPr lang="nl-NL" dirty="0"/>
-                    </a:p>
-                  </a:txBody>
-                  <a:tcPr/>
-                </a:tc>
-                <a:extLst>
-                  <a:ext uri="{0D108BD9-81ED-4DB2-BD59-A6C34878D82A}">
-                    <a16:rowId xmlns:a16="http://schemas.microsoft.com/office/drawing/2014/main" val="3096990806"/>
-                  </a:ext>
-                </a:extLst>
-              </a:tr>
-            </a:tbl>
-          </a:graphicData>
-        </a:graphic>
-      </p:graphicFrame>
-      <p:sp>
-        <p:nvSpPr>
-          <p:cNvPr id="5" name="TextBox 4">
-            <a:extLst>
-              <a:ext uri="{FF2B5EF4-FFF2-40B4-BE49-F238E27FC236}">
-                <a16:creationId xmlns:a16="http://schemas.microsoft.com/office/drawing/2014/main" id="{ABBCF386-00BA-C3FC-2471-8972B85A1A8E}"/>
-              </a:ext>
-            </a:extLst>
-          </p:cNvPr>
-          <p:cNvSpPr txBox="1"/>
-          <p:nvPr/>
-        </p:nvSpPr>
-        <p:spPr>
-          <a:xfrm>
-            <a:off x="510540" y="6488668"/>
-            <a:ext cx="11064240" cy="369332"/>
-          </a:xfrm>
-          <a:prstGeom prst="rect">
-            <a:avLst/>
-          </a:prstGeom>
-          <a:noFill/>
-        </p:spPr>
-        <p:txBody>
-          <a:bodyPr wrap="square" rtlCol="0">
-            <a:spAutoFit/>
-          </a:bodyPr>
-          <a:lstStyle/>
-          <a:p>
-            <a:r>
-              <a:rPr lang="en-GB" dirty="0"/>
-              <a:t>* /trips/ is fixed and assumed to the high level directory for trips, that are second level directories</a:t>
-            </a:r>
-            <a:endParaRPr lang="nl-NL" dirty="0"/>
-          </a:p>
-        </p:txBody>
-      </p:sp>
-      <p:sp>
-        <p:nvSpPr>
-          <p:cNvPr id="7" name="Title 6">
-            <a:extLst>
-              <a:ext uri="{FF2B5EF4-FFF2-40B4-BE49-F238E27FC236}">
-                <a16:creationId xmlns:a16="http://schemas.microsoft.com/office/drawing/2014/main" id="{5C2D0917-B20E-3BD3-E915-1DB1A543ECBD}"/>
+                <a16:creationId xmlns:a16="http://schemas.microsoft.com/office/drawing/2014/main" id="{13A22A6D-9B2A-672E-5C83-C59FBC580E6A}"/>
               </a:ext>
             </a:extLst>
           </p:cNvPr>
@@ -12376,30 +16637,69 @@
             <p:ph type="title"/>
           </p:nvPr>
         </p:nvSpPr>
-        <p:spPr>
-          <a:xfrm>
-            <a:off x="617220" y="182245"/>
-            <a:ext cx="10515600" cy="686435"/>
-          </a:xfrm>
-        </p:spPr>
+        <p:spPr/>
+        <p:txBody>
+          <a:bodyPr/>
+          <a:lstStyle/>
+          <a:p>
+            <a:r>
+              <a:rPr lang="en-GB" dirty="0"/>
+              <a:t>Process steps: the Camera</a:t>
+            </a:r>
+            <a:endParaRPr lang="nl-NL" dirty="0"/>
+          </a:p>
+        </p:txBody>
+      </p:sp>
+      <p:sp>
+        <p:nvSpPr>
+          <p:cNvPr id="3" name="Content Placeholder 2">
+            <a:extLst>
+              <a:ext uri="{FF2B5EF4-FFF2-40B4-BE49-F238E27FC236}">
+                <a16:creationId xmlns:a16="http://schemas.microsoft.com/office/drawing/2014/main" id="{2A305FA8-BA23-B776-7837-68A4F0AF702E}"/>
+              </a:ext>
+            </a:extLst>
+          </p:cNvPr>
+          <p:cNvSpPr>
+            <a:spLocks noGrp="1"/>
+          </p:cNvSpPr>
+          <p:nvPr>
+            <p:ph idx="1"/>
+          </p:nvPr>
+        </p:nvSpPr>
+        <p:spPr/>
         <p:txBody>
           <a:bodyPr>
-            <a:normAutofit fontScale="90000"/>
+            <a:normAutofit/>
           </a:bodyPr>
           <a:lstStyle/>
           <a:p>
-            <a:r>
-              <a:rPr lang="en-GB" dirty="0"/>
-              <a:t>Utilities</a:t>
-            </a:r>
-            <a:endParaRPr lang="nl-NL" dirty="0"/>
+            <a:pPr marL="0" indent="0">
+              <a:buNone/>
+            </a:pPr>
+            <a:r>
+              <a:rPr lang="en-GB" sz="2400" dirty="0"/>
+              <a:t>Starting with right settings is key:</a:t>
+            </a:r>
+          </a:p>
+          <a:p>
+            <a:r>
+              <a:rPr lang="en-GB" sz="2400" dirty="0"/>
+              <a:t>Make sure GPS is enabled on your camera and as applicable on your phone.</a:t>
+            </a:r>
+          </a:p>
+          <a:p>
+            <a:r>
+              <a:rPr lang="en-GB" sz="2400" dirty="0"/>
+              <a:t>Use Raw if all possible</a:t>
+            </a:r>
+            <a:endParaRPr lang="nl-NL" sz="2000" dirty="0"/>
           </a:p>
         </p:txBody>
       </p:sp>
     </p:spTree>
     <p:extLst>
       <p:ext uri="{BB962C8B-B14F-4D97-AF65-F5344CB8AC3E}">
-        <p14:creationId xmlns:p14="http://schemas.microsoft.com/office/powerpoint/2010/main" val="4112590493"/>
+        <p14:creationId xmlns:p14="http://schemas.microsoft.com/office/powerpoint/2010/main" val="222332615"/>
       </p:ext>
     </p:extLst>
   </p:cSld>
